--- a/folien/02-adressierung-subnetting.pptx
+++ b/folien/02-adressierung-subnetting.pptx
@@ -13639,8 +13639,8 @@
         </p:blipFill>
         <p:spPr>
           <a:xfrm>
-            <a:off x="566928" y="1572768"/>
-            <a:ext cx="8010144" cy="2286000"/>
+            <a:off x="566928" y="1554480"/>
+            <a:ext cx="8010144" cy="2359152"/>
           </a:xfrm>
           <a:prstGeom prst="rect">
             <a:avLst/>
@@ -13953,8 +13953,8 @@
         </p:blipFill>
         <p:spPr>
           <a:xfrm>
-            <a:off x="566928" y="1554480"/>
-            <a:ext cx="8010144" cy="2148840"/>
+            <a:off x="566928" y="1536192"/>
+            <a:ext cx="8010144" cy="2286000"/>
           </a:xfrm>
           <a:prstGeom prst="rect">
             <a:avLst/>
@@ -14014,7 +14014,7 @@
                 <a:ea typeface="Arial" pitchFamily="34" charset="-122"/>
                 <a:cs typeface="Arial" pitchFamily="34" charset="-120"/>
               </a:rPr>
-              <a:t>Die Maske zieht die Grenze: Alles unter den Einsen ist Netz, der Rest gehört dem Gerät.</a:t>
+              <a:t>Vorn das Netz, hinten die Nummer des einzelnen Geräts – egal ob Laptop, Drucker oder Server.</a:t>
             </a:r>
             <a:endParaRPr lang="en-US" sz="1200" dirty="0"/>
           </a:p>

--- a/folien/02-adressierung-subnetting.pptx
+++ b/folien/02-adressierung-subnetting.pptx
@@ -15698,8 +15698,8 @@
         </p:blipFill>
         <p:spPr>
           <a:xfrm>
-            <a:off x="566928" y="1600200"/>
-            <a:ext cx="8010144" cy="1600200"/>
+            <a:off x="566928" y="1691640"/>
+            <a:ext cx="8010144" cy="1956816"/>
           </a:xfrm>
           <a:prstGeom prst="rect">
             <a:avLst/>
@@ -15714,28 +15714,8 @@
         </p:nvSpPr>
         <p:spPr>
           <a:xfrm>
-            <a:off x="566928" y="3383280"/>
-            <a:ext cx="8010144" cy="914400"/>
-          </a:xfrm>
-          <a:prstGeom prst="rect">
-            <a:avLst/>
-          </a:prstGeom>
-          <a:solidFill>
-            <a:srgbClr val="EEF0FB"/>
-          </a:solidFill>
-          <a:ln/>
-        </p:spPr>
-      </p:sp>
-      <p:sp>
-        <p:nvSpPr>
-          <p:cNvPr id="7" name="Shape 4"/>
-          <p:cNvSpPr/>
-          <p:nvPr/>
-        </p:nvSpPr>
-        <p:spPr>
-          <a:xfrm>
-            <a:off x="566928" y="3383280"/>
-            <a:ext cx="41148" cy="914400"/>
+            <a:off x="566928" y="4069080"/>
+            <a:ext cx="32004" cy="256032"/>
           </a:xfrm>
           <a:prstGeom prst="rect">
             <a:avLst/>
@@ -15748,72 +15728,30 @@
       </p:sp>
       <p:sp>
         <p:nvSpPr>
-          <p:cNvPr id="8" name="Text 5"/>
-          <p:cNvSpPr/>
-          <p:nvPr/>
-        </p:nvSpPr>
-        <p:spPr>
-          <a:xfrm>
-            <a:off x="804672" y="3529584"/>
-            <a:ext cx="7607808" cy="242062"/>
-          </a:xfrm>
-          <a:prstGeom prst="rect">
-            <a:avLst/>
-          </a:prstGeom>
-          <a:noFill/>
-          <a:ln/>
-        </p:spPr>
-        <p:txBody>
-          <a:bodyPr wrap="square" lIns="0" tIns="0" rIns="0" bIns="0" rtlCol="0" anchor="t"/>
-          <a:lstStyle/>
-          <a:p>
-            <a:pPr indent="0" marL="0">
-              <a:buNone/>
-            </a:pPr>
-            <a:r>
-              <a:rPr lang="en-US" sz="1300" b="1" dirty="0">
-                <a:solidFill>
-                  <a:srgbClr val="272E52"/>
-                </a:solidFill>
-                <a:latin typeface="Arial" pitchFamily="34" charset="0"/>
-                <a:ea typeface="Arial" pitchFamily="34" charset="-122"/>
-                <a:cs typeface="Arial" pitchFamily="34" charset="-120"/>
-              </a:rPr>
-              <a:t>Und das Gateway?</a:t>
-            </a:r>
-            <a:endParaRPr lang="en-US" sz="1300" dirty="0"/>
-          </a:p>
-        </p:txBody>
-      </p:sp>
-      <p:sp>
-        <p:nvSpPr>
-          <p:cNvPr id="9" name="Text 6"/>
-          <p:cNvSpPr/>
-          <p:nvPr/>
-        </p:nvSpPr>
-        <p:spPr>
-          <a:xfrm>
-            <a:off x="804672" y="3817366"/>
-            <a:ext cx="7607808" cy="361442"/>
-          </a:xfrm>
-          <a:prstGeom prst="rect">
-            <a:avLst/>
-          </a:prstGeom>
-          <a:noFill/>
-          <a:ln/>
-        </p:spPr>
-        <p:txBody>
-          <a:bodyPr wrap="square" lIns="0" tIns="0" rIns="0" bIns="0" rtlCol="0" anchor="t"/>
-          <a:lstStyle/>
-          <a:p>
-            <a:pPr indent="0" marL="0">
-              <a:lnSpc>
-                <a:spcPct val="92000"/>
-              </a:lnSpc>
-              <a:buNone/>
-            </a:pPr>
-            <a:r>
-              <a:rPr lang="en-US" sz="1150" dirty="0">
+          <p:cNvPr id="7" name="Text 4"/>
+          <p:cNvSpPr/>
+          <p:nvPr/>
+        </p:nvSpPr>
+        <p:spPr>
+          <a:xfrm>
+            <a:off x="749808" y="4023360"/>
+            <a:ext cx="7827264" cy="402336"/>
+          </a:xfrm>
+          <a:prstGeom prst="rect">
+            <a:avLst/>
+          </a:prstGeom>
+          <a:noFill/>
+          <a:ln/>
+        </p:spPr>
+        <p:txBody>
+          <a:bodyPr wrap="square" lIns="0" tIns="0" rIns="0" bIns="0" rtlCol="0" anchor="ctr"/>
+          <a:lstStyle/>
+          <a:p>
+            <a:pPr indent="0" marL="0">
+              <a:buNone/>
+            </a:pPr>
+            <a:r>
+              <a:rPr lang="en-US" sz="1200" b="1" dirty="0">
                 <a:solidFill>
                   <a:srgbClr val="434A63"/>
                 </a:solidFill>
@@ -15821,15 +15759,15 @@
                 <a:ea typeface="Arial" pitchFamily="34" charset="-122"/>
                 <a:cs typeface="Arial" pitchFamily="34" charset="-120"/>
               </a:rPr>
-              <a:t>Der Router braucht auch eine Adresse aus dem Block – meist die erste nutzbare. Wer Geräte zählt, plant ihn mit ein: 62 nutzbare heißt 61 für eure Geräte plus das Gateway.</a:t>
-            </a:r>
-            <a:endParaRPr lang="en-US" sz="1150" dirty="0"/>
-          </a:p>
-        </p:txBody>
-      </p:sp>
-      <p:sp>
-        <p:nvSpPr>
-          <p:cNvPr id="10" name="Shape 7"/>
+              <a:t>Wer 64 sagt, hat die zwei Reservierten vergessen – und wer Geräte plant, rechnet das Gateway mit ein: 61 bleiben frei.</a:t>
+            </a:r>
+            <a:endParaRPr lang="en-US" sz="1200" dirty="0"/>
+          </a:p>
+        </p:txBody>
+      </p:sp>
+      <p:sp>
+        <p:nvSpPr>
+          <p:cNvPr id="8" name="Shape 5"/>
           <p:cNvSpPr/>
           <p:nvPr/>
         </p:nvSpPr>
@@ -15852,7 +15790,7 @@
       </p:sp>
       <p:sp>
         <p:nvSpPr>
-          <p:cNvPr id="11" name="Text 8"/>
+          <p:cNvPr id="9" name="Text 6"/>
           <p:cNvSpPr/>
           <p:nvPr/>
         </p:nvSpPr>
@@ -15891,7 +15829,7 @@
       </p:sp>
       <p:sp>
         <p:nvSpPr>
-          <p:cNvPr id="12" name="Text 9"/>
+          <p:cNvPr id="10" name="Text 7"/>
           <p:cNvSpPr/>
           <p:nvPr/>
         </p:nvSpPr>

--- a/folien/02-adressierung-subnetting.pptx
+++ b/folien/02-adressierung-subnetting.pptx
@@ -33,9 +33,10 @@
     <p:sldId id="281" r:id="rId27"/>
     <p:sldId id="282" r:id="rId28"/>
     <p:sldId id="283" r:id="rId29"/>
+    <p:sldId id="284" r:id="rId30"/>
   </p:sldIdLst>
   <p:notesMasterIdLst>
-    <p:notesMasterId r:id="rId30"/>
+    <p:notesMasterId r:id="rId31"/>
   </p:notesMasterIdLst>
   <p:sldSz cx="9144000" cy="5143500"/>
   <p:notesSz cx="5143500" cy="9144000"/>
@@ -2313,6 +2314,94 @@
             <a:fld id="{F7021451-1387-4CA6-816F-3879F97B5CBC}" type="slidenum">
               <a:rPr lang="en-US"/>
               <a:t>28</a:t>
+            </a:fld>
+            <a:endParaRPr lang="en-US"/>
+          </a:p>
+        </p:txBody>
+      </p:sp>
+    </p:spTree>
+    <p:extLst>
+      <p:ext uri="{BB962C8B-B14F-4D97-AF65-F5344CB8AC3E}">
+        <p14:creationId xmlns:p14="http://schemas.microsoft.com/office/powerpoint/2010/main" val="1024086991"/>
+      </p:ext>
+    </p:extLst>
+  </p:cSld>
+  <p:clrMapOvr>
+    <a:masterClrMapping/>
+  </p:clrMapOvr>
+</p:notes>
+</file>
+
+<file path=ppt/notesSlides/notesSlide29.xml><?xml version="1.0" encoding="utf-8"?>
+<p:notes xmlns:a="http://schemas.openxmlformats.org/drawingml/2006/main" xmlns:r="http://schemas.openxmlformats.org/officeDocument/2006/relationships" xmlns:p="http://schemas.openxmlformats.org/presentationml/2006/main">
+  <p:cSld>
+    <p:spTree>
+      <p:nvGrpSpPr>
+        <p:cNvPr id="1" name=""/>
+        <p:cNvGrpSpPr/>
+        <p:nvPr/>
+      </p:nvGrpSpPr>
+      <p:grpSpPr>
+        <a:xfrm>
+          <a:off x="0" y="0"/>
+          <a:ext cx="0" cy="0"/>
+          <a:chOff x="0" y="0"/>
+          <a:chExt cx="0" cy="0"/>
+        </a:xfrm>
+      </p:grpSpPr>
+      <p:sp>
+        <p:nvSpPr>
+          <p:cNvPr id="2" name="Slide Image Placeholder 1"/>
+          <p:cNvSpPr>
+            <a:spLocks noGrp="1" noRot="1" noChangeAspect="1"/>
+          </p:cNvSpPr>
+          <p:nvPr>
+            <p:ph type="sldImg"/>
+          </p:nvPr>
+        </p:nvSpPr>
+        <p:spPr/>
+      </p:sp>
+      <p:sp>
+        <p:nvSpPr>
+          <p:cNvPr id="3" name="Notes Placeholder 2"/>
+          <p:cNvSpPr>
+            <a:spLocks noGrp="1"/>
+          </p:cNvSpPr>
+          <p:nvPr>
+            <p:ph type="body" idx="1"/>
+          </p:nvPr>
+        </p:nvSpPr>
+        <p:spPr/>
+        <p:txBody>
+          <a:bodyPr/>
+          <a:lstStyle/>
+          <a:p>
+            <a:r>
+              <a:rPr lang="en-US" dirty="0"/>
+              <a:t/>
+            </a:r>
+            <a:endParaRPr lang="en-US" dirty="0"/>
+          </a:p>
+        </p:txBody>
+      </p:sp>
+      <p:sp>
+        <p:nvSpPr>
+          <p:cNvPr id="4" name="Slide Number Placeholder 3"/>
+          <p:cNvSpPr>
+            <a:spLocks noGrp="1"/>
+          </p:cNvSpPr>
+          <p:nvPr>
+            <p:ph type="sldNum" sz="quarter" idx="10"/>
+          </p:nvPr>
+        </p:nvSpPr>
+        <p:spPr/>
+        <p:txBody>
+          <a:bodyPr/>
+          <a:lstStyle/>
+          <a:p>
+            <a:fld id="{F7021451-1387-4CA6-816F-3879F97B5CBC}" type="slidenum">
+              <a:rPr lang="en-US"/>
+              <a:t>29</a:t>
             </a:fld>
             <a:endParaRPr lang="en-US"/>
           </a:p>
@@ -3647,8 +3736,8 @@
         </p:blipFill>
         <p:spPr>
           <a:xfrm>
-            <a:off x="566928" y="1572768"/>
-            <a:ext cx="8010144" cy="2286000"/>
+            <a:off x="566928" y="1536192"/>
+            <a:ext cx="8010144" cy="2468880"/>
           </a:xfrm>
           <a:prstGeom prst="rect">
             <a:avLst/>
@@ -3663,7 +3752,7 @@
         </p:nvSpPr>
         <p:spPr>
           <a:xfrm>
-            <a:off x="566928" y="4160520"/>
+            <a:off x="566928" y="4206240"/>
             <a:ext cx="32004" cy="256032"/>
           </a:xfrm>
           <a:prstGeom prst="rect">
@@ -3683,7 +3772,7 @@
         </p:nvSpPr>
         <p:spPr>
           <a:xfrm>
-            <a:off x="749808" y="4114800"/>
+            <a:off x="749808" y="4160520"/>
             <a:ext cx="7827264" cy="402336"/>
           </a:xfrm>
           <a:prstGeom prst="rect">
@@ -3809,7 +3898,7 @@
                 <a:ea typeface="Arial" pitchFamily="34" charset="-122"/>
                 <a:cs typeface="Arial" pitchFamily="34" charset="-120"/>
               </a:rPr>
-              <a:t>7/21</a:t>
+              <a:t>7/22</a:t>
             </a:r>
             <a:endParaRPr lang="en-US" sz="1050" dirty="0"/>
           </a:p>
@@ -4123,7 +4212,7 @@
                 <a:ea typeface="Arial" pitchFamily="34" charset="-122"/>
                 <a:cs typeface="Arial" pitchFamily="34" charset="-120"/>
               </a:rPr>
-              <a:t>8/21</a:t>
+              <a:t>8/22</a:t>
             </a:r>
             <a:endParaRPr lang="en-US" sz="1050" dirty="0"/>
           </a:p>
@@ -4402,7 +4491,7 @@
                 <a:ea typeface="Arial" pitchFamily="34" charset="-122"/>
                 <a:cs typeface="Arial" pitchFamily="34" charset="-120"/>
               </a:rPr>
-              <a:t>9/21</a:t>
+              <a:t>9/22</a:t>
             </a:r>
             <a:endParaRPr lang="en-US" sz="1050" dirty="0"/>
           </a:p>
@@ -4716,7 +4805,7 @@
                 <a:ea typeface="Arial" pitchFamily="34" charset="-122"/>
                 <a:cs typeface="Arial" pitchFamily="34" charset="-120"/>
               </a:rPr>
-              <a:t>10/21</a:t>
+              <a:t>10/22</a:t>
             </a:r>
             <a:endParaRPr lang="en-US" sz="1050" dirty="0"/>
           </a:p>
@@ -5030,7 +5119,7 @@
                 <a:ea typeface="Arial" pitchFamily="34" charset="-122"/>
                 <a:cs typeface="Arial" pitchFamily="34" charset="-120"/>
               </a:rPr>
-              <a:t>11/21</a:t>
+              <a:t>11/22</a:t>
             </a:r>
             <a:endParaRPr lang="en-US" sz="1050" dirty="0"/>
           </a:p>
@@ -5344,7 +5433,7 @@
                 <a:ea typeface="Arial" pitchFamily="34" charset="-122"/>
                 <a:cs typeface="Arial" pitchFamily="34" charset="-120"/>
               </a:rPr>
-              <a:t>12/21</a:t>
+              <a:t>12/22</a:t>
             </a:r>
             <a:endParaRPr lang="en-US" sz="1050" dirty="0"/>
           </a:p>
@@ -5658,7 +5747,7 @@
                 <a:ea typeface="Arial" pitchFamily="34" charset="-122"/>
                 <a:cs typeface="Arial" pitchFamily="34" charset="-120"/>
               </a:rPr>
-              <a:t>13/21</a:t>
+              <a:t>13/22</a:t>
             </a:r>
             <a:endParaRPr lang="en-US" sz="1050" dirty="0"/>
           </a:p>
@@ -6181,7 +6270,7 @@
                 <a:ea typeface="Arial" pitchFamily="34" charset="-122"/>
                 <a:cs typeface="Arial" pitchFamily="34" charset="-120"/>
               </a:rPr>
-              <a:t>14/21</a:t>
+              <a:t>14/22</a:t>
             </a:r>
             <a:endParaRPr lang="en-US" sz="1050" dirty="0"/>
           </a:p>
@@ -6311,7 +6400,7 @@
                 <a:ea typeface="Arial" pitchFamily="34" charset="-122"/>
                 <a:cs typeface="Arial" pitchFamily="34" charset="-120"/>
               </a:rPr>
-              <a:t>IPv6 in fünf Minuten</a:t>
+              <a:t>Warum IPv6?</a:t>
             </a:r>
             <a:endParaRPr lang="en-US" sz="2600" dirty="0"/>
           </a:p>
@@ -6319,7 +6408,7 @@
       </p:sp>
       <p:pic>
         <p:nvPicPr>
-          <p:cNvPr id="5" name="Image 0" descr="/Users/jacobmenge/Desktop/kurs-26.2b-orga/folienwerkstatt/assets/diagramme/ipv6-aufbau.png">    </p:cNvPr>
+          <p:cNvPr id="5" name="Image 0" descr="/Users/jacobmenge/Desktop/kurs-26.2b-orga/folienwerkstatt/assets/diagramme/ipv6-warum.png">    </p:cNvPr>
           <p:cNvPicPr>
             <a:picLocks noChangeAspect="1"/>
           </p:cNvPicPr>
@@ -6799,7 +6888,7 @@
                 <a:ea typeface="Arial" pitchFamily="34" charset="-122"/>
                 <a:cs typeface="Arial" pitchFamily="34" charset="-120"/>
               </a:rPr>
-              <a:t>15/21</a:t>
+              <a:t>15/22</a:t>
             </a:r>
             <a:endParaRPr lang="en-US" sz="1050" dirty="0"/>
           </a:p>
@@ -7891,7 +7980,7 @@
                 <a:ea typeface="Arial" pitchFamily="34" charset="-122"/>
                 <a:cs typeface="Arial" pitchFamily="34" charset="-120"/>
               </a:rPr>
-              <a:t>1/21</a:t>
+              <a:t>1/22</a:t>
             </a:r>
             <a:endParaRPr lang="en-US" sz="1050" dirty="0"/>
           </a:p>
@@ -7937,162 +8026,228 @@
         </p:nvSpPr>
         <p:spPr>
           <a:xfrm>
-            <a:off x="6355080" y="0"/>
-            <a:ext cx="2788920" cy="5143500"/>
+            <a:off x="566928" y="201168"/>
+            <a:ext cx="475488" cy="50292"/>
           </a:xfrm>
           <a:prstGeom prst="rect">
             <a:avLst/>
           </a:prstGeom>
           <a:solidFill>
-            <a:srgbClr val="FBF2E3"/>
+            <a:srgbClr val="3843AF"/>
           </a:solidFill>
           <a:ln/>
         </p:spPr>
       </p:sp>
       <p:sp>
         <p:nvSpPr>
-          <p:cNvPr id="3" name="Shape 1"/>
-          <p:cNvSpPr/>
-          <p:nvPr/>
-        </p:nvSpPr>
-        <p:spPr>
-          <a:xfrm>
-            <a:off x="6355080" y="0"/>
-            <a:ext cx="45720" cy="5143500"/>
+          <p:cNvPr id="3" name="Text 1"/>
+          <p:cNvSpPr/>
+          <p:nvPr/>
+        </p:nvSpPr>
+        <p:spPr>
+          <a:xfrm>
+            <a:off x="566928" y="384048"/>
+            <a:ext cx="8010144" cy="237744"/>
+          </a:xfrm>
+          <a:prstGeom prst="rect">
+            <a:avLst/>
+          </a:prstGeom>
+          <a:noFill/>
+          <a:ln/>
+        </p:spPr>
+        <p:txBody>
+          <a:bodyPr wrap="square" lIns="0" tIns="0" rIns="0" bIns="0" rtlCol="0" anchor="ctr"/>
+          <a:lstStyle/>
+          <a:p>
+            <a:pPr indent="0" marL="0">
+              <a:buNone/>
+            </a:pPr>
+            <a:r>
+              <a:rPr lang="en-US" sz="1150" b="1" spc="180" kern="0" dirty="0">
+                <a:solidFill>
+                  <a:srgbClr val="3843AF"/>
+                </a:solidFill>
+                <a:latin typeface="Arial" pitchFamily="34" charset="0"/>
+                <a:ea typeface="Arial" pitchFamily="34" charset="-122"/>
+                <a:cs typeface="Arial" pitchFamily="34" charset="-120"/>
+              </a:rPr>
+              <a:t>HEXADEZIMAL, KURZ ERKLÄRT</a:t>
+            </a:r>
+            <a:endParaRPr lang="en-US" sz="1150" dirty="0"/>
+          </a:p>
+        </p:txBody>
+      </p:sp>
+      <p:sp>
+        <p:nvSpPr>
+          <p:cNvPr id="4" name="Text 2"/>
+          <p:cNvSpPr/>
+          <p:nvPr/>
+        </p:nvSpPr>
+        <p:spPr>
+          <a:xfrm>
+            <a:off x="566928" y="731520"/>
+            <a:ext cx="8010144" cy="603504"/>
+          </a:xfrm>
+          <a:prstGeom prst="rect">
+            <a:avLst/>
+          </a:prstGeom>
+          <a:noFill/>
+          <a:ln/>
+        </p:spPr>
+        <p:txBody>
+          <a:bodyPr wrap="square" lIns="0" tIns="0" rIns="0" bIns="0" rtlCol="0" anchor="t"/>
+          <a:lstStyle/>
+          <a:p>
+            <a:pPr indent="0" marL="0">
+              <a:buNone/>
+            </a:pPr>
+            <a:r>
+              <a:rPr lang="en-US" sz="2600" b="1" dirty="0">
+                <a:solidFill>
+                  <a:srgbClr val="272E52"/>
+                </a:solidFill>
+                <a:latin typeface="Arial" pitchFamily="34" charset="0"/>
+                <a:ea typeface="Arial" pitchFamily="34" charset="-122"/>
+                <a:cs typeface="Arial" pitchFamily="34" charset="-120"/>
+              </a:rPr>
+              <a:t>IPv6 lesen können</a:t>
+            </a:r>
+            <a:endParaRPr lang="en-US" sz="2600" dirty="0"/>
+          </a:p>
+        </p:txBody>
+      </p:sp>
+      <p:pic>
+        <p:nvPicPr>
+          <p:cNvPr id="5" name="Image 0" descr="/Users/jacobmenge/Desktop/kurs-26.2b-orga/folienwerkstatt/assets/diagramme/ipv6-aufbau.png">    </p:cNvPr>
+          <p:cNvPicPr>
+            <a:picLocks noChangeAspect="1"/>
+          </p:cNvPicPr>
+          <p:nvPr/>
+        </p:nvPicPr>
+        <p:blipFill>
+          <a:blip r:embed="rId1"/>
+          <a:stretch>
+            <a:fillRect/>
+          </a:stretch>
+        </p:blipFill>
+        <p:spPr>
+          <a:xfrm>
+            <a:off x="566928" y="1517904"/>
+            <a:ext cx="8010144" cy="2340864"/>
+          </a:xfrm>
+          <a:prstGeom prst="rect">
+            <a:avLst/>
+          </a:prstGeom>
+        </p:spPr>
+      </p:pic>
+      <p:sp>
+        <p:nvSpPr>
+          <p:cNvPr id="6" name="Shape 3"/>
+          <p:cNvSpPr/>
+          <p:nvPr/>
+        </p:nvSpPr>
+        <p:spPr>
+          <a:xfrm>
+            <a:off x="566928" y="4114800"/>
+            <a:ext cx="32004" cy="256032"/>
           </a:xfrm>
           <a:prstGeom prst="rect">
             <a:avLst/>
           </a:prstGeom>
           <a:solidFill>
-            <a:srgbClr val="9A6310"/>
+            <a:srgbClr val="3843AF"/>
           </a:solidFill>
           <a:ln/>
         </p:spPr>
       </p:sp>
       <p:sp>
         <p:nvSpPr>
-          <p:cNvPr id="4" name="Text 2"/>
-          <p:cNvSpPr/>
-          <p:nvPr/>
-        </p:nvSpPr>
-        <p:spPr>
-          <a:xfrm>
-            <a:off x="6629400" y="1463040"/>
-            <a:ext cx="2194560" cy="1737360"/>
-          </a:xfrm>
-          <a:prstGeom prst="rect">
-            <a:avLst/>
-          </a:prstGeom>
-          <a:noFill/>
-          <a:ln/>
-        </p:spPr>
-        <p:txBody>
-          <a:bodyPr wrap="square" lIns="0" tIns="0" rIns="0" bIns="0" rtlCol="0" anchor="ctr"/>
-          <a:lstStyle/>
-          <a:p>
-            <a:pPr algn="ctr" indent="0" marL="0">
-              <a:buNone/>
-            </a:pPr>
-            <a:r>
-              <a:rPr lang="en-US" sz="8400" b="1" dirty="0">
-                <a:solidFill>
-                  <a:srgbClr val="9A6310"/>
-                </a:solidFill>
-                <a:latin typeface="Arial" pitchFamily="34" charset="0"/>
-                <a:ea typeface="Arial" pitchFamily="34" charset="-122"/>
-                <a:cs typeface="Arial" pitchFamily="34" charset="-120"/>
-              </a:rPr>
-              <a:t>04</a:t>
-            </a:r>
-            <a:endParaRPr lang="en-US" sz="8400" dirty="0"/>
-          </a:p>
-        </p:txBody>
-      </p:sp>
-      <p:sp>
-        <p:nvSpPr>
-          <p:cNvPr id="5" name="Shape 3"/>
-          <p:cNvSpPr/>
-          <p:nvPr/>
-        </p:nvSpPr>
-        <p:spPr>
-          <a:xfrm>
-            <a:off x="566928" y="1883664"/>
-            <a:ext cx="475488" cy="50292"/>
-          </a:xfrm>
-          <a:prstGeom prst="rect">
-            <a:avLst/>
-          </a:prstGeom>
-          <a:solidFill>
-            <a:srgbClr val="9A6310"/>
-          </a:solidFill>
-          <a:ln/>
-        </p:spPr>
-      </p:sp>
-      <p:sp>
-        <p:nvSpPr>
-          <p:cNvPr id="6" name="Text 4"/>
-          <p:cNvSpPr/>
-          <p:nvPr/>
-        </p:nvSpPr>
-        <p:spPr>
-          <a:xfrm>
-            <a:off x="566928" y="2084832"/>
-            <a:ext cx="5394960" cy="868680"/>
-          </a:xfrm>
-          <a:prstGeom prst="rect">
-            <a:avLst/>
-          </a:prstGeom>
-          <a:noFill/>
-          <a:ln/>
-        </p:spPr>
-        <p:txBody>
-          <a:bodyPr wrap="square" lIns="0" tIns="0" rIns="0" bIns="0" rtlCol="0" anchor="t"/>
-          <a:lstStyle/>
-          <a:p>
-            <a:pPr indent="0" marL="0">
-              <a:buNone/>
-            </a:pPr>
-            <a:r>
-              <a:rPr lang="en-US" sz="3000" b="1" dirty="0">
-                <a:solidFill>
-                  <a:srgbClr val="272E52"/>
-                </a:solidFill>
-                <a:latin typeface="Arial" pitchFamily="34" charset="0"/>
-                <a:ea typeface="Arial" pitchFamily="34" charset="-122"/>
-                <a:cs typeface="Arial" pitchFamily="34" charset="-120"/>
-              </a:rPr>
-              <a:t>Subnetz-Architekten</a:t>
-            </a:r>
-            <a:endParaRPr lang="en-US" sz="3000" dirty="0"/>
-          </a:p>
-        </p:txBody>
-      </p:sp>
-      <p:sp>
-        <p:nvSpPr>
-          <p:cNvPr id="7" name="Text 5"/>
-          <p:cNvSpPr/>
-          <p:nvPr/>
-        </p:nvSpPr>
-        <p:spPr>
-          <a:xfrm>
-            <a:off x="566928" y="3017520"/>
-            <a:ext cx="5394960" cy="548640"/>
-          </a:xfrm>
-          <a:prstGeom prst="rect">
-            <a:avLst/>
-          </a:prstGeom>
-          <a:noFill/>
-          <a:ln/>
-        </p:spPr>
-        <p:txBody>
-          <a:bodyPr wrap="square" lIns="0" tIns="0" rIns="0" bIns="0" rtlCol="0" anchor="t"/>
-          <a:lstStyle/>
-          <a:p>
-            <a:pPr indent="0" marL="0">
-              <a:buNone/>
-            </a:pPr>
-            <a:r>
-              <a:rPr lang="en-US" sz="1350" dirty="0">
+          <p:cNvPr id="7" name="Text 4"/>
+          <p:cNvSpPr/>
+          <p:nvPr/>
+        </p:nvSpPr>
+        <p:spPr>
+          <a:xfrm>
+            <a:off x="749808" y="4069080"/>
+            <a:ext cx="7827264" cy="402336"/>
+          </a:xfrm>
+          <a:prstGeom prst="rect">
+            <a:avLst/>
+          </a:prstGeom>
+          <a:noFill/>
+          <a:ln/>
+        </p:spPr>
+        <p:txBody>
+          <a:bodyPr wrap="square" lIns="0" tIns="0" rIns="0" bIns="0" rtlCol="0" anchor="ctr"/>
+          <a:lstStyle/>
+          <a:p>
+            <a:pPr indent="0" marL="0">
+              <a:buNone/>
+            </a:pPr>
+            <a:r>
+              <a:rPr lang="en-US" sz="1200" b="1" dirty="0">
+                <a:solidFill>
+                  <a:srgbClr val="434A63"/>
+                </a:solidFill>
+                <a:latin typeface="Arial" pitchFamily="34" charset="0"/>
+                <a:ea typeface="Arial" pitchFamily="34" charset="-122"/>
+                <a:cs typeface="Arial" pitchFamily="34" charset="-120"/>
+              </a:rPr>
+              <a:t>Lesen reicht: vorn das Netz, hinten das Gerät – gerechnet wird bei IPv6 nichts mehr.</a:t>
+            </a:r>
+            <a:endParaRPr lang="en-US" sz="1200" dirty="0"/>
+          </a:p>
+        </p:txBody>
+      </p:sp>
+      <p:sp>
+        <p:nvSpPr>
+          <p:cNvPr id="8" name="Shape 5"/>
+          <p:cNvSpPr/>
+          <p:nvPr/>
+        </p:nvSpPr>
+        <p:spPr>
+          <a:xfrm>
+            <a:off x="566928" y="4631436"/>
+            <a:ext cx="8010144" cy="0"/>
+          </a:xfrm>
+          <a:prstGeom prst="line">
+            <a:avLst/>
+          </a:prstGeom>
+          <a:noFill/>
+          <a:ln w="9525">
+            <a:solidFill>
+              <a:srgbClr val="DFE3F0"/>
+            </a:solidFill>
+            <a:prstDash val="solid"/>
+          </a:ln>
+        </p:spPr>
+      </p:sp>
+      <p:sp>
+        <p:nvSpPr>
+          <p:cNvPr id="9" name="Text 6"/>
+          <p:cNvSpPr/>
+          <p:nvPr/>
+        </p:nvSpPr>
+        <p:spPr>
+          <a:xfrm>
+            <a:off x="566928" y="4722876"/>
+            <a:ext cx="5029200" cy="237744"/>
+          </a:xfrm>
+          <a:prstGeom prst="rect">
+            <a:avLst/>
+          </a:prstGeom>
+          <a:noFill/>
+          <a:ln/>
+        </p:spPr>
+        <p:txBody>
+          <a:bodyPr wrap="square" lIns="0" tIns="0" rIns="0" bIns="0" rtlCol="0" anchor="ctr"/>
+          <a:lstStyle/>
+          <a:p>
+            <a:pPr indent="0" marL="0">
+              <a:buNone/>
+            </a:pPr>
+            <a:r>
+              <a:rPr lang="en-US" sz="1050" spc="30" kern="0" dirty="0">
                 <a:solidFill>
                   <a:srgbClr val="5C6377"/>
                 </a:solidFill>
@@ -8100,9 +8255,48 @@
                 <a:ea typeface="Arial" pitchFamily="34" charset="-122"/>
                 <a:cs typeface="Arial" pitchFamily="34" charset="-120"/>
               </a:rPr>
-              <a:t>50 Minuten in Gruppen – ihr plant das Netz der Müller GmbH</a:t>
-            </a:r>
-            <a:endParaRPr lang="en-US" sz="1350" dirty="0"/>
+              <a:t>Privat und v6</a:t>
+            </a:r>
+            <a:endParaRPr lang="en-US" sz="1050" dirty="0"/>
+          </a:p>
+        </p:txBody>
+      </p:sp>
+      <p:sp>
+        <p:nvSpPr>
+          <p:cNvPr id="10" name="Text 7"/>
+          <p:cNvSpPr/>
+          <p:nvPr/>
+        </p:nvSpPr>
+        <p:spPr>
+          <a:xfrm>
+            <a:off x="8028432" y="4722876"/>
+            <a:ext cx="548640" cy="237744"/>
+          </a:xfrm>
+          <a:prstGeom prst="rect">
+            <a:avLst/>
+          </a:prstGeom>
+          <a:noFill/>
+          <a:ln/>
+        </p:spPr>
+        <p:txBody>
+          <a:bodyPr wrap="square" lIns="0" tIns="0" rIns="0" bIns="0" rtlCol="0" anchor="ctr"/>
+          <a:lstStyle/>
+          <a:p>
+            <a:pPr algn="r" indent="0" marL="0">
+              <a:buNone/>
+            </a:pPr>
+            <a:r>
+              <a:rPr lang="en-US" sz="1050" dirty="0">
+                <a:solidFill>
+                  <a:srgbClr val="5C6377"/>
+                </a:solidFill>
+                <a:latin typeface="Arial" pitchFamily="34" charset="0"/>
+                <a:ea typeface="Arial" pitchFamily="34" charset="-122"/>
+                <a:cs typeface="Arial" pitchFamily="34" charset="-120"/>
+              </a:rPr>
+              <a:t>16/22</a:t>
+            </a:r>
+            <a:endParaRPr lang="en-US" sz="1050" dirty="0"/>
           </a:p>
         </p:txBody>
       </p:sp>
@@ -8146,8 +8340,28 @@
         </p:nvSpPr>
         <p:spPr>
           <a:xfrm>
-            <a:off x="566928" y="201168"/>
-            <a:ext cx="475488" cy="50292"/>
+            <a:off x="6355080" y="0"/>
+            <a:ext cx="2788920" cy="5143500"/>
+          </a:xfrm>
+          <a:prstGeom prst="rect">
+            <a:avLst/>
+          </a:prstGeom>
+          <a:solidFill>
+            <a:srgbClr val="FBF2E3"/>
+          </a:solidFill>
+          <a:ln/>
+        </p:spPr>
+      </p:sp>
+      <p:sp>
+        <p:nvSpPr>
+          <p:cNvPr id="3" name="Shape 1"/>
+          <p:cNvSpPr/>
+          <p:nvPr/>
+        </p:nvSpPr>
+        <p:spPr>
+          <a:xfrm>
+            <a:off x="6355080" y="0"/>
+            <a:ext cx="45720" cy="5143500"/>
           </a:xfrm>
           <a:prstGeom prst="rect">
             <a:avLst/>
@@ -8160,30 +8374,30 @@
       </p:sp>
       <p:sp>
         <p:nvSpPr>
-          <p:cNvPr id="3" name="Text 1"/>
-          <p:cNvSpPr/>
-          <p:nvPr/>
-        </p:nvSpPr>
-        <p:spPr>
-          <a:xfrm>
-            <a:off x="566928" y="384048"/>
-            <a:ext cx="8010144" cy="237744"/>
-          </a:xfrm>
-          <a:prstGeom prst="rect">
-            <a:avLst/>
-          </a:prstGeom>
-          <a:noFill/>
-          <a:ln/>
-        </p:spPr>
-        <p:txBody>
-          <a:bodyPr wrap="square" lIns="0" tIns="0" rIns="0" bIns="0" rtlCol="0" anchor="ctr"/>
-          <a:lstStyle/>
-          <a:p>
-            <a:pPr indent="0" marL="0">
-              <a:buNone/>
-            </a:pPr>
-            <a:r>
-              <a:rPr lang="en-US" sz="1150" b="1" spc="180" kern="0" dirty="0">
+          <p:cNvPr id="4" name="Text 2"/>
+          <p:cNvSpPr/>
+          <p:nvPr/>
+        </p:nvSpPr>
+        <p:spPr>
+          <a:xfrm>
+            <a:off x="6629400" y="1463040"/>
+            <a:ext cx="2194560" cy="1737360"/>
+          </a:xfrm>
+          <a:prstGeom prst="rect">
+            <a:avLst/>
+          </a:prstGeom>
+          <a:noFill/>
+          <a:ln/>
+        </p:spPr>
+        <p:txBody>
+          <a:bodyPr wrap="square" lIns="0" tIns="0" rIns="0" bIns="0" rtlCol="0" anchor="ctr"/>
+          <a:lstStyle/>
+          <a:p>
+            <a:pPr algn="ctr" indent="0" marL="0">
+              <a:buNone/>
+            </a:pPr>
+            <a:r>
+              <a:rPr lang="en-US" sz="8400" b="1" dirty="0">
                 <a:solidFill>
                   <a:srgbClr val="9A6310"/>
                 </a:solidFill>
@@ -8191,472 +8405,22 @@
                 <a:ea typeface="Arial" pitchFamily="34" charset="-122"/>
                 <a:cs typeface="Arial" pitchFamily="34" charset="-120"/>
               </a:rPr>
-              <a:t>BREAKOUT · 50 MINUTEN</a:t>
-            </a:r>
-            <a:endParaRPr lang="en-US" sz="1150" dirty="0"/>
-          </a:p>
-        </p:txBody>
-      </p:sp>
-      <p:sp>
-        <p:nvSpPr>
-          <p:cNvPr id="4" name="Text 2"/>
-          <p:cNvSpPr/>
-          <p:nvPr/>
-        </p:nvSpPr>
-        <p:spPr>
-          <a:xfrm>
-            <a:off x="566928" y="731520"/>
-            <a:ext cx="8010144" cy="603504"/>
-          </a:xfrm>
-          <a:prstGeom prst="rect">
-            <a:avLst/>
-          </a:prstGeom>
-          <a:noFill/>
-          <a:ln/>
-        </p:spPr>
-        <p:txBody>
-          <a:bodyPr wrap="square" lIns="0" tIns="0" rIns="0" bIns="0" rtlCol="0" anchor="t"/>
-          <a:lstStyle/>
-          <a:p>
-            <a:pPr indent="0" marL="0">
-              <a:buNone/>
-            </a:pPr>
-            <a:r>
-              <a:rPr lang="en-US" sz="2600" b="1" dirty="0">
-                <a:solidFill>
-                  <a:srgbClr val="272E52"/>
-                </a:solidFill>
-                <a:latin typeface="Arial" pitchFamily="34" charset="0"/>
-                <a:ea typeface="Arial" pitchFamily="34" charset="-122"/>
-                <a:cs typeface="Arial" pitchFamily="34" charset="-120"/>
-              </a:rPr>
-              <a:t>Der Auftrag</a:t>
-            </a:r>
-            <a:endParaRPr lang="en-US" sz="2600" dirty="0"/>
-          </a:p>
-        </p:txBody>
-      </p:sp>
-      <p:sp>
-        <p:nvSpPr>
-          <p:cNvPr id="5" name="Text 3"/>
-          <p:cNvSpPr/>
-          <p:nvPr/>
-        </p:nvSpPr>
-        <p:spPr>
-          <a:xfrm>
-            <a:off x="566928" y="1444752"/>
-            <a:ext cx="8010144" cy="438912"/>
-          </a:xfrm>
-          <a:prstGeom prst="rect">
-            <a:avLst/>
-          </a:prstGeom>
-          <a:noFill/>
-          <a:ln/>
-        </p:spPr>
-        <p:txBody>
-          <a:bodyPr wrap="square" lIns="0" tIns="0" rIns="0" bIns="0" rtlCol="0" anchor="t"/>
-          <a:lstStyle/>
-          <a:p>
-            <a:pPr indent="0" marL="0">
-              <a:buNone/>
-            </a:pPr>
-            <a:r>
-              <a:rPr lang="en-US" sz="1300" dirty="0">
-                <a:solidFill>
-                  <a:srgbClr val="5C6377"/>
-                </a:solidFill>
-                <a:latin typeface="Arial" pitchFamily="34" charset="0"/>
-                <a:ea typeface="Arial" pitchFamily="34" charset="-122"/>
-                <a:cs typeface="Arial" pitchFamily="34" charset="-120"/>
-              </a:rPr>
-              <a:t>Die Müller GmbH zieht um. Ihr bekommt ein /24 und schneidet daraus die Abteilungsnetze – nur mit Stift, Papier und dem Rezept von eben.</a:t>
-            </a:r>
-            <a:endParaRPr lang="en-US" sz="1300" dirty="0"/>
-          </a:p>
-        </p:txBody>
-      </p:sp>
-      <p:sp>
-        <p:nvSpPr>
-          <p:cNvPr id="6" name="Shape 4"/>
-          <p:cNvSpPr/>
-          <p:nvPr/>
-        </p:nvSpPr>
-        <p:spPr>
-          <a:xfrm>
-            <a:off x="438912" y="2011680"/>
-            <a:ext cx="8266176" cy="384048"/>
-          </a:xfrm>
-          <a:prstGeom prst="rect">
-            <a:avLst/>
-          </a:prstGeom>
-          <a:solidFill>
-            <a:srgbClr val="F5F6FC"/>
-          </a:solidFill>
-          <a:ln/>
-        </p:spPr>
-      </p:sp>
-      <p:sp>
-        <p:nvSpPr>
-          <p:cNvPr id="7" name="Text 5"/>
-          <p:cNvSpPr/>
-          <p:nvPr/>
-        </p:nvSpPr>
-        <p:spPr>
-          <a:xfrm>
-            <a:off x="566928" y="2011680"/>
-            <a:ext cx="868680" cy="384048"/>
-          </a:xfrm>
-          <a:prstGeom prst="rect">
-            <a:avLst/>
-          </a:prstGeom>
-          <a:noFill/>
-          <a:ln/>
-        </p:spPr>
-        <p:txBody>
-          <a:bodyPr wrap="square" lIns="0" tIns="0" rIns="0" bIns="0" rtlCol="0" anchor="ctr"/>
-          <a:lstStyle/>
-          <a:p>
-            <a:pPr indent="0" marL="0">
-              <a:buNone/>
-            </a:pPr>
-            <a:r>
-              <a:rPr lang="en-US" sz="1200" b="1" dirty="0">
-                <a:solidFill>
-                  <a:srgbClr val="9A6310"/>
-                </a:solidFill>
-                <a:latin typeface="Courier New" pitchFamily="34" charset="0"/>
-                <a:ea typeface="Courier New" pitchFamily="34" charset="-122"/>
-                <a:cs typeface="Courier New" pitchFamily="34" charset="-120"/>
-              </a:rPr>
-              <a:t>10 min</a:t>
-            </a:r>
-            <a:endParaRPr lang="en-US" sz="1200" dirty="0"/>
-          </a:p>
-        </p:txBody>
-      </p:sp>
-      <p:sp>
-        <p:nvSpPr>
-          <p:cNvPr id="8" name="Text 6"/>
-          <p:cNvSpPr/>
-          <p:nvPr/>
-        </p:nvSpPr>
-        <p:spPr>
-          <a:xfrm>
-            <a:off x="1435608" y="2011680"/>
-            <a:ext cx="7141464" cy="384048"/>
-          </a:xfrm>
-          <a:prstGeom prst="rect">
-            <a:avLst/>
-          </a:prstGeom>
-          <a:noFill/>
-          <a:ln/>
-        </p:spPr>
-        <p:txBody>
-          <a:bodyPr wrap="square" lIns="0" tIns="0" rIns="0" bIns="0" rtlCol="0" anchor="ctr"/>
-          <a:lstStyle/>
-          <a:p>
-            <a:pPr indent="0" marL="0">
-              <a:buNone/>
-            </a:pPr>
-            <a:r>
-              <a:rPr lang="en-US" sz="1200" dirty="0">
-                <a:solidFill>
-                  <a:srgbClr val="434A63"/>
-                </a:solidFill>
-                <a:latin typeface="Arial" pitchFamily="34" charset="0"/>
-                <a:ea typeface="Arial" pitchFamily="34" charset="-122"/>
-                <a:cs typeface="Arial" pitchFamily="34" charset="-120"/>
-              </a:rPr>
-              <a:t>Je Abteilung die Hostbits bestimmen – Formel: 2 hoch n minus 2</a:t>
-            </a:r>
-            <a:endParaRPr lang="en-US" sz="1200" dirty="0"/>
-          </a:p>
-        </p:txBody>
-      </p:sp>
-      <p:sp>
-        <p:nvSpPr>
-          <p:cNvPr id="9" name="Text 7"/>
-          <p:cNvSpPr/>
-          <p:nvPr/>
-        </p:nvSpPr>
-        <p:spPr>
-          <a:xfrm>
-            <a:off x="566928" y="2395728"/>
-            <a:ext cx="868680" cy="384048"/>
-          </a:xfrm>
-          <a:prstGeom prst="rect">
-            <a:avLst/>
-          </a:prstGeom>
-          <a:noFill/>
-          <a:ln/>
-        </p:spPr>
-        <p:txBody>
-          <a:bodyPr wrap="square" lIns="0" tIns="0" rIns="0" bIns="0" rtlCol="0" anchor="ctr"/>
-          <a:lstStyle/>
-          <a:p>
-            <a:pPr indent="0" marL="0">
-              <a:buNone/>
-            </a:pPr>
-            <a:r>
-              <a:rPr lang="en-US" sz="1200" b="1" dirty="0">
-                <a:solidFill>
-                  <a:srgbClr val="9A6310"/>
-                </a:solidFill>
-                <a:latin typeface="Courier New" pitchFamily="34" charset="0"/>
-                <a:ea typeface="Courier New" pitchFamily="34" charset="-122"/>
-                <a:cs typeface="Courier New" pitchFamily="34" charset="-120"/>
-              </a:rPr>
-              <a:t>15 min</a:t>
-            </a:r>
-            <a:endParaRPr lang="en-US" sz="1200" dirty="0"/>
-          </a:p>
-        </p:txBody>
-      </p:sp>
-      <p:sp>
-        <p:nvSpPr>
-          <p:cNvPr id="10" name="Text 8"/>
-          <p:cNvSpPr/>
-          <p:nvPr/>
-        </p:nvSpPr>
-        <p:spPr>
-          <a:xfrm>
-            <a:off x="1435608" y="2395728"/>
-            <a:ext cx="7141464" cy="384048"/>
-          </a:xfrm>
-          <a:prstGeom prst="rect">
-            <a:avLst/>
-          </a:prstGeom>
-          <a:noFill/>
-          <a:ln/>
-        </p:spPr>
-        <p:txBody>
-          <a:bodyPr wrap="square" lIns="0" tIns="0" rIns="0" bIns="0" rtlCol="0" anchor="ctr"/>
-          <a:lstStyle/>
-          <a:p>
-            <a:pPr indent="0" marL="0">
-              <a:buNone/>
-            </a:pPr>
-            <a:r>
-              <a:rPr lang="en-US" sz="1200" dirty="0">
-                <a:solidFill>
-                  <a:srgbClr val="434A63"/>
-                </a:solidFill>
-                <a:latin typeface="Arial" pitchFamily="34" charset="0"/>
-                <a:ea typeface="Arial" pitchFamily="34" charset="-122"/>
-                <a:cs typeface="Arial" pitchFamily="34" charset="-120"/>
-              </a:rPr>
-              <a:t>Größte zuerst: Präfixe wählen, Blöcke lückenlos schneiden</a:t>
-            </a:r>
-            <a:endParaRPr lang="en-US" sz="1200" dirty="0"/>
-          </a:p>
-        </p:txBody>
-      </p:sp>
-      <p:sp>
-        <p:nvSpPr>
-          <p:cNvPr id="11" name="Shape 9"/>
-          <p:cNvSpPr/>
-          <p:nvPr/>
-        </p:nvSpPr>
-        <p:spPr>
-          <a:xfrm>
-            <a:off x="438912" y="2779776"/>
-            <a:ext cx="8266176" cy="384048"/>
-          </a:xfrm>
-          <a:prstGeom prst="rect">
-            <a:avLst/>
-          </a:prstGeom>
-          <a:solidFill>
-            <a:srgbClr val="F5F6FC"/>
-          </a:solidFill>
-          <a:ln/>
-        </p:spPr>
-      </p:sp>
-      <p:sp>
-        <p:nvSpPr>
-          <p:cNvPr id="12" name="Text 10"/>
-          <p:cNvSpPr/>
-          <p:nvPr/>
-        </p:nvSpPr>
-        <p:spPr>
-          <a:xfrm>
-            <a:off x="566928" y="2779776"/>
-            <a:ext cx="868680" cy="384048"/>
-          </a:xfrm>
-          <a:prstGeom prst="rect">
-            <a:avLst/>
-          </a:prstGeom>
-          <a:noFill/>
-          <a:ln/>
-        </p:spPr>
-        <p:txBody>
-          <a:bodyPr wrap="square" lIns="0" tIns="0" rIns="0" bIns="0" rtlCol="0" anchor="ctr"/>
-          <a:lstStyle/>
-          <a:p>
-            <a:pPr indent="0" marL="0">
-              <a:buNone/>
-            </a:pPr>
-            <a:r>
-              <a:rPr lang="en-US" sz="1200" b="1" dirty="0">
-                <a:solidFill>
-                  <a:srgbClr val="9A6310"/>
-                </a:solidFill>
-                <a:latin typeface="Courier New" pitchFamily="34" charset="0"/>
-                <a:ea typeface="Courier New" pitchFamily="34" charset="-122"/>
-                <a:cs typeface="Courier New" pitchFamily="34" charset="-120"/>
-              </a:rPr>
-              <a:t>15 min</a:t>
-            </a:r>
-            <a:endParaRPr lang="en-US" sz="1200" dirty="0"/>
-          </a:p>
-        </p:txBody>
-      </p:sp>
-      <p:sp>
-        <p:nvSpPr>
-          <p:cNvPr id="13" name="Text 11"/>
-          <p:cNvSpPr/>
-          <p:nvPr/>
-        </p:nvSpPr>
-        <p:spPr>
-          <a:xfrm>
-            <a:off x="1435608" y="2779776"/>
-            <a:ext cx="7141464" cy="384048"/>
-          </a:xfrm>
-          <a:prstGeom prst="rect">
-            <a:avLst/>
-          </a:prstGeom>
-          <a:noFill/>
-          <a:ln/>
-        </p:spPr>
-        <p:txBody>
-          <a:bodyPr wrap="square" lIns="0" tIns="0" rIns="0" bIns="0" rtlCol="0" anchor="ctr"/>
-          <a:lstStyle/>
-          <a:p>
-            <a:pPr indent="0" marL="0">
-              <a:buNone/>
-            </a:pPr>
-            <a:r>
-              <a:rPr lang="en-US" sz="1200" dirty="0">
-                <a:solidFill>
-                  <a:srgbClr val="434A63"/>
-                </a:solidFill>
-                <a:latin typeface="Arial" pitchFamily="34" charset="0"/>
-                <a:ea typeface="Arial" pitchFamily="34" charset="-122"/>
-                <a:cs typeface="Arial" pitchFamily="34" charset="-120"/>
-              </a:rPr>
-              <a:t>Planungstabelle füllen: Netz, erste, letzte, Broadcast</a:t>
-            </a:r>
-            <a:endParaRPr lang="en-US" sz="1200" dirty="0"/>
-          </a:p>
-        </p:txBody>
-      </p:sp>
-      <p:sp>
-        <p:nvSpPr>
-          <p:cNvPr id="14" name="Text 12"/>
-          <p:cNvSpPr/>
-          <p:nvPr/>
-        </p:nvSpPr>
-        <p:spPr>
-          <a:xfrm>
-            <a:off x="566928" y="3163824"/>
-            <a:ext cx="868680" cy="384048"/>
-          </a:xfrm>
-          <a:prstGeom prst="rect">
-            <a:avLst/>
-          </a:prstGeom>
-          <a:noFill/>
-          <a:ln/>
-        </p:spPr>
-        <p:txBody>
-          <a:bodyPr wrap="square" lIns="0" tIns="0" rIns="0" bIns="0" rtlCol="0" anchor="ctr"/>
-          <a:lstStyle/>
-          <a:p>
-            <a:pPr indent="0" marL="0">
-              <a:buNone/>
-            </a:pPr>
-            <a:r>
-              <a:rPr lang="en-US" sz="1200" b="1" dirty="0">
-                <a:solidFill>
-                  <a:srgbClr val="9A6310"/>
-                </a:solidFill>
-                <a:latin typeface="Courier New" pitchFamily="34" charset="0"/>
-                <a:ea typeface="Courier New" pitchFamily="34" charset="-122"/>
-                <a:cs typeface="Courier New" pitchFamily="34" charset="-120"/>
-              </a:rPr>
-              <a:t>10 min</a:t>
-            </a:r>
-            <a:endParaRPr lang="en-US" sz="1200" dirty="0"/>
-          </a:p>
-        </p:txBody>
-      </p:sp>
-      <p:sp>
-        <p:nvSpPr>
-          <p:cNvPr id="15" name="Text 13"/>
-          <p:cNvSpPr/>
-          <p:nvPr/>
-        </p:nvSpPr>
-        <p:spPr>
-          <a:xfrm>
-            <a:off x="1435608" y="3163824"/>
-            <a:ext cx="7141464" cy="384048"/>
-          </a:xfrm>
-          <a:prstGeom prst="rect">
-            <a:avLst/>
-          </a:prstGeom>
-          <a:noFill/>
-          <a:ln/>
-        </p:spPr>
-        <p:txBody>
-          <a:bodyPr wrap="square" lIns="0" tIns="0" rIns="0" bIns="0" rtlCol="0" anchor="ctr"/>
-          <a:lstStyle/>
-          <a:p>
-            <a:pPr indent="0" marL="0">
-              <a:buNone/>
-            </a:pPr>
-            <a:r>
-              <a:rPr lang="en-US" sz="1200" dirty="0">
-                <a:solidFill>
-                  <a:srgbClr val="434A63"/>
-                </a:solidFill>
-                <a:latin typeface="Arial" pitchFamily="34" charset="0"/>
-                <a:ea typeface="Arial" pitchFamily="34" charset="-122"/>
-                <a:cs typeface="Arial" pitchFamily="34" charset="-120"/>
-              </a:rPr>
-              <a:t>Selbstcheck im Online-Subnetzrechner – jede Zeile muss exakt passen</a:t>
-            </a:r>
-            <a:endParaRPr lang="en-US" sz="1200" dirty="0"/>
-          </a:p>
-        </p:txBody>
-      </p:sp>
-      <p:sp>
-        <p:nvSpPr>
-          <p:cNvPr id="16" name="Shape 14"/>
-          <p:cNvSpPr/>
-          <p:nvPr/>
-        </p:nvSpPr>
-        <p:spPr>
-          <a:xfrm>
-            <a:off x="566928" y="3611880"/>
-            <a:ext cx="8010144" cy="841248"/>
-          </a:xfrm>
-          <a:prstGeom prst="rect">
-            <a:avLst/>
-          </a:prstGeom>
-          <a:solidFill>
-            <a:srgbClr val="EEF0FB"/>
-          </a:solidFill>
-          <a:ln/>
-        </p:spPr>
-      </p:sp>
-      <p:sp>
-        <p:nvSpPr>
-          <p:cNvPr id="17" name="Shape 15"/>
-          <p:cNvSpPr/>
-          <p:nvPr/>
-        </p:nvSpPr>
-        <p:spPr>
-          <a:xfrm>
-            <a:off x="566928" y="3611880"/>
-            <a:ext cx="41148" cy="841248"/>
+              <a:t>04</a:t>
+            </a:r>
+            <a:endParaRPr lang="en-US" sz="8400" dirty="0"/>
+          </a:p>
+        </p:txBody>
+      </p:sp>
+      <p:sp>
+        <p:nvSpPr>
+          <p:cNvPr id="5" name="Shape 3"/>
+          <p:cNvSpPr/>
+          <p:nvPr/>
+        </p:nvSpPr>
+        <p:spPr>
+          <a:xfrm>
+            <a:off x="566928" y="1883664"/>
+            <a:ext cx="475488" cy="50292"/>
           </a:xfrm>
           <a:prstGeom prst="rect">
             <a:avLst/>
@@ -8669,14 +8433,14 @@
       </p:sp>
       <p:sp>
         <p:nvSpPr>
-          <p:cNvPr id="18" name="Text 16"/>
-          <p:cNvSpPr/>
-          <p:nvPr/>
-        </p:nvSpPr>
-        <p:spPr>
-          <a:xfrm>
-            <a:off x="804672" y="3758184"/>
-            <a:ext cx="7607808" cy="242062"/>
+          <p:cNvPr id="6" name="Text 4"/>
+          <p:cNvSpPr/>
+          <p:nvPr/>
+        </p:nvSpPr>
+        <p:spPr>
+          <a:xfrm>
+            <a:off x="566928" y="2084832"/>
+            <a:ext cx="5394960" cy="868680"/>
           </a:xfrm>
           <a:prstGeom prst="rect">
             <a:avLst/>
@@ -8692,7 +8456,7 @@
               <a:buNone/>
             </a:pPr>
             <a:r>
-              <a:rPr lang="en-US" sz="1300" b="1" dirty="0">
+              <a:rPr lang="en-US" sz="3000" b="1" dirty="0">
                 <a:solidFill>
                   <a:srgbClr val="272E52"/>
                 </a:solidFill>
@@ -8700,22 +8464,22 @@
                 <a:ea typeface="Arial" pitchFamily="34" charset="-122"/>
                 <a:cs typeface="Arial" pitchFamily="34" charset="-120"/>
               </a:rPr>
-              <a:t>Jetzt öffnen – beides braucht ihr gleich im Raum</a:t>
-            </a:r>
-            <a:endParaRPr lang="en-US" sz="1300" dirty="0"/>
-          </a:p>
-        </p:txBody>
-      </p:sp>
-      <p:sp>
-        <p:nvSpPr>
-          <p:cNvPr id="19" name="Text 17"/>
-          <p:cNvSpPr/>
-          <p:nvPr/>
-        </p:nvSpPr>
-        <p:spPr>
-          <a:xfrm>
-            <a:off x="804672" y="4045966"/>
-            <a:ext cx="7607808" cy="288290"/>
+              <a:t>Subnetz-Architekten</a:t>
+            </a:r>
+            <a:endParaRPr lang="en-US" sz="3000" dirty="0"/>
+          </a:p>
+        </p:txBody>
+      </p:sp>
+      <p:sp>
+        <p:nvSpPr>
+          <p:cNvPr id="7" name="Text 5"/>
+          <p:cNvSpPr/>
+          <p:nvPr/>
+        </p:nvSpPr>
+        <p:spPr>
+          <a:xfrm>
+            <a:off x="566928" y="3017520"/>
+            <a:ext cx="5394960" cy="548640"/>
           </a:xfrm>
           <a:prstGeom prst="rect">
             <a:avLst/>
@@ -8728,101 +8492,10 @@
           <a:lstStyle/>
           <a:p>
             <a:pPr indent="0" marL="0">
-              <a:lnSpc>
-                <a:spcPct val="92000"/>
-              </a:lnSpc>
-              <a:spcAft>
-                <a:spcPts val="500"/>
-              </a:spcAft>
-              <a:buNone/>
-            </a:pPr>
-            <a:r>
-              <a:rPr lang="en-US" sz="1050" dirty="0">
-                <a:solidFill>
-                  <a:srgbClr val="434A63"/>
-                </a:solidFill>
-                <a:latin typeface="Arial" pitchFamily="34" charset="0"/>
-                <a:ea typeface="Arial" pitchFamily="34" charset="-122"/>
-                <a:cs typeface="Arial" pitchFamily="34" charset="-120"/>
-              </a:rPr>
-              <a:t>Aufgabe mit allen Zahlen:  jacobmenge.github.io/kurs-unterlagen/netzwerke/praxis-subnetting/</a:t>
-            </a:r>
-            <a:endParaRPr lang="en-US" sz="1050" dirty="0"/>
-          </a:p>
-          <a:p>
-            <a:pPr indent="0" marL="0">
-              <a:lnSpc>
-                <a:spcPct val="92000"/>
-              </a:lnSpc>
-              <a:spcAft>
-                <a:spcPts val="500"/>
-              </a:spcAft>
-              <a:buNone/>
-            </a:pPr>
-            <a:r>
-              <a:rPr lang="en-US" sz="1050" dirty="0">
-                <a:solidFill>
-                  <a:srgbClr val="434A63"/>
-                </a:solidFill>
-                <a:latin typeface="Arial" pitchFamily="34" charset="0"/>
-                <a:ea typeface="Arial" pitchFamily="34" charset="-122"/>
-                <a:cs typeface="Arial" pitchFamily="34" charset="-120"/>
-              </a:rPr>
-              <a:t>Ergebnisse eintragen:  &lt;Link zum Ergebnis-Dokument hier eintragen&gt;</a:t>
-            </a:r>
-            <a:endParaRPr lang="en-US" sz="1050" dirty="0"/>
-          </a:p>
-        </p:txBody>
-      </p:sp>
-      <p:sp>
-        <p:nvSpPr>
-          <p:cNvPr id="20" name="Shape 18"/>
-          <p:cNvSpPr/>
-          <p:nvPr/>
-        </p:nvSpPr>
-        <p:spPr>
-          <a:xfrm>
-            <a:off x="566928" y="4631436"/>
-            <a:ext cx="8010144" cy="0"/>
-          </a:xfrm>
-          <a:prstGeom prst="line">
-            <a:avLst/>
-          </a:prstGeom>
-          <a:noFill/>
-          <a:ln w="9525">
-            <a:solidFill>
-              <a:srgbClr val="DFE3F0"/>
-            </a:solidFill>
-            <a:prstDash val="solid"/>
-          </a:ln>
-        </p:spPr>
-      </p:sp>
-      <p:sp>
-        <p:nvSpPr>
-          <p:cNvPr id="21" name="Text 19"/>
-          <p:cNvSpPr/>
-          <p:nvPr/>
-        </p:nvSpPr>
-        <p:spPr>
-          <a:xfrm>
-            <a:off x="566928" y="4722876"/>
-            <a:ext cx="5029200" cy="237744"/>
-          </a:xfrm>
-          <a:prstGeom prst="rect">
-            <a:avLst/>
-          </a:prstGeom>
-          <a:noFill/>
-          <a:ln/>
-        </p:spPr>
-        <p:txBody>
-          <a:bodyPr wrap="square" lIns="0" tIns="0" rIns="0" bIns="0" rtlCol="0" anchor="ctr"/>
-          <a:lstStyle/>
-          <a:p>
-            <a:pPr indent="0" marL="0">
-              <a:buNone/>
-            </a:pPr>
-            <a:r>
-              <a:rPr lang="en-US" sz="1050" spc="30" kern="0" dirty="0">
+              <a:buNone/>
+            </a:pPr>
+            <a:r>
+              <a:rPr lang="en-US" sz="1350" dirty="0">
                 <a:solidFill>
                   <a:srgbClr val="5C6377"/>
                 </a:solidFill>
@@ -8830,48 +8503,9 @@
                 <a:ea typeface="Arial" pitchFamily="34" charset="-122"/>
                 <a:cs typeface="Arial" pitchFamily="34" charset="-120"/>
               </a:rPr>
-              <a:t>Breakout</a:t>
-            </a:r>
-            <a:endParaRPr lang="en-US" sz="1050" dirty="0"/>
-          </a:p>
-        </p:txBody>
-      </p:sp>
-      <p:sp>
-        <p:nvSpPr>
-          <p:cNvPr id="22" name="Text 20"/>
-          <p:cNvSpPr/>
-          <p:nvPr/>
-        </p:nvSpPr>
-        <p:spPr>
-          <a:xfrm>
-            <a:off x="8028432" y="4722876"/>
-            <a:ext cx="548640" cy="237744"/>
-          </a:xfrm>
-          <a:prstGeom prst="rect">
-            <a:avLst/>
-          </a:prstGeom>
-          <a:noFill/>
-          <a:ln/>
-        </p:spPr>
-        <p:txBody>
-          <a:bodyPr wrap="square" lIns="0" tIns="0" rIns="0" bIns="0" rtlCol="0" anchor="ctr"/>
-          <a:lstStyle/>
-          <a:p>
-            <a:pPr algn="r" indent="0" marL="0">
-              <a:buNone/>
-            </a:pPr>
-            <a:r>
-              <a:rPr lang="en-US" sz="1050" dirty="0">
-                <a:solidFill>
-                  <a:srgbClr val="5C6377"/>
-                </a:solidFill>
-                <a:latin typeface="Arial" pitchFamily="34" charset="0"/>
-                <a:ea typeface="Arial" pitchFamily="34" charset="-122"/>
-                <a:cs typeface="Arial" pitchFamily="34" charset="-120"/>
-              </a:rPr>
-              <a:t>16/21</a:t>
-            </a:r>
-            <a:endParaRPr lang="en-US" sz="1050" dirty="0"/>
+              <a:t>50 Minuten in Gruppen – ihr plant das Netz der Müller GmbH</a:t>
+            </a:r>
+            <a:endParaRPr lang="en-US" sz="1350" dirty="0"/>
           </a:p>
         </p:txBody>
       </p:sp>
@@ -8960,7 +8594,7 @@
                 <a:ea typeface="Arial" pitchFamily="34" charset="-122"/>
                 <a:cs typeface="Arial" pitchFamily="34" charset="-120"/>
               </a:rPr>
-              <a:t>SPIELREGELN</a:t>
+              <a:t>BREAKOUT · 50 MINUTEN</a:t>
             </a:r>
             <a:endParaRPr lang="en-US" sz="1150" dirty="0"/>
           </a:p>
@@ -8999,7 +8633,7 @@
                 <a:ea typeface="Arial" pitchFamily="34" charset="-122"/>
                 <a:cs typeface="Arial" pitchFamily="34" charset="-120"/>
               </a:rPr>
-              <a:t>So arbeitet ihr</a:t>
+              <a:t>Der Auftrag</a:t>
             </a:r>
             <a:endParaRPr lang="en-US" sz="2600" dirty="0"/>
           </a:p>
@@ -9013,8 +8647,8 @@
         </p:nvSpPr>
         <p:spPr>
           <a:xfrm>
-            <a:off x="566928" y="1700784"/>
-            <a:ext cx="8010144" cy="2011680"/>
+            <a:off x="566928" y="1444752"/>
+            <a:ext cx="8010144" cy="438912"/>
           </a:xfrm>
           <a:prstGeom prst="rect">
             <a:avLst/>
@@ -9027,33 +8661,486 @@
           <a:lstStyle/>
           <a:p>
             <a:pPr indent="0" marL="0">
-              <a:lnSpc>
-                <a:spcPct val="92000"/>
-              </a:lnSpc>
-              <a:buNone/>
-            </a:pPr>
-            <a:r>
-              <a:rPr lang="en-US" sz="1250" b="1" dirty="0">
+              <a:buNone/>
+            </a:pPr>
+            <a:r>
+              <a:rPr lang="en-US" sz="1300" dirty="0">
+                <a:solidFill>
+                  <a:srgbClr val="5C6377"/>
+                </a:solidFill>
+                <a:latin typeface="Arial" pitchFamily="34" charset="0"/>
+                <a:ea typeface="Arial" pitchFamily="34" charset="-122"/>
+                <a:cs typeface="Arial" pitchFamily="34" charset="-120"/>
+              </a:rPr>
+              <a:t>Die Müller GmbH zieht um. Ihr bekommt ein /24 und schneidet daraus die Abteilungsnetze – nur mit Stift, Papier und dem Rezept von eben.</a:t>
+            </a:r>
+            <a:endParaRPr lang="en-US" sz="1300" dirty="0"/>
+          </a:p>
+        </p:txBody>
+      </p:sp>
+      <p:sp>
+        <p:nvSpPr>
+          <p:cNvPr id="6" name="Shape 4"/>
+          <p:cNvSpPr/>
+          <p:nvPr/>
+        </p:nvSpPr>
+        <p:spPr>
+          <a:xfrm>
+            <a:off x="438912" y="2011680"/>
+            <a:ext cx="8266176" cy="384048"/>
+          </a:xfrm>
+          <a:prstGeom prst="rect">
+            <a:avLst/>
+          </a:prstGeom>
+          <a:solidFill>
+            <a:srgbClr val="F5F6FC"/>
+          </a:solidFill>
+          <a:ln/>
+        </p:spPr>
+      </p:sp>
+      <p:sp>
+        <p:nvSpPr>
+          <p:cNvPr id="7" name="Text 5"/>
+          <p:cNvSpPr/>
+          <p:nvPr/>
+        </p:nvSpPr>
+        <p:spPr>
+          <a:xfrm>
+            <a:off x="566928" y="2011680"/>
+            <a:ext cx="868680" cy="384048"/>
+          </a:xfrm>
+          <a:prstGeom prst="rect">
+            <a:avLst/>
+          </a:prstGeom>
+          <a:noFill/>
+          <a:ln/>
+        </p:spPr>
+        <p:txBody>
+          <a:bodyPr wrap="square" lIns="0" tIns="0" rIns="0" bIns="0" rtlCol="0" anchor="ctr"/>
+          <a:lstStyle/>
+          <a:p>
+            <a:pPr indent="0" marL="0">
+              <a:buNone/>
+            </a:pPr>
+            <a:r>
+              <a:rPr lang="en-US" sz="1200" b="1" dirty="0">
                 <a:solidFill>
                   <a:srgbClr val="9A6310"/>
                 </a:solidFill>
-                <a:latin typeface="Arial" pitchFamily="34" charset="0"/>
-                <a:ea typeface="Arial" pitchFamily="34" charset="-122"/>
-                <a:cs typeface="Arial" pitchFamily="34" charset="-120"/>
-              </a:rPr>
-              <a:t>▸   </a:t>
-            </a:r>
+                <a:latin typeface="Courier New" pitchFamily="34" charset="0"/>
+                <a:ea typeface="Courier New" pitchFamily="34" charset="-122"/>
+                <a:cs typeface="Courier New" pitchFamily="34" charset="-120"/>
+              </a:rPr>
+              <a:t>10 min</a:t>
+            </a:r>
+            <a:endParaRPr lang="en-US" sz="1200" dirty="0"/>
+          </a:p>
+        </p:txBody>
+      </p:sp>
+      <p:sp>
+        <p:nvSpPr>
+          <p:cNvPr id="8" name="Text 6"/>
+          <p:cNvSpPr/>
+          <p:nvPr/>
+        </p:nvSpPr>
+        <p:spPr>
+          <a:xfrm>
+            <a:off x="1435608" y="2011680"/>
+            <a:ext cx="7141464" cy="384048"/>
+          </a:xfrm>
+          <a:prstGeom prst="rect">
+            <a:avLst/>
+          </a:prstGeom>
+          <a:noFill/>
+          <a:ln/>
+        </p:spPr>
+        <p:txBody>
+          <a:bodyPr wrap="square" lIns="0" tIns="0" rIns="0" bIns="0" rtlCol="0" anchor="ctr"/>
+          <a:lstStyle/>
+          <a:p>
+            <a:pPr indent="0" marL="0">
+              <a:buNone/>
+            </a:pPr>
+            <a:r>
+              <a:rPr lang="en-US" sz="1200" dirty="0">
+                <a:solidFill>
+                  <a:srgbClr val="434A63"/>
+                </a:solidFill>
+                <a:latin typeface="Arial" pitchFamily="34" charset="0"/>
+                <a:ea typeface="Arial" pitchFamily="34" charset="-122"/>
+                <a:cs typeface="Arial" pitchFamily="34" charset="-120"/>
+              </a:rPr>
+              <a:t>Je Abteilung die Hostbits bestimmen – Formel: 2 hoch n minus 2</a:t>
+            </a:r>
+            <a:endParaRPr lang="en-US" sz="1200" dirty="0"/>
+          </a:p>
+        </p:txBody>
+      </p:sp>
+      <p:sp>
+        <p:nvSpPr>
+          <p:cNvPr id="9" name="Text 7"/>
+          <p:cNvSpPr/>
+          <p:nvPr/>
+        </p:nvSpPr>
+        <p:spPr>
+          <a:xfrm>
+            <a:off x="566928" y="2395728"/>
+            <a:ext cx="868680" cy="384048"/>
+          </a:xfrm>
+          <a:prstGeom prst="rect">
+            <a:avLst/>
+          </a:prstGeom>
+          <a:noFill/>
+          <a:ln/>
+        </p:spPr>
+        <p:txBody>
+          <a:bodyPr wrap="square" lIns="0" tIns="0" rIns="0" bIns="0" rtlCol="0" anchor="ctr"/>
+          <a:lstStyle/>
+          <a:p>
+            <a:pPr indent="0" marL="0">
+              <a:buNone/>
+            </a:pPr>
+            <a:r>
+              <a:rPr lang="en-US" sz="1200" b="1" dirty="0">
+                <a:solidFill>
+                  <a:srgbClr val="9A6310"/>
+                </a:solidFill>
+                <a:latin typeface="Courier New" pitchFamily="34" charset="0"/>
+                <a:ea typeface="Courier New" pitchFamily="34" charset="-122"/>
+                <a:cs typeface="Courier New" pitchFamily="34" charset="-120"/>
+              </a:rPr>
+              <a:t>15 min</a:t>
+            </a:r>
+            <a:endParaRPr lang="en-US" sz="1200" dirty="0"/>
+          </a:p>
+        </p:txBody>
+      </p:sp>
+      <p:sp>
+        <p:nvSpPr>
+          <p:cNvPr id="10" name="Text 8"/>
+          <p:cNvSpPr/>
+          <p:nvPr/>
+        </p:nvSpPr>
+        <p:spPr>
+          <a:xfrm>
+            <a:off x="1435608" y="2395728"/>
+            <a:ext cx="7141464" cy="384048"/>
+          </a:xfrm>
+          <a:prstGeom prst="rect">
+            <a:avLst/>
+          </a:prstGeom>
+          <a:noFill/>
+          <a:ln/>
+        </p:spPr>
+        <p:txBody>
+          <a:bodyPr wrap="square" lIns="0" tIns="0" rIns="0" bIns="0" rtlCol="0" anchor="ctr"/>
+          <a:lstStyle/>
+          <a:p>
+            <a:pPr indent="0" marL="0">
+              <a:buNone/>
+            </a:pPr>
+            <a:r>
+              <a:rPr lang="en-US" sz="1200" dirty="0">
+                <a:solidFill>
+                  <a:srgbClr val="434A63"/>
+                </a:solidFill>
+                <a:latin typeface="Arial" pitchFamily="34" charset="0"/>
+                <a:ea typeface="Arial" pitchFamily="34" charset="-122"/>
+                <a:cs typeface="Arial" pitchFamily="34" charset="-120"/>
+              </a:rPr>
+              <a:t>Größte zuerst: Präfixe wählen, Blöcke lückenlos schneiden</a:t>
+            </a:r>
+            <a:endParaRPr lang="en-US" sz="1200" dirty="0"/>
+          </a:p>
+        </p:txBody>
+      </p:sp>
+      <p:sp>
+        <p:nvSpPr>
+          <p:cNvPr id="11" name="Shape 9"/>
+          <p:cNvSpPr/>
+          <p:nvPr/>
+        </p:nvSpPr>
+        <p:spPr>
+          <a:xfrm>
+            <a:off x="438912" y="2779776"/>
+            <a:ext cx="8266176" cy="384048"/>
+          </a:xfrm>
+          <a:prstGeom prst="rect">
+            <a:avLst/>
+          </a:prstGeom>
+          <a:solidFill>
+            <a:srgbClr val="F5F6FC"/>
+          </a:solidFill>
+          <a:ln/>
+        </p:spPr>
+      </p:sp>
+      <p:sp>
+        <p:nvSpPr>
+          <p:cNvPr id="12" name="Text 10"/>
+          <p:cNvSpPr/>
+          <p:nvPr/>
+        </p:nvSpPr>
+        <p:spPr>
+          <a:xfrm>
+            <a:off x="566928" y="2779776"/>
+            <a:ext cx="868680" cy="384048"/>
+          </a:xfrm>
+          <a:prstGeom prst="rect">
+            <a:avLst/>
+          </a:prstGeom>
+          <a:noFill/>
+          <a:ln/>
+        </p:spPr>
+        <p:txBody>
+          <a:bodyPr wrap="square" lIns="0" tIns="0" rIns="0" bIns="0" rtlCol="0" anchor="ctr"/>
+          <a:lstStyle/>
+          <a:p>
+            <a:pPr indent="0" marL="0">
+              <a:buNone/>
+            </a:pPr>
+            <a:r>
+              <a:rPr lang="en-US" sz="1200" b="1" dirty="0">
+                <a:solidFill>
+                  <a:srgbClr val="9A6310"/>
+                </a:solidFill>
+                <a:latin typeface="Courier New" pitchFamily="34" charset="0"/>
+                <a:ea typeface="Courier New" pitchFamily="34" charset="-122"/>
+                <a:cs typeface="Courier New" pitchFamily="34" charset="-120"/>
+              </a:rPr>
+              <a:t>15 min</a:t>
+            </a:r>
+            <a:endParaRPr lang="en-US" sz="1200" dirty="0"/>
+          </a:p>
+        </p:txBody>
+      </p:sp>
+      <p:sp>
+        <p:nvSpPr>
+          <p:cNvPr id="13" name="Text 11"/>
+          <p:cNvSpPr/>
+          <p:nvPr/>
+        </p:nvSpPr>
+        <p:spPr>
+          <a:xfrm>
+            <a:off x="1435608" y="2779776"/>
+            <a:ext cx="7141464" cy="384048"/>
+          </a:xfrm>
+          <a:prstGeom prst="rect">
+            <a:avLst/>
+          </a:prstGeom>
+          <a:noFill/>
+          <a:ln/>
+        </p:spPr>
+        <p:txBody>
+          <a:bodyPr wrap="square" lIns="0" tIns="0" rIns="0" bIns="0" rtlCol="0" anchor="ctr"/>
+          <a:lstStyle/>
+          <a:p>
+            <a:pPr indent="0" marL="0">
+              <a:buNone/>
+            </a:pPr>
+            <a:r>
+              <a:rPr lang="en-US" sz="1200" dirty="0">
+                <a:solidFill>
+                  <a:srgbClr val="434A63"/>
+                </a:solidFill>
+                <a:latin typeface="Arial" pitchFamily="34" charset="0"/>
+                <a:ea typeface="Arial" pitchFamily="34" charset="-122"/>
+                <a:cs typeface="Arial" pitchFamily="34" charset="-120"/>
+              </a:rPr>
+              <a:t>Planungstabelle füllen: Netz, erste, letzte, Broadcast</a:t>
+            </a:r>
+            <a:endParaRPr lang="en-US" sz="1200" dirty="0"/>
+          </a:p>
+        </p:txBody>
+      </p:sp>
+      <p:sp>
+        <p:nvSpPr>
+          <p:cNvPr id="14" name="Text 12"/>
+          <p:cNvSpPr/>
+          <p:nvPr/>
+        </p:nvSpPr>
+        <p:spPr>
+          <a:xfrm>
+            <a:off x="566928" y="3163824"/>
+            <a:ext cx="868680" cy="384048"/>
+          </a:xfrm>
+          <a:prstGeom prst="rect">
+            <a:avLst/>
+          </a:prstGeom>
+          <a:noFill/>
+          <a:ln/>
+        </p:spPr>
+        <p:txBody>
+          <a:bodyPr wrap="square" lIns="0" tIns="0" rIns="0" bIns="0" rtlCol="0" anchor="ctr"/>
+          <a:lstStyle/>
+          <a:p>
+            <a:pPr indent="0" marL="0">
+              <a:buNone/>
+            </a:pPr>
+            <a:r>
+              <a:rPr lang="en-US" sz="1200" b="1" dirty="0">
+                <a:solidFill>
+                  <a:srgbClr val="9A6310"/>
+                </a:solidFill>
+                <a:latin typeface="Courier New" pitchFamily="34" charset="0"/>
+                <a:ea typeface="Courier New" pitchFamily="34" charset="-122"/>
+                <a:cs typeface="Courier New" pitchFamily="34" charset="-120"/>
+              </a:rPr>
+              <a:t>10 min</a:t>
+            </a:r>
+            <a:endParaRPr lang="en-US" sz="1200" dirty="0"/>
+          </a:p>
+        </p:txBody>
+      </p:sp>
+      <p:sp>
+        <p:nvSpPr>
+          <p:cNvPr id="15" name="Text 13"/>
+          <p:cNvSpPr/>
+          <p:nvPr/>
+        </p:nvSpPr>
+        <p:spPr>
+          <a:xfrm>
+            <a:off x="1435608" y="3163824"/>
+            <a:ext cx="7141464" cy="384048"/>
+          </a:xfrm>
+          <a:prstGeom prst="rect">
+            <a:avLst/>
+          </a:prstGeom>
+          <a:noFill/>
+          <a:ln/>
+        </p:spPr>
+        <p:txBody>
+          <a:bodyPr wrap="square" lIns="0" tIns="0" rIns="0" bIns="0" rtlCol="0" anchor="ctr"/>
+          <a:lstStyle/>
+          <a:p>
+            <a:pPr indent="0" marL="0">
+              <a:buNone/>
+            </a:pPr>
+            <a:r>
+              <a:rPr lang="en-US" sz="1200" dirty="0">
+                <a:solidFill>
+                  <a:srgbClr val="434A63"/>
+                </a:solidFill>
+                <a:latin typeface="Arial" pitchFamily="34" charset="0"/>
+                <a:ea typeface="Arial" pitchFamily="34" charset="-122"/>
+                <a:cs typeface="Arial" pitchFamily="34" charset="-120"/>
+              </a:rPr>
+              <a:t>Selbstcheck im Online-Subnetzrechner – jede Zeile muss exakt passen</a:t>
+            </a:r>
+            <a:endParaRPr lang="en-US" sz="1200" dirty="0"/>
+          </a:p>
+        </p:txBody>
+      </p:sp>
+      <p:sp>
+        <p:nvSpPr>
+          <p:cNvPr id="16" name="Shape 14"/>
+          <p:cNvSpPr/>
+          <p:nvPr/>
+        </p:nvSpPr>
+        <p:spPr>
+          <a:xfrm>
+            <a:off x="566928" y="3611880"/>
+            <a:ext cx="8010144" cy="841248"/>
+          </a:xfrm>
+          <a:prstGeom prst="rect">
+            <a:avLst/>
+          </a:prstGeom>
+          <a:solidFill>
+            <a:srgbClr val="EEF0FB"/>
+          </a:solidFill>
+          <a:ln/>
+        </p:spPr>
+      </p:sp>
+      <p:sp>
+        <p:nvSpPr>
+          <p:cNvPr id="17" name="Shape 15"/>
+          <p:cNvSpPr/>
+          <p:nvPr/>
+        </p:nvSpPr>
+        <p:spPr>
+          <a:xfrm>
+            <a:off x="566928" y="3611880"/>
+            <a:ext cx="41148" cy="841248"/>
+          </a:xfrm>
+          <a:prstGeom prst="rect">
+            <a:avLst/>
+          </a:prstGeom>
+          <a:solidFill>
+            <a:srgbClr val="9A6310"/>
+          </a:solidFill>
+          <a:ln/>
+        </p:spPr>
+      </p:sp>
+      <p:sp>
+        <p:nvSpPr>
+          <p:cNvPr id="18" name="Text 16"/>
+          <p:cNvSpPr/>
+          <p:nvPr/>
+        </p:nvSpPr>
+        <p:spPr>
+          <a:xfrm>
+            <a:off x="804672" y="3758184"/>
+            <a:ext cx="7607808" cy="242062"/>
+          </a:xfrm>
+          <a:prstGeom prst="rect">
+            <a:avLst/>
+          </a:prstGeom>
+          <a:noFill/>
+          <a:ln/>
+        </p:spPr>
+        <p:txBody>
+          <a:bodyPr wrap="square" lIns="0" tIns="0" rIns="0" bIns="0" rtlCol="0" anchor="t"/>
+          <a:lstStyle/>
+          <a:p>
+            <a:pPr indent="0" marL="0">
+              <a:buNone/>
+            </a:pPr>
+            <a:r>
+              <a:rPr lang="en-US" sz="1300" b="1" dirty="0">
+                <a:solidFill>
+                  <a:srgbClr val="272E52"/>
+                </a:solidFill>
+                <a:latin typeface="Arial" pitchFamily="34" charset="0"/>
+                <a:ea typeface="Arial" pitchFamily="34" charset="-122"/>
+                <a:cs typeface="Arial" pitchFamily="34" charset="-120"/>
+              </a:rPr>
+              <a:t>Jetzt öffnen – beides braucht ihr gleich im Raum</a:t>
+            </a:r>
+            <a:endParaRPr lang="en-US" sz="1300" dirty="0"/>
+          </a:p>
+        </p:txBody>
+      </p:sp>
+      <p:sp>
+        <p:nvSpPr>
+          <p:cNvPr id="19" name="Text 17"/>
+          <p:cNvSpPr/>
+          <p:nvPr/>
+        </p:nvSpPr>
+        <p:spPr>
+          <a:xfrm>
+            <a:off x="804672" y="4045966"/>
+            <a:ext cx="7607808" cy="288290"/>
+          </a:xfrm>
+          <a:prstGeom prst="rect">
+            <a:avLst/>
+          </a:prstGeom>
+          <a:noFill/>
+          <a:ln/>
+        </p:spPr>
+        <p:txBody>
+          <a:bodyPr wrap="square" lIns="0" tIns="0" rIns="0" bIns="0" rtlCol="0" anchor="t"/>
+          <a:lstStyle/>
+          <a:p>
             <a:pPr indent="0" marL="0">
               <a:lnSpc>
                 <a:spcPct val="92000"/>
               </a:lnSpc>
               <a:spcAft>
-                <a:spcPts val="900"/>
+                <a:spcPts val="500"/>
               </a:spcAft>
               <a:buNone/>
             </a:pPr>
             <a:r>
-              <a:rPr lang="en-US" sz="1250" dirty="0">
+              <a:rPr lang="en-US" sz="1050" dirty="0">
                 <a:solidFill>
                   <a:srgbClr val="434A63"/>
                 </a:solidFill>
@@ -9061,39 +9148,22 @@
                 <a:ea typeface="Arial" pitchFamily="34" charset="-122"/>
                 <a:cs typeface="Arial" pitchFamily="34" charset="-120"/>
               </a:rPr>
-              <a:t>Gleiche Gruppen wie beim Schichten-Check. Eine Person teilt den Bildschirm.</a:t>
-            </a:r>
-            <a:endParaRPr lang="en-US" sz="1250" dirty="0"/>
-          </a:p>
-          <a:p>
-            <a:pPr indent="0" marL="0">
-              <a:lnSpc>
-                <a:spcPct val="92000"/>
-              </a:lnSpc>
-              <a:buNone/>
-            </a:pPr>
-            <a:r>
-              <a:rPr lang="en-US" sz="1250" b="1" dirty="0">
-                <a:solidFill>
-                  <a:srgbClr val="9A6310"/>
-                </a:solidFill>
-                <a:latin typeface="Arial" pitchFamily="34" charset="0"/>
-                <a:ea typeface="Arial" pitchFamily="34" charset="-122"/>
-                <a:cs typeface="Arial" pitchFamily="34" charset="-120"/>
-              </a:rPr>
-              <a:t>▸   </a:t>
-            </a:r>
+              <a:t>Aufgabe mit allen Zahlen:  jacobmenge.github.io/kurs-unterlagen/netzwerke/praxis-subnetting/</a:t>
+            </a:r>
+            <a:endParaRPr lang="en-US" sz="1050" dirty="0"/>
+          </a:p>
+          <a:p>
             <a:pPr indent="0" marL="0">
               <a:lnSpc>
                 <a:spcPct val="92000"/>
               </a:lnSpc>
               <a:spcAft>
-                <a:spcPts val="900"/>
+                <a:spcPts val="500"/>
               </a:spcAft>
               <a:buNone/>
             </a:pPr>
             <a:r>
-              <a:rPr lang="en-US" sz="1250" dirty="0">
+              <a:rPr lang="en-US" sz="1050" dirty="0">
                 <a:solidFill>
                   <a:srgbClr val="434A63"/>
                 </a:solidFill>
@@ -9101,256 +9171,15 @@
                 <a:ea typeface="Arial" pitchFamily="34" charset="-122"/>
                 <a:cs typeface="Arial" pitchFamily="34" charset="-120"/>
               </a:rPr>
-              <a:t>Öffnet den Link zur Kursseite jetzt – im Breakout-Raum seht ihr diese Folie nicht mehr.</a:t>
-            </a:r>
-            <a:endParaRPr lang="en-US" sz="1250" dirty="0"/>
-          </a:p>
-          <a:p>
-            <a:pPr indent="0" marL="0">
-              <a:lnSpc>
-                <a:spcPct val="92000"/>
-              </a:lnSpc>
-              <a:buNone/>
-            </a:pPr>
-            <a:r>
-              <a:rPr lang="en-US" sz="1250" b="1" dirty="0">
-                <a:solidFill>
-                  <a:srgbClr val="9A6310"/>
-                </a:solidFill>
-                <a:latin typeface="Arial" pitchFamily="34" charset="0"/>
-                <a:ea typeface="Arial" pitchFamily="34" charset="-122"/>
-                <a:cs typeface="Arial" pitchFamily="34" charset="-120"/>
-              </a:rPr>
-              <a:t>▸   </a:t>
-            </a:r>
-            <a:pPr indent="0" marL="0">
-              <a:lnSpc>
-                <a:spcPct val="92000"/>
-              </a:lnSpc>
-              <a:spcAft>
-                <a:spcPts val="900"/>
-              </a:spcAft>
-              <a:buNone/>
-            </a:pPr>
-            <a:r>
-              <a:rPr lang="en-US" sz="1250" dirty="0">
-                <a:solidFill>
-                  <a:srgbClr val="434A63"/>
-                </a:solidFill>
-                <a:latin typeface="Arial" pitchFamily="34" charset="0"/>
-                <a:ea typeface="Arial" pitchFamily="34" charset="-122"/>
-                <a:cs typeface="Arial" pitchFamily="34" charset="-120"/>
-              </a:rPr>
-              <a:t>Rechnet laut und gemeinsam. Wer einen anderen Weg hat: sagen, nicht schweigen.</a:t>
-            </a:r>
-            <a:endParaRPr lang="en-US" sz="1250" dirty="0"/>
-          </a:p>
-          <a:p>
-            <a:pPr indent="0" marL="0">
-              <a:lnSpc>
-                <a:spcPct val="92000"/>
-              </a:lnSpc>
-              <a:buNone/>
-            </a:pPr>
-            <a:r>
-              <a:rPr lang="en-US" sz="1250" b="1" dirty="0">
-                <a:solidFill>
-                  <a:srgbClr val="9A6310"/>
-                </a:solidFill>
-                <a:latin typeface="Arial" pitchFamily="34" charset="0"/>
-                <a:ea typeface="Arial" pitchFamily="34" charset="-122"/>
-                <a:cs typeface="Arial" pitchFamily="34" charset="-120"/>
-              </a:rPr>
-              <a:t>▸   </a:t>
-            </a:r>
-            <a:pPr indent="0" marL="0">
-              <a:lnSpc>
-                <a:spcPct val="92000"/>
-              </a:lnSpc>
-              <a:spcAft>
-                <a:spcPts val="900"/>
-              </a:spcAft>
-              <a:buNone/>
-            </a:pPr>
-            <a:r>
-              <a:rPr lang="en-US" sz="1250" dirty="0">
-                <a:solidFill>
-                  <a:srgbClr val="434A63"/>
-                </a:solidFill>
-                <a:latin typeface="Arial" pitchFamily="34" charset="0"/>
-                <a:ea typeface="Arial" pitchFamily="34" charset="-122"/>
-                <a:cs typeface="Arial" pitchFamily="34" charset="-120"/>
-              </a:rPr>
-              <a:t>Der Online-Rechner ist der Schiedsrichter – aber erst nach eurer Rechnung, nicht statt ihr.</a:t>
-            </a:r>
-            <a:endParaRPr lang="en-US" sz="1250" dirty="0"/>
-          </a:p>
-          <a:p>
-            <a:pPr indent="0" marL="0">
-              <a:lnSpc>
-                <a:spcPct val="92000"/>
-              </a:lnSpc>
-              <a:buNone/>
-            </a:pPr>
-            <a:r>
-              <a:rPr lang="en-US" sz="1250" b="1" dirty="0">
-                <a:solidFill>
-                  <a:srgbClr val="9A6310"/>
-                </a:solidFill>
-                <a:latin typeface="Arial" pitchFamily="34" charset="0"/>
-                <a:ea typeface="Arial" pitchFamily="34" charset="-122"/>
-                <a:cs typeface="Arial" pitchFamily="34" charset="-120"/>
-              </a:rPr>
-              <a:t>▸   </a:t>
-            </a:r>
-            <a:pPr indent="0" marL="0">
-              <a:lnSpc>
-                <a:spcPct val="92000"/>
-              </a:lnSpc>
-              <a:spcAft>
-                <a:spcPts val="900"/>
-              </a:spcAft>
-              <a:buNone/>
-            </a:pPr>
-            <a:r>
-              <a:rPr lang="en-US" sz="1250" dirty="0">
-                <a:solidFill>
-                  <a:srgbClr val="434A63"/>
-                </a:solidFill>
-                <a:latin typeface="Arial" pitchFamily="34" charset="0"/>
-                <a:ea typeface="Arial" pitchFamily="34" charset="-122"/>
-                <a:cs typeface="Arial" pitchFamily="34" charset="-120"/>
-              </a:rPr>
-              <a:t>Wenn es klemmt: in eurem Raum auf „Um Hilfe bitten“ klicken. Dann komme ich rein.</a:t>
-            </a:r>
-            <a:endParaRPr lang="en-US" sz="1250" dirty="0"/>
-          </a:p>
-        </p:txBody>
-      </p:sp>
-      <p:sp>
-        <p:nvSpPr>
-          <p:cNvPr id="6" name="Shape 4"/>
-          <p:cNvSpPr/>
-          <p:nvPr/>
-        </p:nvSpPr>
-        <p:spPr>
-          <a:xfrm>
-            <a:off x="566928" y="3602736"/>
-            <a:ext cx="8010144" cy="822960"/>
-          </a:xfrm>
-          <a:prstGeom prst="rect">
-            <a:avLst/>
-          </a:prstGeom>
-          <a:solidFill>
-            <a:srgbClr val="F5F6FC"/>
-          </a:solidFill>
-          <a:ln/>
-        </p:spPr>
-      </p:sp>
-      <p:sp>
-        <p:nvSpPr>
-          <p:cNvPr id="7" name="Shape 5"/>
-          <p:cNvSpPr/>
-          <p:nvPr/>
-        </p:nvSpPr>
-        <p:spPr>
-          <a:xfrm>
-            <a:off x="566928" y="3602736"/>
-            <a:ext cx="41148" cy="822960"/>
-          </a:xfrm>
-          <a:prstGeom prst="rect">
-            <a:avLst/>
-          </a:prstGeom>
-          <a:solidFill>
-            <a:srgbClr val="9A6310"/>
-          </a:solidFill>
-          <a:ln/>
-        </p:spPr>
-      </p:sp>
-      <p:sp>
-        <p:nvSpPr>
-          <p:cNvPr id="8" name="Text 6"/>
-          <p:cNvSpPr/>
-          <p:nvPr/>
-        </p:nvSpPr>
-        <p:spPr>
-          <a:xfrm>
-            <a:off x="804672" y="3749040"/>
-            <a:ext cx="7607808" cy="242062"/>
-          </a:xfrm>
-          <a:prstGeom prst="rect">
-            <a:avLst/>
-          </a:prstGeom>
-          <a:noFill/>
-          <a:ln/>
-        </p:spPr>
-        <p:txBody>
-          <a:bodyPr wrap="square" lIns="0" tIns="0" rIns="0" bIns="0" rtlCol="0" anchor="t"/>
-          <a:lstStyle/>
-          <a:p>
-            <a:pPr indent="0" marL="0">
-              <a:buNone/>
-            </a:pPr>
-            <a:r>
-              <a:rPr lang="en-US" sz="1300" b="1" dirty="0">
-                <a:solidFill>
-                  <a:srgbClr val="272E52"/>
-                </a:solidFill>
-                <a:latin typeface="Arial" pitchFamily="34" charset="0"/>
-                <a:ea typeface="Arial" pitchFamily="34" charset="-122"/>
-                <a:cs typeface="Arial" pitchFamily="34" charset="-120"/>
-              </a:rPr>
-              <a:t>Um 20:15 sind alle wieder hier</a:t>
-            </a:r>
-            <a:endParaRPr lang="en-US" sz="1300" dirty="0"/>
-          </a:p>
-        </p:txBody>
-      </p:sp>
-      <p:sp>
-        <p:nvSpPr>
-          <p:cNvPr id="9" name="Text 7"/>
-          <p:cNvSpPr/>
-          <p:nvPr/>
-        </p:nvSpPr>
-        <p:spPr>
-          <a:xfrm>
-            <a:off x="804672" y="4036822"/>
-            <a:ext cx="7607808" cy="270002"/>
-          </a:xfrm>
-          <a:prstGeom prst="rect">
-            <a:avLst/>
-          </a:prstGeom>
-          <a:noFill/>
-          <a:ln/>
-        </p:spPr>
-        <p:txBody>
-          <a:bodyPr wrap="square" lIns="0" tIns="0" rIns="0" bIns="0" rtlCol="0" anchor="t"/>
-          <a:lstStyle/>
-          <a:p>
-            <a:pPr indent="0" marL="0">
-              <a:lnSpc>
-                <a:spcPct val="92000"/>
-              </a:lnSpc>
-              <a:buNone/>
-            </a:pPr>
-            <a:r>
-              <a:rPr lang="en-US" sz="1150" dirty="0">
-                <a:solidFill>
-                  <a:srgbClr val="434A63"/>
-                </a:solidFill>
-                <a:latin typeface="Arial" pitchFamily="34" charset="0"/>
-                <a:ea typeface="Arial" pitchFamily="34" charset="-122"/>
-                <a:cs typeface="Arial" pitchFamily="34" charset="-120"/>
-              </a:rPr>
-              <a:t>Sprecher wie gehabt. Jede Gruppe zeigt nachher ihre Planungstabelle.</a:t>
-            </a:r>
-            <a:endParaRPr lang="en-US" sz="1150" dirty="0"/>
-          </a:p>
-        </p:txBody>
-      </p:sp>
-      <p:sp>
-        <p:nvSpPr>
-          <p:cNvPr id="10" name="Shape 8"/>
+              <a:t>Ergebnisse eintragen:  &lt;Link zum Ergebnis-Dokument hier eintragen&gt;</a:t>
+            </a:r>
+            <a:endParaRPr lang="en-US" sz="1050" dirty="0"/>
+          </a:p>
+        </p:txBody>
+      </p:sp>
+      <p:sp>
+        <p:nvSpPr>
+          <p:cNvPr id="20" name="Shape 18"/>
           <p:cNvSpPr/>
           <p:nvPr/>
         </p:nvSpPr>
@@ -9373,7 +9202,7 @@
       </p:sp>
       <p:sp>
         <p:nvSpPr>
-          <p:cNvPr id="11" name="Text 9"/>
+          <p:cNvPr id="21" name="Text 19"/>
           <p:cNvSpPr/>
           <p:nvPr/>
         </p:nvSpPr>
@@ -9412,7 +9241,7 @@
       </p:sp>
       <p:sp>
         <p:nvSpPr>
-          <p:cNvPr id="12" name="Text 10"/>
+          <p:cNvPr id="22" name="Text 20"/>
           <p:cNvSpPr/>
           <p:nvPr/>
         </p:nvSpPr>
@@ -9443,7 +9272,7 @@
                 <a:ea typeface="Arial" pitchFamily="34" charset="-122"/>
                 <a:cs typeface="Arial" pitchFamily="34" charset="-120"/>
               </a:rPr>
-              <a:t>17/21</a:t>
+              <a:t>17/22</a:t>
             </a:r>
             <a:endParaRPr lang="en-US" sz="1050" dirty="0"/>
           </a:p>
@@ -9489,107 +9318,368 @@
         </p:nvSpPr>
         <p:spPr>
           <a:xfrm>
-            <a:off x="6355080" y="0"/>
-            <a:ext cx="2788920" cy="5143500"/>
+            <a:off x="566928" y="201168"/>
+            <a:ext cx="475488" cy="50292"/>
           </a:xfrm>
           <a:prstGeom prst="rect">
             <a:avLst/>
           </a:prstGeom>
           <a:solidFill>
-            <a:srgbClr val="EEF0FB"/>
+            <a:srgbClr val="9A6310"/>
           </a:solidFill>
           <a:ln/>
         </p:spPr>
       </p:sp>
       <p:sp>
         <p:nvSpPr>
-          <p:cNvPr id="3" name="Shape 1"/>
-          <p:cNvSpPr/>
-          <p:nvPr/>
-        </p:nvSpPr>
-        <p:spPr>
-          <a:xfrm>
-            <a:off x="6355080" y="0"/>
-            <a:ext cx="45720" cy="5143500"/>
+          <p:cNvPr id="3" name="Text 1"/>
+          <p:cNvSpPr/>
+          <p:nvPr/>
+        </p:nvSpPr>
+        <p:spPr>
+          <a:xfrm>
+            <a:off x="566928" y="384048"/>
+            <a:ext cx="8010144" cy="237744"/>
+          </a:xfrm>
+          <a:prstGeom prst="rect">
+            <a:avLst/>
+          </a:prstGeom>
+          <a:noFill/>
+          <a:ln/>
+        </p:spPr>
+        <p:txBody>
+          <a:bodyPr wrap="square" lIns="0" tIns="0" rIns="0" bIns="0" rtlCol="0" anchor="ctr"/>
+          <a:lstStyle/>
+          <a:p>
+            <a:pPr indent="0" marL="0">
+              <a:buNone/>
+            </a:pPr>
+            <a:r>
+              <a:rPr lang="en-US" sz="1150" b="1" spc="180" kern="0" dirty="0">
+                <a:solidFill>
+                  <a:srgbClr val="9A6310"/>
+                </a:solidFill>
+                <a:latin typeface="Arial" pitchFamily="34" charset="0"/>
+                <a:ea typeface="Arial" pitchFamily="34" charset="-122"/>
+                <a:cs typeface="Arial" pitchFamily="34" charset="-120"/>
+              </a:rPr>
+              <a:t>SPIELREGELN</a:t>
+            </a:r>
+            <a:endParaRPr lang="en-US" sz="1150" dirty="0"/>
+          </a:p>
+        </p:txBody>
+      </p:sp>
+      <p:sp>
+        <p:nvSpPr>
+          <p:cNvPr id="4" name="Text 2"/>
+          <p:cNvSpPr/>
+          <p:nvPr/>
+        </p:nvSpPr>
+        <p:spPr>
+          <a:xfrm>
+            <a:off x="566928" y="731520"/>
+            <a:ext cx="8010144" cy="603504"/>
+          </a:xfrm>
+          <a:prstGeom prst="rect">
+            <a:avLst/>
+          </a:prstGeom>
+          <a:noFill/>
+          <a:ln/>
+        </p:spPr>
+        <p:txBody>
+          <a:bodyPr wrap="square" lIns="0" tIns="0" rIns="0" bIns="0" rtlCol="0" anchor="t"/>
+          <a:lstStyle/>
+          <a:p>
+            <a:pPr indent="0" marL="0">
+              <a:buNone/>
+            </a:pPr>
+            <a:r>
+              <a:rPr lang="en-US" sz="2600" b="1" dirty="0">
+                <a:solidFill>
+                  <a:srgbClr val="272E52"/>
+                </a:solidFill>
+                <a:latin typeface="Arial" pitchFamily="34" charset="0"/>
+                <a:ea typeface="Arial" pitchFamily="34" charset="-122"/>
+                <a:cs typeface="Arial" pitchFamily="34" charset="-120"/>
+              </a:rPr>
+              <a:t>So arbeitet ihr</a:t>
+            </a:r>
+            <a:endParaRPr lang="en-US" sz="2600" dirty="0"/>
+          </a:p>
+        </p:txBody>
+      </p:sp>
+      <p:sp>
+        <p:nvSpPr>
+          <p:cNvPr id="5" name="Text 3"/>
+          <p:cNvSpPr/>
+          <p:nvPr/>
+        </p:nvSpPr>
+        <p:spPr>
+          <a:xfrm>
+            <a:off x="566928" y="1700784"/>
+            <a:ext cx="8010144" cy="2011680"/>
+          </a:xfrm>
+          <a:prstGeom prst="rect">
+            <a:avLst/>
+          </a:prstGeom>
+          <a:noFill/>
+          <a:ln/>
+        </p:spPr>
+        <p:txBody>
+          <a:bodyPr wrap="square" lIns="0" tIns="0" rIns="0" bIns="0" rtlCol="0" anchor="t"/>
+          <a:lstStyle/>
+          <a:p>
+            <a:pPr indent="0" marL="0">
+              <a:lnSpc>
+                <a:spcPct val="92000"/>
+              </a:lnSpc>
+              <a:buNone/>
+            </a:pPr>
+            <a:r>
+              <a:rPr lang="en-US" sz="1250" b="1" dirty="0">
+                <a:solidFill>
+                  <a:srgbClr val="9A6310"/>
+                </a:solidFill>
+                <a:latin typeface="Arial" pitchFamily="34" charset="0"/>
+                <a:ea typeface="Arial" pitchFamily="34" charset="-122"/>
+                <a:cs typeface="Arial" pitchFamily="34" charset="-120"/>
+              </a:rPr>
+              <a:t>▸   </a:t>
+            </a:r>
+            <a:pPr indent="0" marL="0">
+              <a:lnSpc>
+                <a:spcPct val="92000"/>
+              </a:lnSpc>
+              <a:spcAft>
+                <a:spcPts val="900"/>
+              </a:spcAft>
+              <a:buNone/>
+            </a:pPr>
+            <a:r>
+              <a:rPr lang="en-US" sz="1250" dirty="0">
+                <a:solidFill>
+                  <a:srgbClr val="434A63"/>
+                </a:solidFill>
+                <a:latin typeface="Arial" pitchFamily="34" charset="0"/>
+                <a:ea typeface="Arial" pitchFamily="34" charset="-122"/>
+                <a:cs typeface="Arial" pitchFamily="34" charset="-120"/>
+              </a:rPr>
+              <a:t>Gleiche Gruppen wie beim Schichten-Check. Eine Person teilt den Bildschirm.</a:t>
+            </a:r>
+            <a:endParaRPr lang="en-US" sz="1250" dirty="0"/>
+          </a:p>
+          <a:p>
+            <a:pPr indent="0" marL="0">
+              <a:lnSpc>
+                <a:spcPct val="92000"/>
+              </a:lnSpc>
+              <a:buNone/>
+            </a:pPr>
+            <a:r>
+              <a:rPr lang="en-US" sz="1250" b="1" dirty="0">
+                <a:solidFill>
+                  <a:srgbClr val="9A6310"/>
+                </a:solidFill>
+                <a:latin typeface="Arial" pitchFamily="34" charset="0"/>
+                <a:ea typeface="Arial" pitchFamily="34" charset="-122"/>
+                <a:cs typeface="Arial" pitchFamily="34" charset="-120"/>
+              </a:rPr>
+              <a:t>▸   </a:t>
+            </a:r>
+            <a:pPr indent="0" marL="0">
+              <a:lnSpc>
+                <a:spcPct val="92000"/>
+              </a:lnSpc>
+              <a:spcAft>
+                <a:spcPts val="900"/>
+              </a:spcAft>
+              <a:buNone/>
+            </a:pPr>
+            <a:r>
+              <a:rPr lang="en-US" sz="1250" dirty="0">
+                <a:solidFill>
+                  <a:srgbClr val="434A63"/>
+                </a:solidFill>
+                <a:latin typeface="Arial" pitchFamily="34" charset="0"/>
+                <a:ea typeface="Arial" pitchFamily="34" charset="-122"/>
+                <a:cs typeface="Arial" pitchFamily="34" charset="-120"/>
+              </a:rPr>
+              <a:t>Öffnet den Link zur Kursseite jetzt – im Breakout-Raum seht ihr diese Folie nicht mehr.</a:t>
+            </a:r>
+            <a:endParaRPr lang="en-US" sz="1250" dirty="0"/>
+          </a:p>
+          <a:p>
+            <a:pPr indent="0" marL="0">
+              <a:lnSpc>
+                <a:spcPct val="92000"/>
+              </a:lnSpc>
+              <a:buNone/>
+            </a:pPr>
+            <a:r>
+              <a:rPr lang="en-US" sz="1250" b="1" dirty="0">
+                <a:solidFill>
+                  <a:srgbClr val="9A6310"/>
+                </a:solidFill>
+                <a:latin typeface="Arial" pitchFamily="34" charset="0"/>
+                <a:ea typeface="Arial" pitchFamily="34" charset="-122"/>
+                <a:cs typeface="Arial" pitchFamily="34" charset="-120"/>
+              </a:rPr>
+              <a:t>▸   </a:t>
+            </a:r>
+            <a:pPr indent="0" marL="0">
+              <a:lnSpc>
+                <a:spcPct val="92000"/>
+              </a:lnSpc>
+              <a:spcAft>
+                <a:spcPts val="900"/>
+              </a:spcAft>
+              <a:buNone/>
+            </a:pPr>
+            <a:r>
+              <a:rPr lang="en-US" sz="1250" dirty="0">
+                <a:solidFill>
+                  <a:srgbClr val="434A63"/>
+                </a:solidFill>
+                <a:latin typeface="Arial" pitchFamily="34" charset="0"/>
+                <a:ea typeface="Arial" pitchFamily="34" charset="-122"/>
+                <a:cs typeface="Arial" pitchFamily="34" charset="-120"/>
+              </a:rPr>
+              <a:t>Rechnet laut und gemeinsam. Wer einen anderen Weg hat: sagen, nicht schweigen.</a:t>
+            </a:r>
+            <a:endParaRPr lang="en-US" sz="1250" dirty="0"/>
+          </a:p>
+          <a:p>
+            <a:pPr indent="0" marL="0">
+              <a:lnSpc>
+                <a:spcPct val="92000"/>
+              </a:lnSpc>
+              <a:buNone/>
+            </a:pPr>
+            <a:r>
+              <a:rPr lang="en-US" sz="1250" b="1" dirty="0">
+                <a:solidFill>
+                  <a:srgbClr val="9A6310"/>
+                </a:solidFill>
+                <a:latin typeface="Arial" pitchFamily="34" charset="0"/>
+                <a:ea typeface="Arial" pitchFamily="34" charset="-122"/>
+                <a:cs typeface="Arial" pitchFamily="34" charset="-120"/>
+              </a:rPr>
+              <a:t>▸   </a:t>
+            </a:r>
+            <a:pPr indent="0" marL="0">
+              <a:lnSpc>
+                <a:spcPct val="92000"/>
+              </a:lnSpc>
+              <a:spcAft>
+                <a:spcPts val="900"/>
+              </a:spcAft>
+              <a:buNone/>
+            </a:pPr>
+            <a:r>
+              <a:rPr lang="en-US" sz="1250" dirty="0">
+                <a:solidFill>
+                  <a:srgbClr val="434A63"/>
+                </a:solidFill>
+                <a:latin typeface="Arial" pitchFamily="34" charset="0"/>
+                <a:ea typeface="Arial" pitchFamily="34" charset="-122"/>
+                <a:cs typeface="Arial" pitchFamily="34" charset="-120"/>
+              </a:rPr>
+              <a:t>Der Online-Rechner ist der Schiedsrichter – aber erst nach eurer Rechnung, nicht statt ihr.</a:t>
+            </a:r>
+            <a:endParaRPr lang="en-US" sz="1250" dirty="0"/>
+          </a:p>
+          <a:p>
+            <a:pPr indent="0" marL="0">
+              <a:lnSpc>
+                <a:spcPct val="92000"/>
+              </a:lnSpc>
+              <a:buNone/>
+            </a:pPr>
+            <a:r>
+              <a:rPr lang="en-US" sz="1250" b="1" dirty="0">
+                <a:solidFill>
+                  <a:srgbClr val="9A6310"/>
+                </a:solidFill>
+                <a:latin typeface="Arial" pitchFamily="34" charset="0"/>
+                <a:ea typeface="Arial" pitchFamily="34" charset="-122"/>
+                <a:cs typeface="Arial" pitchFamily="34" charset="-120"/>
+              </a:rPr>
+              <a:t>▸   </a:t>
+            </a:r>
+            <a:pPr indent="0" marL="0">
+              <a:lnSpc>
+                <a:spcPct val="92000"/>
+              </a:lnSpc>
+              <a:spcAft>
+                <a:spcPts val="900"/>
+              </a:spcAft>
+              <a:buNone/>
+            </a:pPr>
+            <a:r>
+              <a:rPr lang="en-US" sz="1250" dirty="0">
+                <a:solidFill>
+                  <a:srgbClr val="434A63"/>
+                </a:solidFill>
+                <a:latin typeface="Arial" pitchFamily="34" charset="0"/>
+                <a:ea typeface="Arial" pitchFamily="34" charset="-122"/>
+                <a:cs typeface="Arial" pitchFamily="34" charset="-120"/>
+              </a:rPr>
+              <a:t>Wenn es klemmt: in eurem Raum auf „Um Hilfe bitten“ klicken. Dann komme ich rein.</a:t>
+            </a:r>
+            <a:endParaRPr lang="en-US" sz="1250" dirty="0"/>
+          </a:p>
+        </p:txBody>
+      </p:sp>
+      <p:sp>
+        <p:nvSpPr>
+          <p:cNvPr id="6" name="Shape 4"/>
+          <p:cNvSpPr/>
+          <p:nvPr/>
+        </p:nvSpPr>
+        <p:spPr>
+          <a:xfrm>
+            <a:off x="566928" y="3602736"/>
+            <a:ext cx="8010144" cy="822960"/>
           </a:xfrm>
           <a:prstGeom prst="rect">
             <a:avLst/>
           </a:prstGeom>
           <a:solidFill>
-            <a:srgbClr val="3843AF"/>
+            <a:srgbClr val="F5F6FC"/>
           </a:solidFill>
           <a:ln/>
         </p:spPr>
       </p:sp>
       <p:sp>
         <p:nvSpPr>
-          <p:cNvPr id="4" name="Text 2"/>
-          <p:cNvSpPr/>
-          <p:nvPr/>
-        </p:nvSpPr>
-        <p:spPr>
-          <a:xfrm>
-            <a:off x="6629400" y="1463040"/>
-            <a:ext cx="2194560" cy="1737360"/>
-          </a:xfrm>
-          <a:prstGeom prst="rect">
-            <a:avLst/>
-          </a:prstGeom>
-          <a:noFill/>
-          <a:ln/>
-        </p:spPr>
-        <p:txBody>
-          <a:bodyPr wrap="square" lIns="0" tIns="0" rIns="0" bIns="0" rtlCol="0" anchor="ctr"/>
-          <a:lstStyle/>
-          <a:p>
-            <a:pPr algn="ctr" indent="0" marL="0">
-              <a:buNone/>
-            </a:pPr>
-            <a:r>
-              <a:rPr lang="en-US" sz="8400" b="1" dirty="0">
-                <a:solidFill>
-                  <a:srgbClr val="3843AF"/>
-                </a:solidFill>
-                <a:latin typeface="Arial" pitchFamily="34" charset="0"/>
-                <a:ea typeface="Arial" pitchFamily="34" charset="-122"/>
-                <a:cs typeface="Arial" pitchFamily="34" charset="-120"/>
-              </a:rPr>
-              <a:t>05</a:t>
-            </a:r>
-            <a:endParaRPr lang="en-US" sz="8400" dirty="0"/>
-          </a:p>
-        </p:txBody>
-      </p:sp>
-      <p:sp>
-        <p:nvSpPr>
-          <p:cNvPr id="5" name="Shape 3"/>
-          <p:cNvSpPr/>
-          <p:nvPr/>
-        </p:nvSpPr>
-        <p:spPr>
-          <a:xfrm>
-            <a:off x="566928" y="1883664"/>
-            <a:ext cx="475488" cy="50292"/>
+          <p:cNvPr id="7" name="Shape 5"/>
+          <p:cNvSpPr/>
+          <p:nvPr/>
+        </p:nvSpPr>
+        <p:spPr>
+          <a:xfrm>
+            <a:off x="566928" y="3602736"/>
+            <a:ext cx="41148" cy="822960"/>
           </a:xfrm>
           <a:prstGeom prst="rect">
             <a:avLst/>
           </a:prstGeom>
           <a:solidFill>
-            <a:srgbClr val="3843AF"/>
+            <a:srgbClr val="9A6310"/>
           </a:solidFill>
           <a:ln/>
         </p:spPr>
       </p:sp>
       <p:sp>
         <p:nvSpPr>
-          <p:cNvPr id="6" name="Text 4"/>
-          <p:cNvSpPr/>
-          <p:nvPr/>
-        </p:nvSpPr>
-        <p:spPr>
-          <a:xfrm>
-            <a:off x="566928" y="2084832"/>
-            <a:ext cx="5394960" cy="868680"/>
+          <p:cNvPr id="8" name="Text 6"/>
+          <p:cNvSpPr/>
+          <p:nvPr/>
+        </p:nvSpPr>
+        <p:spPr>
+          <a:xfrm>
+            <a:off x="804672" y="3749040"/>
+            <a:ext cx="7607808" cy="242062"/>
           </a:xfrm>
           <a:prstGeom prst="rect">
             <a:avLst/>
@@ -9605,7 +9695,7 @@
               <a:buNone/>
             </a:pPr>
             <a:r>
-              <a:rPr lang="en-US" sz="3000" b="1" dirty="0">
+              <a:rPr lang="en-US" sz="1300" b="1" dirty="0">
                 <a:solidFill>
                   <a:srgbClr val="272E52"/>
                 </a:solidFill>
@@ -9613,22 +9703,22 @@
                 <a:ea typeface="Arial" pitchFamily="34" charset="-122"/>
                 <a:cs typeface="Arial" pitchFamily="34" charset="-120"/>
               </a:rPr>
-              <a:t>Eure Netzpläne</a:t>
-            </a:r>
-            <a:endParaRPr lang="en-US" sz="3000" dirty="0"/>
-          </a:p>
-        </p:txBody>
-      </p:sp>
-      <p:sp>
-        <p:nvSpPr>
-          <p:cNvPr id="7" name="Text 5"/>
-          <p:cNvSpPr/>
-          <p:nvPr/>
-        </p:nvSpPr>
-        <p:spPr>
-          <a:xfrm>
-            <a:off x="566928" y="3017520"/>
-            <a:ext cx="5394960" cy="548640"/>
+              <a:t>Um 20:15 sind alle wieder hier</a:t>
+            </a:r>
+            <a:endParaRPr lang="en-US" sz="1300" dirty="0"/>
+          </a:p>
+        </p:txBody>
+      </p:sp>
+      <p:sp>
+        <p:nvSpPr>
+          <p:cNvPr id="9" name="Text 7"/>
+          <p:cNvSpPr/>
+          <p:nvPr/>
+        </p:nvSpPr>
+        <p:spPr>
+          <a:xfrm>
+            <a:off x="804672" y="4036822"/>
+            <a:ext cx="7607808" cy="270002"/>
           </a:xfrm>
           <a:prstGeom prst="rect">
             <a:avLst/>
@@ -9641,10 +9731,75 @@
           <a:lstStyle/>
           <a:p>
             <a:pPr indent="0" marL="0">
-              <a:buNone/>
-            </a:pPr>
-            <a:r>
-              <a:rPr lang="en-US" sz="1350" dirty="0">
+              <a:lnSpc>
+                <a:spcPct val="92000"/>
+              </a:lnSpc>
+              <a:buNone/>
+            </a:pPr>
+            <a:r>
+              <a:rPr lang="en-US" sz="1150" dirty="0">
+                <a:solidFill>
+                  <a:srgbClr val="434A63"/>
+                </a:solidFill>
+                <a:latin typeface="Arial" pitchFamily="34" charset="0"/>
+                <a:ea typeface="Arial" pitchFamily="34" charset="-122"/>
+                <a:cs typeface="Arial" pitchFamily="34" charset="-120"/>
+              </a:rPr>
+              <a:t>Sprecher wie gehabt. Jede Gruppe zeigt nachher ihre Planungstabelle.</a:t>
+            </a:r>
+            <a:endParaRPr lang="en-US" sz="1150" dirty="0"/>
+          </a:p>
+        </p:txBody>
+      </p:sp>
+      <p:sp>
+        <p:nvSpPr>
+          <p:cNvPr id="10" name="Shape 8"/>
+          <p:cNvSpPr/>
+          <p:nvPr/>
+        </p:nvSpPr>
+        <p:spPr>
+          <a:xfrm>
+            <a:off x="566928" y="4631436"/>
+            <a:ext cx="8010144" cy="0"/>
+          </a:xfrm>
+          <a:prstGeom prst="line">
+            <a:avLst/>
+          </a:prstGeom>
+          <a:noFill/>
+          <a:ln w="9525">
+            <a:solidFill>
+              <a:srgbClr val="DFE3F0"/>
+            </a:solidFill>
+            <a:prstDash val="solid"/>
+          </a:ln>
+        </p:spPr>
+      </p:sp>
+      <p:sp>
+        <p:nvSpPr>
+          <p:cNvPr id="11" name="Text 9"/>
+          <p:cNvSpPr/>
+          <p:nvPr/>
+        </p:nvSpPr>
+        <p:spPr>
+          <a:xfrm>
+            <a:off x="566928" y="4722876"/>
+            <a:ext cx="5029200" cy="237744"/>
+          </a:xfrm>
+          <a:prstGeom prst="rect">
+            <a:avLst/>
+          </a:prstGeom>
+          <a:noFill/>
+          <a:ln/>
+        </p:spPr>
+        <p:txBody>
+          <a:bodyPr wrap="square" lIns="0" tIns="0" rIns="0" bIns="0" rtlCol="0" anchor="ctr"/>
+          <a:lstStyle/>
+          <a:p>
+            <a:pPr indent="0" marL="0">
+              <a:buNone/>
+            </a:pPr>
+            <a:r>
+              <a:rPr lang="en-US" sz="1050" spc="30" kern="0" dirty="0">
                 <a:solidFill>
                   <a:srgbClr val="5C6377"/>
                 </a:solidFill>
@@ -9652,9 +9807,48 @@
                 <a:ea typeface="Arial" pitchFamily="34" charset="-122"/>
                 <a:cs typeface="Arial" pitchFamily="34" charset="-120"/>
               </a:rPr>
-              <a:t>Vier Lösungen, ein Vergleich – und die Probe aufs Exempel</a:t>
-            </a:r>
-            <a:endParaRPr lang="en-US" sz="1350" dirty="0"/>
+              <a:t>Breakout</a:t>
+            </a:r>
+            <a:endParaRPr lang="en-US" sz="1050" dirty="0"/>
+          </a:p>
+        </p:txBody>
+      </p:sp>
+      <p:sp>
+        <p:nvSpPr>
+          <p:cNvPr id="12" name="Text 10"/>
+          <p:cNvSpPr/>
+          <p:nvPr/>
+        </p:nvSpPr>
+        <p:spPr>
+          <a:xfrm>
+            <a:off x="8028432" y="4722876"/>
+            <a:ext cx="548640" cy="237744"/>
+          </a:xfrm>
+          <a:prstGeom prst="rect">
+            <a:avLst/>
+          </a:prstGeom>
+          <a:noFill/>
+          <a:ln/>
+        </p:spPr>
+        <p:txBody>
+          <a:bodyPr wrap="square" lIns="0" tIns="0" rIns="0" bIns="0" rtlCol="0" anchor="ctr"/>
+          <a:lstStyle/>
+          <a:p>
+            <a:pPr algn="r" indent="0" marL="0">
+              <a:buNone/>
+            </a:pPr>
+            <a:r>
+              <a:rPr lang="en-US" sz="1050" dirty="0">
+                <a:solidFill>
+                  <a:srgbClr val="5C6377"/>
+                </a:solidFill>
+                <a:latin typeface="Arial" pitchFamily="34" charset="0"/>
+                <a:ea typeface="Arial" pitchFamily="34" charset="-122"/>
+                <a:cs typeface="Arial" pitchFamily="34" charset="-120"/>
+              </a:rPr>
+              <a:t>18/22</a:t>
+            </a:r>
+            <a:endParaRPr lang="en-US" sz="1050" dirty="0"/>
           </a:p>
         </p:txBody>
       </p:sp>
@@ -9698,8 +9892,28 @@
         </p:nvSpPr>
         <p:spPr>
           <a:xfrm>
-            <a:off x="566928" y="201168"/>
-            <a:ext cx="475488" cy="50292"/>
+            <a:off x="6355080" y="0"/>
+            <a:ext cx="2788920" cy="5143500"/>
+          </a:xfrm>
+          <a:prstGeom prst="rect">
+            <a:avLst/>
+          </a:prstGeom>
+          <a:solidFill>
+            <a:srgbClr val="EEF0FB"/>
+          </a:solidFill>
+          <a:ln/>
+        </p:spPr>
+      </p:sp>
+      <p:sp>
+        <p:nvSpPr>
+          <p:cNvPr id="3" name="Shape 1"/>
+          <p:cNvSpPr/>
+          <p:nvPr/>
+        </p:nvSpPr>
+        <p:spPr>
+          <a:xfrm>
+            <a:off x="6355080" y="0"/>
+            <a:ext cx="45720" cy="5143500"/>
           </a:xfrm>
           <a:prstGeom prst="rect">
             <a:avLst/>
@@ -9712,30 +9926,30 @@
       </p:sp>
       <p:sp>
         <p:nvSpPr>
-          <p:cNvPr id="3" name="Text 1"/>
-          <p:cNvSpPr/>
-          <p:nvPr/>
-        </p:nvSpPr>
-        <p:spPr>
-          <a:xfrm>
-            <a:off x="566928" y="384048"/>
-            <a:ext cx="8010144" cy="237744"/>
-          </a:xfrm>
-          <a:prstGeom prst="rect">
-            <a:avLst/>
-          </a:prstGeom>
-          <a:noFill/>
-          <a:ln/>
-        </p:spPr>
-        <p:txBody>
-          <a:bodyPr wrap="square" lIns="0" tIns="0" rIns="0" bIns="0" rtlCol="0" anchor="ctr"/>
-          <a:lstStyle/>
-          <a:p>
-            <a:pPr indent="0" marL="0">
-              <a:buNone/>
-            </a:pPr>
-            <a:r>
-              <a:rPr lang="en-US" sz="1150" b="1" spc="180" kern="0" dirty="0">
+          <p:cNvPr id="4" name="Text 2"/>
+          <p:cNvSpPr/>
+          <p:nvPr/>
+        </p:nvSpPr>
+        <p:spPr>
+          <a:xfrm>
+            <a:off x="6629400" y="1463040"/>
+            <a:ext cx="2194560" cy="1737360"/>
+          </a:xfrm>
+          <a:prstGeom prst="rect">
+            <a:avLst/>
+          </a:prstGeom>
+          <a:noFill/>
+          <a:ln/>
+        </p:spPr>
+        <p:txBody>
+          <a:bodyPr wrap="square" lIns="0" tIns="0" rIns="0" bIns="0" rtlCol="0" anchor="ctr"/>
+          <a:lstStyle/>
+          <a:p>
+            <a:pPr algn="ctr" indent="0" marL="0">
+              <a:buNone/>
+            </a:pPr>
+            <a:r>
+              <a:rPr lang="en-US" sz="8400" b="1" dirty="0">
                 <a:solidFill>
                   <a:srgbClr val="3843AF"/>
                 </a:solidFill>
@@ -9743,48 +9957,9 @@
                 <a:ea typeface="Arial" pitchFamily="34" charset="-122"/>
                 <a:cs typeface="Arial" pitchFamily="34" charset="-120"/>
               </a:rPr>
-              <a:t>AUSWERTUNG · 35 MINUTEN</a:t>
-            </a:r>
-            <a:endParaRPr lang="en-US" sz="1150" dirty="0"/>
-          </a:p>
-        </p:txBody>
-      </p:sp>
-      <p:sp>
-        <p:nvSpPr>
-          <p:cNvPr id="4" name="Text 2"/>
-          <p:cNvSpPr/>
-          <p:nvPr/>
-        </p:nvSpPr>
-        <p:spPr>
-          <a:xfrm>
-            <a:off x="566928" y="731520"/>
-            <a:ext cx="8010144" cy="603504"/>
-          </a:xfrm>
-          <a:prstGeom prst="rect">
-            <a:avLst/>
-          </a:prstGeom>
-          <a:noFill/>
-          <a:ln/>
-        </p:spPr>
-        <p:txBody>
-          <a:bodyPr wrap="square" lIns="0" tIns="0" rIns="0" bIns="0" rtlCol="0" anchor="t"/>
-          <a:lstStyle/>
-          <a:p>
-            <a:pPr indent="0" marL="0">
-              <a:buNone/>
-            </a:pPr>
-            <a:r>
-              <a:rPr lang="en-US" sz="2600" b="1" dirty="0">
-                <a:solidFill>
-                  <a:srgbClr val="272E52"/>
-                </a:solidFill>
-                <a:latin typeface="Arial" pitchFamily="34" charset="0"/>
-                <a:ea typeface="Arial" pitchFamily="34" charset="-122"/>
-                <a:cs typeface="Arial" pitchFamily="34" charset="-120"/>
-              </a:rPr>
-              <a:t>Das gehen wir gemeinsam durch</a:t>
-            </a:r>
-            <a:endParaRPr lang="en-US" sz="2600" dirty="0"/>
+              <a:t>05</a:t>
+            </a:r>
+            <a:endParaRPr lang="en-US" sz="8400" dirty="0"/>
           </a:p>
         </p:txBody>
       </p:sp>
@@ -9796,478 +9971,8 @@
         </p:nvSpPr>
         <p:spPr>
           <a:xfrm>
-            <a:off x="438912" y="1737360"/>
-            <a:ext cx="8266176" cy="384048"/>
-          </a:xfrm>
-          <a:prstGeom prst="rect">
-            <a:avLst/>
-          </a:prstGeom>
-          <a:solidFill>
-            <a:srgbClr val="F5F6FC"/>
-          </a:solidFill>
-          <a:ln/>
-        </p:spPr>
-      </p:sp>
-      <p:sp>
-        <p:nvSpPr>
-          <p:cNvPr id="6" name="Text 4"/>
-          <p:cNvSpPr/>
-          <p:nvPr/>
-        </p:nvSpPr>
-        <p:spPr>
-          <a:xfrm>
-            <a:off x="566928" y="1737360"/>
-            <a:ext cx="411480" cy="384048"/>
-          </a:xfrm>
-          <a:prstGeom prst="rect">
-            <a:avLst/>
-          </a:prstGeom>
-          <a:noFill/>
-          <a:ln/>
-        </p:spPr>
-        <p:txBody>
-          <a:bodyPr wrap="square" lIns="0" tIns="0" rIns="0" bIns="0" rtlCol="0" anchor="ctr"/>
-          <a:lstStyle/>
-          <a:p>
-            <a:pPr indent="0" marL="0">
-              <a:buNone/>
-            </a:pPr>
-            <a:r>
-              <a:rPr lang="en-US" sz="1200" b="1" dirty="0">
-                <a:solidFill>
-                  <a:srgbClr val="3843AF"/>
-                </a:solidFill>
-                <a:latin typeface="Courier New" pitchFamily="34" charset="0"/>
-                <a:ea typeface="Courier New" pitchFamily="34" charset="-122"/>
-                <a:cs typeface="Courier New" pitchFamily="34" charset="-120"/>
-              </a:rPr>
-              <a:t>1</a:t>
-            </a:r>
-            <a:endParaRPr lang="en-US" sz="1200" dirty="0"/>
-          </a:p>
-        </p:txBody>
-      </p:sp>
-      <p:sp>
-        <p:nvSpPr>
-          <p:cNvPr id="7" name="Text 5"/>
-          <p:cNvSpPr/>
-          <p:nvPr/>
-        </p:nvSpPr>
-        <p:spPr>
-          <a:xfrm>
-            <a:off x="978408" y="1737360"/>
-            <a:ext cx="7598664" cy="384048"/>
-          </a:xfrm>
-          <a:prstGeom prst="rect">
-            <a:avLst/>
-          </a:prstGeom>
-          <a:noFill/>
-          <a:ln/>
-        </p:spPr>
-        <p:txBody>
-          <a:bodyPr wrap="square" lIns="0" tIns="0" rIns="0" bIns="0" rtlCol="0" anchor="ctr"/>
-          <a:lstStyle/>
-          <a:p>
-            <a:pPr indent="0" marL="0">
-              <a:buNone/>
-            </a:pPr>
-            <a:r>
-              <a:rPr lang="en-US" sz="1200" dirty="0">
-                <a:solidFill>
-                  <a:srgbClr val="434A63"/>
-                </a:solidFill>
-                <a:latin typeface="Arial" pitchFamily="34" charset="0"/>
-                <a:ea typeface="Arial" pitchFamily="34" charset="-122"/>
-                <a:cs typeface="Arial" pitchFamily="34" charset="-120"/>
-              </a:rPr>
-              <a:t>Jede Gruppe zeigt ihre Planungstabelle – kurz, nur die Eckwerte</a:t>
-            </a:r>
-            <a:endParaRPr lang="en-US" sz="1200" dirty="0"/>
-          </a:p>
-        </p:txBody>
-      </p:sp>
-      <p:sp>
-        <p:nvSpPr>
-          <p:cNvPr id="8" name="Text 6"/>
-          <p:cNvSpPr/>
-          <p:nvPr/>
-        </p:nvSpPr>
-        <p:spPr>
-          <a:xfrm>
-            <a:off x="566928" y="2121408"/>
-            <a:ext cx="411480" cy="384048"/>
-          </a:xfrm>
-          <a:prstGeom prst="rect">
-            <a:avLst/>
-          </a:prstGeom>
-          <a:noFill/>
-          <a:ln/>
-        </p:spPr>
-        <p:txBody>
-          <a:bodyPr wrap="square" lIns="0" tIns="0" rIns="0" bIns="0" rtlCol="0" anchor="ctr"/>
-          <a:lstStyle/>
-          <a:p>
-            <a:pPr indent="0" marL="0">
-              <a:buNone/>
-            </a:pPr>
-            <a:r>
-              <a:rPr lang="en-US" sz="1200" b="1" dirty="0">
-                <a:solidFill>
-                  <a:srgbClr val="3843AF"/>
-                </a:solidFill>
-                <a:latin typeface="Courier New" pitchFamily="34" charset="0"/>
-                <a:ea typeface="Courier New" pitchFamily="34" charset="-122"/>
-                <a:cs typeface="Courier New" pitchFamily="34" charset="-120"/>
-              </a:rPr>
-              <a:t>2</a:t>
-            </a:r>
-            <a:endParaRPr lang="en-US" sz="1200" dirty="0"/>
-          </a:p>
-        </p:txBody>
-      </p:sp>
-      <p:sp>
-        <p:nvSpPr>
-          <p:cNvPr id="9" name="Text 7"/>
-          <p:cNvSpPr/>
-          <p:nvPr/>
-        </p:nvSpPr>
-        <p:spPr>
-          <a:xfrm>
-            <a:off x="978408" y="2121408"/>
-            <a:ext cx="7598664" cy="384048"/>
-          </a:xfrm>
-          <a:prstGeom prst="rect">
-            <a:avLst/>
-          </a:prstGeom>
-          <a:noFill/>
-          <a:ln/>
-        </p:spPr>
-        <p:txBody>
-          <a:bodyPr wrap="square" lIns="0" tIns="0" rIns="0" bIns="0" rtlCol="0" anchor="ctr"/>
-          <a:lstStyle/>
-          <a:p>
-            <a:pPr indent="0" marL="0">
-              <a:buNone/>
-            </a:pPr>
-            <a:r>
-              <a:rPr lang="en-US" sz="1200" dirty="0">
-                <a:solidFill>
-                  <a:srgbClr val="434A63"/>
-                </a:solidFill>
-                <a:latin typeface="Arial" pitchFamily="34" charset="0"/>
-                <a:ea typeface="Arial" pitchFamily="34" charset="-122"/>
-                <a:cs typeface="Arial" pitchFamily="34" charset="-120"/>
-              </a:rPr>
-              <a:t>Vergleich: Wo unterscheiden sich die Pläne – und sind beide richtig?</a:t>
-            </a:r>
-            <a:endParaRPr lang="en-US" sz="1200" dirty="0"/>
-          </a:p>
-        </p:txBody>
-      </p:sp>
-      <p:sp>
-        <p:nvSpPr>
-          <p:cNvPr id="10" name="Shape 8"/>
-          <p:cNvSpPr/>
-          <p:nvPr/>
-        </p:nvSpPr>
-        <p:spPr>
-          <a:xfrm>
-            <a:off x="438912" y="2505456"/>
-            <a:ext cx="8266176" cy="384048"/>
-          </a:xfrm>
-          <a:prstGeom prst="rect">
-            <a:avLst/>
-          </a:prstGeom>
-          <a:solidFill>
-            <a:srgbClr val="F5F6FC"/>
-          </a:solidFill>
-          <a:ln/>
-        </p:spPr>
-      </p:sp>
-      <p:sp>
-        <p:nvSpPr>
-          <p:cNvPr id="11" name="Text 9"/>
-          <p:cNvSpPr/>
-          <p:nvPr/>
-        </p:nvSpPr>
-        <p:spPr>
-          <a:xfrm>
-            <a:off x="566928" y="2505456"/>
-            <a:ext cx="411480" cy="384048"/>
-          </a:xfrm>
-          <a:prstGeom prst="rect">
-            <a:avLst/>
-          </a:prstGeom>
-          <a:noFill/>
-          <a:ln/>
-        </p:spPr>
-        <p:txBody>
-          <a:bodyPr wrap="square" lIns="0" tIns="0" rIns="0" bIns="0" rtlCol="0" anchor="ctr"/>
-          <a:lstStyle/>
-          <a:p>
-            <a:pPr indent="0" marL="0">
-              <a:buNone/>
-            </a:pPr>
-            <a:r>
-              <a:rPr lang="en-US" sz="1200" b="1" dirty="0">
-                <a:solidFill>
-                  <a:srgbClr val="3843AF"/>
-                </a:solidFill>
-                <a:latin typeface="Courier New" pitchFamily="34" charset="0"/>
-                <a:ea typeface="Courier New" pitchFamily="34" charset="-122"/>
-                <a:cs typeface="Courier New" pitchFamily="34" charset="-120"/>
-              </a:rPr>
-              <a:t>3</a:t>
-            </a:r>
-            <a:endParaRPr lang="en-US" sz="1200" dirty="0"/>
-          </a:p>
-        </p:txBody>
-      </p:sp>
-      <p:sp>
-        <p:nvSpPr>
-          <p:cNvPr id="12" name="Text 10"/>
-          <p:cNvSpPr/>
-          <p:nvPr/>
-        </p:nvSpPr>
-        <p:spPr>
-          <a:xfrm>
-            <a:off x="978408" y="2505456"/>
-            <a:ext cx="7598664" cy="384048"/>
-          </a:xfrm>
-          <a:prstGeom prst="rect">
-            <a:avLst/>
-          </a:prstGeom>
-          <a:noFill/>
-          <a:ln/>
-        </p:spPr>
-        <p:txBody>
-          <a:bodyPr wrap="square" lIns="0" tIns="0" rIns="0" bIns="0" rtlCol="0" anchor="ctr"/>
-          <a:lstStyle/>
-          <a:p>
-            <a:pPr indent="0" marL="0">
-              <a:buNone/>
-            </a:pPr>
-            <a:r>
-              <a:rPr lang="en-US" sz="1200" dirty="0">
-                <a:solidFill>
-                  <a:srgbClr val="434A63"/>
-                </a:solidFill>
-                <a:latin typeface="Arial" pitchFamily="34" charset="0"/>
-                <a:ea typeface="Arial" pitchFamily="34" charset="-122"/>
-                <a:cs typeface="Arial" pitchFamily="34" charset="-120"/>
-              </a:rPr>
-              <a:t>Die Probe: Passen alle Blöcke zusammen in das /24?</a:t>
-            </a:r>
-            <a:endParaRPr lang="en-US" sz="1200" dirty="0"/>
-          </a:p>
-        </p:txBody>
-      </p:sp>
-      <p:sp>
-        <p:nvSpPr>
-          <p:cNvPr id="13" name="Text 11"/>
-          <p:cNvSpPr/>
-          <p:nvPr/>
-        </p:nvSpPr>
-        <p:spPr>
-          <a:xfrm>
-            <a:off x="566928" y="2889504"/>
-            <a:ext cx="411480" cy="384048"/>
-          </a:xfrm>
-          <a:prstGeom prst="rect">
-            <a:avLst/>
-          </a:prstGeom>
-          <a:noFill/>
-          <a:ln/>
-        </p:spPr>
-        <p:txBody>
-          <a:bodyPr wrap="square" lIns="0" tIns="0" rIns="0" bIns="0" rtlCol="0" anchor="ctr"/>
-          <a:lstStyle/>
-          <a:p>
-            <a:pPr indent="0" marL="0">
-              <a:buNone/>
-            </a:pPr>
-            <a:r>
-              <a:rPr lang="en-US" sz="1200" b="1" dirty="0">
-                <a:solidFill>
-                  <a:srgbClr val="3843AF"/>
-                </a:solidFill>
-                <a:latin typeface="Courier New" pitchFamily="34" charset="0"/>
-                <a:ea typeface="Courier New" pitchFamily="34" charset="-122"/>
-                <a:cs typeface="Courier New" pitchFamily="34" charset="-120"/>
-              </a:rPr>
-              <a:t>4</a:t>
-            </a:r>
-            <a:endParaRPr lang="en-US" sz="1200" dirty="0"/>
-          </a:p>
-        </p:txBody>
-      </p:sp>
-      <p:sp>
-        <p:nvSpPr>
-          <p:cNvPr id="14" name="Text 12"/>
-          <p:cNvSpPr/>
-          <p:nvPr/>
-        </p:nvSpPr>
-        <p:spPr>
-          <a:xfrm>
-            <a:off x="978408" y="2889504"/>
-            <a:ext cx="7598664" cy="384048"/>
-          </a:xfrm>
-          <a:prstGeom prst="rect">
-            <a:avLst/>
-          </a:prstGeom>
-          <a:noFill/>
-          <a:ln/>
-        </p:spPr>
-        <p:txBody>
-          <a:bodyPr wrap="square" lIns="0" tIns="0" rIns="0" bIns="0" rtlCol="0" anchor="ctr"/>
-          <a:lstStyle/>
-          <a:p>
-            <a:pPr indent="0" marL="0">
-              <a:buNone/>
-            </a:pPr>
-            <a:r>
-              <a:rPr lang="en-US" sz="1200" dirty="0">
-                <a:solidFill>
-                  <a:srgbClr val="434A63"/>
-                </a:solidFill>
-                <a:latin typeface="Arial" pitchFamily="34" charset="0"/>
-                <a:ea typeface="Arial" pitchFamily="34" charset="-122"/>
-                <a:cs typeface="Arial" pitchFamily="34" charset="-120"/>
-              </a:rPr>
-              <a:t>Was bleibt übrig – und warum ist Reserve kein Fehler?</a:t>
-            </a:r>
-            <a:endParaRPr lang="en-US" sz="1200" dirty="0"/>
-          </a:p>
-        </p:txBody>
-      </p:sp>
-      <p:sp>
-        <p:nvSpPr>
-          <p:cNvPr id="15" name="Shape 13"/>
-          <p:cNvSpPr/>
-          <p:nvPr/>
-        </p:nvSpPr>
-        <p:spPr>
-          <a:xfrm>
-            <a:off x="438912" y="3273552"/>
-            <a:ext cx="8266176" cy="384048"/>
-          </a:xfrm>
-          <a:prstGeom prst="rect">
-            <a:avLst/>
-          </a:prstGeom>
-          <a:solidFill>
-            <a:srgbClr val="F5F6FC"/>
-          </a:solidFill>
-          <a:ln/>
-        </p:spPr>
-      </p:sp>
-      <p:sp>
-        <p:nvSpPr>
-          <p:cNvPr id="16" name="Text 14"/>
-          <p:cNvSpPr/>
-          <p:nvPr/>
-        </p:nvSpPr>
-        <p:spPr>
-          <a:xfrm>
-            <a:off x="566928" y="3273552"/>
-            <a:ext cx="411480" cy="384048"/>
-          </a:xfrm>
-          <a:prstGeom prst="rect">
-            <a:avLst/>
-          </a:prstGeom>
-          <a:noFill/>
-          <a:ln/>
-        </p:spPr>
-        <p:txBody>
-          <a:bodyPr wrap="square" lIns="0" tIns="0" rIns="0" bIns="0" rtlCol="0" anchor="ctr"/>
-          <a:lstStyle/>
-          <a:p>
-            <a:pPr indent="0" marL="0">
-              <a:buNone/>
-            </a:pPr>
-            <a:r>
-              <a:rPr lang="en-US" sz="1200" b="1" dirty="0">
-                <a:solidFill>
-                  <a:srgbClr val="3843AF"/>
-                </a:solidFill>
-                <a:latin typeface="Courier New" pitchFamily="34" charset="0"/>
-                <a:ea typeface="Courier New" pitchFamily="34" charset="-122"/>
-                <a:cs typeface="Courier New" pitchFamily="34" charset="-120"/>
-              </a:rPr>
-              <a:t>5</a:t>
-            </a:r>
-            <a:endParaRPr lang="en-US" sz="1200" dirty="0"/>
-          </a:p>
-        </p:txBody>
-      </p:sp>
-      <p:sp>
-        <p:nvSpPr>
-          <p:cNvPr id="17" name="Text 15"/>
-          <p:cNvSpPr/>
-          <p:nvPr/>
-        </p:nvSpPr>
-        <p:spPr>
-          <a:xfrm>
-            <a:off x="978408" y="3273552"/>
-            <a:ext cx="7598664" cy="384048"/>
-          </a:xfrm>
-          <a:prstGeom prst="rect">
-            <a:avLst/>
-          </a:prstGeom>
-          <a:noFill/>
-          <a:ln/>
-        </p:spPr>
-        <p:txBody>
-          <a:bodyPr wrap="square" lIns="0" tIns="0" rIns="0" bIns="0" rtlCol="0" anchor="ctr"/>
-          <a:lstStyle/>
-          <a:p>
-            <a:pPr indent="0" marL="0">
-              <a:buNone/>
-            </a:pPr>
-            <a:r>
-              <a:rPr lang="en-US" sz="1200" dirty="0">
-                <a:solidFill>
-                  <a:srgbClr val="434A63"/>
-                </a:solidFill>
-                <a:latin typeface="Arial" pitchFamily="34" charset="0"/>
-                <a:ea typeface="Arial" pitchFamily="34" charset="-122"/>
-                <a:cs typeface="Arial" pitchFamily="34" charset="-120"/>
-              </a:rPr>
-              <a:t>Der Bogen zur Umfrage: die /26-Frage, noch einmal für alle</a:t>
-            </a:r>
-            <a:endParaRPr lang="en-US" sz="1200" dirty="0"/>
-          </a:p>
-        </p:txBody>
-      </p:sp>
-      <p:sp>
-        <p:nvSpPr>
-          <p:cNvPr id="18" name="Shape 16"/>
-          <p:cNvSpPr/>
-          <p:nvPr/>
-        </p:nvSpPr>
-        <p:spPr>
-          <a:xfrm>
-            <a:off x="566928" y="3794760"/>
-            <a:ext cx="8010144" cy="548640"/>
-          </a:xfrm>
-          <a:prstGeom prst="rect">
-            <a:avLst/>
-          </a:prstGeom>
-          <a:solidFill>
-            <a:srgbClr val="EEF0FB"/>
-          </a:solidFill>
-          <a:ln/>
-        </p:spPr>
-      </p:sp>
-      <p:sp>
-        <p:nvSpPr>
-          <p:cNvPr id="19" name="Shape 17"/>
-          <p:cNvSpPr/>
-          <p:nvPr/>
-        </p:nvSpPr>
-        <p:spPr>
-          <a:xfrm>
-            <a:off x="566928" y="3794760"/>
-            <a:ext cx="41148" cy="548640"/>
+            <a:off x="566928" y="1883664"/>
+            <a:ext cx="475488" cy="50292"/>
           </a:xfrm>
           <a:prstGeom prst="rect">
             <a:avLst/>
@@ -10280,14 +9985,14 @@
       </p:sp>
       <p:sp>
         <p:nvSpPr>
-          <p:cNvPr id="20" name="Text 18"/>
-          <p:cNvSpPr/>
-          <p:nvPr/>
-        </p:nvSpPr>
-        <p:spPr>
-          <a:xfrm>
-            <a:off x="804672" y="3941064"/>
-            <a:ext cx="7607808" cy="283464"/>
+          <p:cNvPr id="6" name="Text 4"/>
+          <p:cNvSpPr/>
+          <p:nvPr/>
+        </p:nvSpPr>
+        <p:spPr>
+          <a:xfrm>
+            <a:off x="566928" y="2084832"/>
+            <a:ext cx="5394960" cy="868680"/>
           </a:xfrm>
           <a:prstGeom prst="rect">
             <a:avLst/>
@@ -10300,75 +10005,49 @@
           <a:lstStyle/>
           <a:p>
             <a:pPr indent="0" marL="0">
-              <a:lnSpc>
-                <a:spcPct val="92000"/>
-              </a:lnSpc>
-              <a:buNone/>
-            </a:pPr>
-            <a:r>
-              <a:rPr lang="en-US" sz="1150" dirty="0">
-                <a:solidFill>
-                  <a:srgbClr val="434A63"/>
-                </a:solidFill>
-                <a:latin typeface="Arial" pitchFamily="34" charset="0"/>
-                <a:ea typeface="Arial" pitchFamily="34" charset="-122"/>
-                <a:cs typeface="Arial" pitchFamily="34" charset="-120"/>
-              </a:rPr>
-              <a:t>Es gibt mehrere richtige Pläne. Falsch ist nur, was sich überlappt oder nicht reicht.</a:t>
-            </a:r>
-            <a:endParaRPr lang="en-US" sz="1150" dirty="0"/>
-          </a:p>
-        </p:txBody>
-      </p:sp>
-      <p:sp>
-        <p:nvSpPr>
-          <p:cNvPr id="21" name="Shape 19"/>
-          <p:cNvSpPr/>
-          <p:nvPr/>
-        </p:nvSpPr>
-        <p:spPr>
-          <a:xfrm>
-            <a:off x="566928" y="4631436"/>
-            <a:ext cx="8010144" cy="0"/>
-          </a:xfrm>
-          <a:prstGeom prst="line">
-            <a:avLst/>
-          </a:prstGeom>
-          <a:noFill/>
-          <a:ln w="9525">
-            <a:solidFill>
-              <a:srgbClr val="DFE3F0"/>
-            </a:solidFill>
-            <a:prstDash val="solid"/>
-          </a:ln>
-        </p:spPr>
-      </p:sp>
-      <p:sp>
-        <p:nvSpPr>
-          <p:cNvPr id="22" name="Text 20"/>
-          <p:cNvSpPr/>
-          <p:nvPr/>
-        </p:nvSpPr>
-        <p:spPr>
-          <a:xfrm>
-            <a:off x="566928" y="4722876"/>
-            <a:ext cx="5029200" cy="237744"/>
-          </a:xfrm>
-          <a:prstGeom prst="rect">
-            <a:avLst/>
-          </a:prstGeom>
-          <a:noFill/>
-          <a:ln/>
-        </p:spPr>
-        <p:txBody>
-          <a:bodyPr wrap="square" lIns="0" tIns="0" rIns="0" bIns="0" rtlCol="0" anchor="ctr"/>
-          <a:lstStyle/>
-          <a:p>
-            <a:pPr indent="0" marL="0">
-              <a:buNone/>
-            </a:pPr>
-            <a:r>
-              <a:rPr lang="en-US" sz="1050" spc="30" kern="0" dirty="0">
+              <a:buNone/>
+            </a:pPr>
+            <a:r>
+              <a:rPr lang="en-US" sz="3000" b="1" dirty="0">
+                <a:solidFill>
+                  <a:srgbClr val="272E52"/>
+                </a:solidFill>
+                <a:latin typeface="Arial" pitchFamily="34" charset="0"/>
+                <a:ea typeface="Arial" pitchFamily="34" charset="-122"/>
+                <a:cs typeface="Arial" pitchFamily="34" charset="-120"/>
+              </a:rPr>
+              <a:t>Eure Netzpläne</a:t>
+            </a:r>
+            <a:endParaRPr lang="en-US" sz="3000" dirty="0"/>
+          </a:p>
+        </p:txBody>
+      </p:sp>
+      <p:sp>
+        <p:nvSpPr>
+          <p:cNvPr id="7" name="Text 5"/>
+          <p:cNvSpPr/>
+          <p:nvPr/>
+        </p:nvSpPr>
+        <p:spPr>
+          <a:xfrm>
+            <a:off x="566928" y="3017520"/>
+            <a:ext cx="5394960" cy="548640"/>
+          </a:xfrm>
+          <a:prstGeom prst="rect">
+            <a:avLst/>
+          </a:prstGeom>
+          <a:noFill/>
+          <a:ln/>
+        </p:spPr>
+        <p:txBody>
+          <a:bodyPr wrap="square" lIns="0" tIns="0" rIns="0" bIns="0" rtlCol="0" anchor="t"/>
+          <a:lstStyle/>
+          <a:p>
+            <a:pPr indent="0" marL="0">
+              <a:buNone/>
+            </a:pPr>
+            <a:r>
+              <a:rPr lang="en-US" sz="1350" dirty="0">
                 <a:solidFill>
                   <a:srgbClr val="5C6377"/>
                 </a:solidFill>
@@ -10376,48 +10055,9 @@
                 <a:ea typeface="Arial" pitchFamily="34" charset="-122"/>
                 <a:cs typeface="Arial" pitchFamily="34" charset="-120"/>
               </a:rPr>
-              <a:t>Auswertung</a:t>
-            </a:r>
-            <a:endParaRPr lang="en-US" sz="1050" dirty="0"/>
-          </a:p>
-        </p:txBody>
-      </p:sp>
-      <p:sp>
-        <p:nvSpPr>
-          <p:cNvPr id="23" name="Text 21"/>
-          <p:cNvSpPr/>
-          <p:nvPr/>
-        </p:nvSpPr>
-        <p:spPr>
-          <a:xfrm>
-            <a:off x="8028432" y="4722876"/>
-            <a:ext cx="548640" cy="237744"/>
-          </a:xfrm>
-          <a:prstGeom prst="rect">
-            <a:avLst/>
-          </a:prstGeom>
-          <a:noFill/>
-          <a:ln/>
-        </p:spPr>
-        <p:txBody>
-          <a:bodyPr wrap="square" lIns="0" tIns="0" rIns="0" bIns="0" rtlCol="0" anchor="ctr"/>
-          <a:lstStyle/>
-          <a:p>
-            <a:pPr algn="r" indent="0" marL="0">
-              <a:buNone/>
-            </a:pPr>
-            <a:r>
-              <a:rPr lang="en-US" sz="1050" dirty="0">
-                <a:solidFill>
-                  <a:srgbClr val="5C6377"/>
-                </a:solidFill>
-                <a:latin typeface="Arial" pitchFamily="34" charset="0"/>
-                <a:ea typeface="Arial" pitchFamily="34" charset="-122"/>
-                <a:cs typeface="Arial" pitchFamily="34" charset="-120"/>
-              </a:rPr>
-              <a:t>18/21</a:t>
-            </a:r>
-            <a:endParaRPr lang="en-US" sz="1050" dirty="0"/>
+              <a:t>Vier Lösungen, ein Vergleich – und die Probe aufs Exempel</a:t>
+            </a:r>
+            <a:endParaRPr lang="en-US" sz="1350" dirty="0"/>
           </a:p>
         </p:txBody>
       </p:sp>
@@ -10506,7 +10146,7 @@
                 <a:ea typeface="Arial" pitchFamily="34" charset="-122"/>
                 <a:cs typeface="Arial" pitchFamily="34" charset="-120"/>
               </a:rPr>
-              <a:t>AUSWERTUNG</a:t>
+              <a:t>AUSWERTUNG · 35 MINUTEN</a:t>
             </a:r>
             <a:endParaRPr lang="en-US" sz="1150" dirty="0"/>
           </a:p>
@@ -10545,7 +10185,7 @@
                 <a:ea typeface="Arial" pitchFamily="34" charset="-122"/>
                 <a:cs typeface="Arial" pitchFamily="34" charset="-120"/>
               </a:rPr>
-              <a:t>Eine mögliche Lösung</a:t>
+              <a:t>Das gehen wir gemeinsam durch</a:t>
             </a:r>
             <a:endParaRPr lang="en-US" sz="2600" dirty="0"/>
           </a:p>
@@ -10553,154 +10193,14 @@
       </p:sp>
       <p:sp>
         <p:nvSpPr>
-          <p:cNvPr id="5" name="Text 3"/>
-          <p:cNvSpPr/>
-          <p:nvPr/>
-        </p:nvSpPr>
-        <p:spPr>
-          <a:xfrm>
-            <a:off x="658368" y="1737360"/>
-            <a:ext cx="1554480" cy="274320"/>
-          </a:xfrm>
-          <a:prstGeom prst="rect">
-            <a:avLst/>
-          </a:prstGeom>
-          <a:noFill/>
-          <a:ln/>
-        </p:spPr>
-        <p:txBody>
-          <a:bodyPr wrap="square" lIns="0" tIns="0" rIns="0" bIns="0" rtlCol="0" anchor="ctr"/>
-          <a:lstStyle/>
-          <a:p>
-            <a:pPr indent="0" marL="0">
-              <a:buNone/>
-            </a:pPr>
-            <a:r>
-              <a:rPr lang="en-US" sz="1050" b="1" spc="80" kern="0" dirty="0">
-                <a:solidFill>
-                  <a:srgbClr val="3843AF"/>
-                </a:solidFill>
-                <a:latin typeface="Arial" pitchFamily="34" charset="0"/>
-                <a:ea typeface="Arial" pitchFamily="34" charset="-122"/>
-                <a:cs typeface="Arial" pitchFamily="34" charset="-120"/>
-              </a:rPr>
-              <a:t>Abteilung</a:t>
-            </a:r>
-            <a:endParaRPr lang="en-US" sz="1050" dirty="0"/>
-          </a:p>
-        </p:txBody>
-      </p:sp>
-      <p:sp>
-        <p:nvSpPr>
-          <p:cNvPr id="6" name="Text 4"/>
-          <p:cNvSpPr/>
-          <p:nvPr/>
-        </p:nvSpPr>
-        <p:spPr>
-          <a:xfrm>
-            <a:off x="2395728" y="1737360"/>
-            <a:ext cx="731520" cy="274320"/>
-          </a:xfrm>
-          <a:prstGeom prst="rect">
-            <a:avLst/>
-          </a:prstGeom>
-          <a:noFill/>
-          <a:ln/>
-        </p:spPr>
-        <p:txBody>
-          <a:bodyPr wrap="square" lIns="0" tIns="0" rIns="0" bIns="0" rtlCol="0" anchor="ctr"/>
-          <a:lstStyle/>
-          <a:p>
-            <a:pPr indent="0" marL="0">
-              <a:buNone/>
-            </a:pPr>
-            <a:r>
-              <a:rPr lang="en-US" sz="1050" b="1" spc="80" kern="0" dirty="0">
-                <a:solidFill>
-                  <a:srgbClr val="3843AF"/>
-                </a:solidFill>
-                <a:latin typeface="Arial" pitchFamily="34" charset="0"/>
-                <a:ea typeface="Arial" pitchFamily="34" charset="-122"/>
-                <a:cs typeface="Arial" pitchFamily="34" charset="-120"/>
-              </a:rPr>
-              <a:t>Präfix</a:t>
-            </a:r>
-            <a:endParaRPr lang="en-US" sz="1050" dirty="0"/>
-          </a:p>
-        </p:txBody>
-      </p:sp>
-      <p:sp>
-        <p:nvSpPr>
-          <p:cNvPr id="7" name="Text 5"/>
-          <p:cNvSpPr/>
-          <p:nvPr/>
-        </p:nvSpPr>
-        <p:spPr>
-          <a:xfrm>
-            <a:off x="3310128" y="1737360"/>
-            <a:ext cx="5175504" cy="274320"/>
-          </a:xfrm>
-          <a:prstGeom prst="rect">
-            <a:avLst/>
-          </a:prstGeom>
-          <a:noFill/>
-          <a:ln/>
-        </p:spPr>
-        <p:txBody>
-          <a:bodyPr wrap="square" lIns="0" tIns="0" rIns="0" bIns="0" rtlCol="0" anchor="ctr"/>
-          <a:lstStyle/>
-          <a:p>
-            <a:pPr indent="0" marL="0">
-              <a:buNone/>
-            </a:pPr>
-            <a:r>
-              <a:rPr lang="en-US" sz="1050" b="1" spc="80" kern="0" dirty="0">
-                <a:solidFill>
-                  <a:srgbClr val="3843AF"/>
-                </a:solidFill>
-                <a:latin typeface="Arial" pitchFamily="34" charset="0"/>
-                <a:ea typeface="Arial" pitchFamily="34" charset="-122"/>
-                <a:cs typeface="Arial" pitchFamily="34" charset="-120"/>
-              </a:rPr>
-              <a:t>Netz · nutzbar · Broadcast</a:t>
-            </a:r>
-            <a:endParaRPr lang="en-US" sz="1050" dirty="0"/>
-          </a:p>
-        </p:txBody>
-      </p:sp>
-      <p:sp>
-        <p:nvSpPr>
-          <p:cNvPr id="8" name="Shape 6"/>
-          <p:cNvSpPr/>
-          <p:nvPr/>
-        </p:nvSpPr>
-        <p:spPr>
-          <a:xfrm>
-            <a:off x="566928" y="2029968"/>
-            <a:ext cx="8010144" cy="0"/>
-          </a:xfrm>
-          <a:prstGeom prst="line">
-            <a:avLst/>
-          </a:prstGeom>
-          <a:noFill/>
-          <a:ln w="12700">
-            <a:solidFill>
-              <a:srgbClr val="DFE3F0"/>
-            </a:solidFill>
-            <a:prstDash val="solid"/>
-          </a:ln>
-        </p:spPr>
-      </p:sp>
-      <p:sp>
-        <p:nvSpPr>
-          <p:cNvPr id="9" name="Shape 7"/>
-          <p:cNvSpPr/>
-          <p:nvPr/>
-        </p:nvSpPr>
-        <p:spPr>
-          <a:xfrm>
-            <a:off x="475488" y="2103120"/>
-            <a:ext cx="8193024" cy="365760"/>
+          <p:cNvPr id="5" name="Shape 3"/>
+          <p:cNvSpPr/>
+          <p:nvPr/>
+        </p:nvSpPr>
+        <p:spPr>
+          <a:xfrm>
+            <a:off x="438912" y="1737360"/>
+            <a:ext cx="8266176" cy="384048"/>
           </a:xfrm>
           <a:prstGeom prst="rect">
             <a:avLst/>
@@ -10713,69 +10213,69 @@
       </p:sp>
       <p:sp>
         <p:nvSpPr>
-          <p:cNvPr id="10" name="Text 8"/>
-          <p:cNvSpPr/>
-          <p:nvPr/>
-        </p:nvSpPr>
-        <p:spPr>
-          <a:xfrm>
-            <a:off x="658368" y="2103120"/>
-            <a:ext cx="1554480" cy="365760"/>
-          </a:xfrm>
-          <a:prstGeom prst="rect">
-            <a:avLst/>
-          </a:prstGeom>
-          <a:noFill/>
-          <a:ln/>
-        </p:spPr>
-        <p:txBody>
-          <a:bodyPr wrap="square" lIns="0" tIns="0" rIns="0" bIns="0" rtlCol="0" anchor="ctr"/>
-          <a:lstStyle/>
-          <a:p>
-            <a:pPr indent="0" marL="0">
-              <a:buNone/>
-            </a:pPr>
-            <a:r>
-              <a:rPr lang="en-US" sz="1150" b="1" dirty="0">
-                <a:solidFill>
-                  <a:srgbClr val="272E52"/>
-                </a:solidFill>
-                <a:latin typeface="Arial" pitchFamily="34" charset="0"/>
-                <a:ea typeface="Arial" pitchFamily="34" charset="-122"/>
-                <a:cs typeface="Arial" pitchFamily="34" charset="-120"/>
-              </a:rPr>
-              <a:t>Büro (100)</a:t>
-            </a:r>
-            <a:endParaRPr lang="en-US" sz="1150" dirty="0"/>
-          </a:p>
-        </p:txBody>
-      </p:sp>
-      <p:sp>
-        <p:nvSpPr>
-          <p:cNvPr id="11" name="Text 9"/>
-          <p:cNvSpPr/>
-          <p:nvPr/>
-        </p:nvSpPr>
-        <p:spPr>
-          <a:xfrm>
-            <a:off x="2395728" y="2103120"/>
-            <a:ext cx="731520" cy="365760"/>
-          </a:xfrm>
-          <a:prstGeom prst="rect">
-            <a:avLst/>
-          </a:prstGeom>
-          <a:noFill/>
-          <a:ln/>
-        </p:spPr>
-        <p:txBody>
-          <a:bodyPr wrap="square" lIns="0" tIns="0" rIns="0" bIns="0" rtlCol="0" anchor="ctr"/>
-          <a:lstStyle/>
-          <a:p>
-            <a:pPr indent="0" marL="0">
-              <a:buNone/>
-            </a:pPr>
-            <a:r>
-              <a:rPr lang="en-US" sz="1150" dirty="0">
+          <p:cNvPr id="6" name="Text 4"/>
+          <p:cNvSpPr/>
+          <p:nvPr/>
+        </p:nvSpPr>
+        <p:spPr>
+          <a:xfrm>
+            <a:off x="566928" y="1737360"/>
+            <a:ext cx="411480" cy="384048"/>
+          </a:xfrm>
+          <a:prstGeom prst="rect">
+            <a:avLst/>
+          </a:prstGeom>
+          <a:noFill/>
+          <a:ln/>
+        </p:spPr>
+        <p:txBody>
+          <a:bodyPr wrap="square" lIns="0" tIns="0" rIns="0" bIns="0" rtlCol="0" anchor="ctr"/>
+          <a:lstStyle/>
+          <a:p>
+            <a:pPr indent="0" marL="0">
+              <a:buNone/>
+            </a:pPr>
+            <a:r>
+              <a:rPr lang="en-US" sz="1200" b="1" dirty="0">
+                <a:solidFill>
+                  <a:srgbClr val="3843AF"/>
+                </a:solidFill>
+                <a:latin typeface="Courier New" pitchFamily="34" charset="0"/>
+                <a:ea typeface="Courier New" pitchFamily="34" charset="-122"/>
+                <a:cs typeface="Courier New" pitchFamily="34" charset="-120"/>
+              </a:rPr>
+              <a:t>1</a:t>
+            </a:r>
+            <a:endParaRPr lang="en-US" sz="1200" dirty="0"/>
+          </a:p>
+        </p:txBody>
+      </p:sp>
+      <p:sp>
+        <p:nvSpPr>
+          <p:cNvPr id="7" name="Text 5"/>
+          <p:cNvSpPr/>
+          <p:nvPr/>
+        </p:nvSpPr>
+        <p:spPr>
+          <a:xfrm>
+            <a:off x="978408" y="1737360"/>
+            <a:ext cx="7598664" cy="384048"/>
+          </a:xfrm>
+          <a:prstGeom prst="rect">
+            <a:avLst/>
+          </a:prstGeom>
+          <a:noFill/>
+          <a:ln/>
+        </p:spPr>
+        <p:txBody>
+          <a:bodyPr wrap="square" lIns="0" tIns="0" rIns="0" bIns="0" rtlCol="0" anchor="ctr"/>
+          <a:lstStyle/>
+          <a:p>
+            <a:pPr indent="0" marL="0">
+              <a:buNone/>
+            </a:pPr>
+            <a:r>
+              <a:rPr lang="en-US" sz="1200" dirty="0">
                 <a:solidFill>
                   <a:srgbClr val="434A63"/>
                 </a:solidFill>
@@ -10783,38 +10283,77 @@
                 <a:ea typeface="Arial" pitchFamily="34" charset="-122"/>
                 <a:cs typeface="Arial" pitchFamily="34" charset="-120"/>
               </a:rPr>
-              <a:t>/25</a:t>
-            </a:r>
-            <a:endParaRPr lang="en-US" sz="1150" dirty="0"/>
-          </a:p>
-        </p:txBody>
-      </p:sp>
-      <p:sp>
-        <p:nvSpPr>
-          <p:cNvPr id="12" name="Text 10"/>
-          <p:cNvSpPr/>
-          <p:nvPr/>
-        </p:nvSpPr>
-        <p:spPr>
-          <a:xfrm>
-            <a:off x="3310128" y="2103120"/>
-            <a:ext cx="5175504" cy="365760"/>
-          </a:xfrm>
-          <a:prstGeom prst="rect">
-            <a:avLst/>
-          </a:prstGeom>
-          <a:noFill/>
-          <a:ln/>
-        </p:spPr>
-        <p:txBody>
-          <a:bodyPr wrap="square" lIns="0" tIns="0" rIns="0" bIns="0" rtlCol="0" anchor="ctr"/>
-          <a:lstStyle/>
-          <a:p>
-            <a:pPr indent="0" marL="0">
-              <a:buNone/>
-            </a:pPr>
-            <a:r>
-              <a:rPr lang="en-US" sz="1150" dirty="0">
+              <a:t>Jede Gruppe zeigt ihre Planungstabelle – kurz, nur die Eckwerte</a:t>
+            </a:r>
+            <a:endParaRPr lang="en-US" sz="1200" dirty="0"/>
+          </a:p>
+        </p:txBody>
+      </p:sp>
+      <p:sp>
+        <p:nvSpPr>
+          <p:cNvPr id="8" name="Text 6"/>
+          <p:cNvSpPr/>
+          <p:nvPr/>
+        </p:nvSpPr>
+        <p:spPr>
+          <a:xfrm>
+            <a:off x="566928" y="2121408"/>
+            <a:ext cx="411480" cy="384048"/>
+          </a:xfrm>
+          <a:prstGeom prst="rect">
+            <a:avLst/>
+          </a:prstGeom>
+          <a:noFill/>
+          <a:ln/>
+        </p:spPr>
+        <p:txBody>
+          <a:bodyPr wrap="square" lIns="0" tIns="0" rIns="0" bIns="0" rtlCol="0" anchor="ctr"/>
+          <a:lstStyle/>
+          <a:p>
+            <a:pPr indent="0" marL="0">
+              <a:buNone/>
+            </a:pPr>
+            <a:r>
+              <a:rPr lang="en-US" sz="1200" b="1" dirty="0">
+                <a:solidFill>
+                  <a:srgbClr val="3843AF"/>
+                </a:solidFill>
+                <a:latin typeface="Courier New" pitchFamily="34" charset="0"/>
+                <a:ea typeface="Courier New" pitchFamily="34" charset="-122"/>
+                <a:cs typeface="Courier New" pitchFamily="34" charset="-120"/>
+              </a:rPr>
+              <a:t>2</a:t>
+            </a:r>
+            <a:endParaRPr lang="en-US" sz="1200" dirty="0"/>
+          </a:p>
+        </p:txBody>
+      </p:sp>
+      <p:sp>
+        <p:nvSpPr>
+          <p:cNvPr id="9" name="Text 7"/>
+          <p:cNvSpPr/>
+          <p:nvPr/>
+        </p:nvSpPr>
+        <p:spPr>
+          <a:xfrm>
+            <a:off x="978408" y="2121408"/>
+            <a:ext cx="7598664" cy="384048"/>
+          </a:xfrm>
+          <a:prstGeom prst="rect">
+            <a:avLst/>
+          </a:prstGeom>
+          <a:noFill/>
+          <a:ln/>
+        </p:spPr>
+        <p:txBody>
+          <a:bodyPr wrap="square" lIns="0" tIns="0" rIns="0" bIns="0" rtlCol="0" anchor="ctr"/>
+          <a:lstStyle/>
+          <a:p>
+            <a:pPr indent="0" marL="0">
+              <a:buNone/>
+            </a:pPr>
+            <a:r>
+              <a:rPr lang="en-US" sz="1200" dirty="0">
                 <a:solidFill>
                   <a:srgbClr val="434A63"/>
                 </a:solidFill>
@@ -10822,139 +10361,22 @@
                 <a:ea typeface="Arial" pitchFamily="34" charset="-122"/>
                 <a:cs typeface="Arial" pitchFamily="34" charset="-120"/>
               </a:rPr>
-              <a:t>192.168.10.0 · .1–.126 · .127</a:t>
-            </a:r>
-            <a:endParaRPr lang="en-US" sz="1150" dirty="0"/>
-          </a:p>
-        </p:txBody>
-      </p:sp>
-      <p:sp>
-        <p:nvSpPr>
-          <p:cNvPr id="13" name="Text 11"/>
-          <p:cNvSpPr/>
-          <p:nvPr/>
-        </p:nvSpPr>
-        <p:spPr>
-          <a:xfrm>
-            <a:off x="658368" y="2468880"/>
-            <a:ext cx="1554480" cy="365760"/>
-          </a:xfrm>
-          <a:prstGeom prst="rect">
-            <a:avLst/>
-          </a:prstGeom>
-          <a:noFill/>
-          <a:ln/>
-        </p:spPr>
-        <p:txBody>
-          <a:bodyPr wrap="square" lIns="0" tIns="0" rIns="0" bIns="0" rtlCol="0" anchor="ctr"/>
-          <a:lstStyle/>
-          <a:p>
-            <a:pPr indent="0" marL="0">
-              <a:buNone/>
-            </a:pPr>
-            <a:r>
-              <a:rPr lang="en-US" sz="1150" b="1" dirty="0">
-                <a:solidFill>
-                  <a:srgbClr val="272E52"/>
-                </a:solidFill>
-                <a:latin typeface="Arial" pitchFamily="34" charset="0"/>
-                <a:ea typeface="Arial" pitchFamily="34" charset="-122"/>
-                <a:cs typeface="Arial" pitchFamily="34" charset="-120"/>
-              </a:rPr>
-              <a:t>Gäste-WLAN (50)</a:t>
-            </a:r>
-            <a:endParaRPr lang="en-US" sz="1150" dirty="0"/>
-          </a:p>
-        </p:txBody>
-      </p:sp>
-      <p:sp>
-        <p:nvSpPr>
-          <p:cNvPr id="14" name="Text 12"/>
-          <p:cNvSpPr/>
-          <p:nvPr/>
-        </p:nvSpPr>
-        <p:spPr>
-          <a:xfrm>
-            <a:off x="2395728" y="2468880"/>
-            <a:ext cx="731520" cy="365760"/>
-          </a:xfrm>
-          <a:prstGeom prst="rect">
-            <a:avLst/>
-          </a:prstGeom>
-          <a:noFill/>
-          <a:ln/>
-        </p:spPr>
-        <p:txBody>
-          <a:bodyPr wrap="square" lIns="0" tIns="0" rIns="0" bIns="0" rtlCol="0" anchor="ctr"/>
-          <a:lstStyle/>
-          <a:p>
-            <a:pPr indent="0" marL="0">
-              <a:buNone/>
-            </a:pPr>
-            <a:r>
-              <a:rPr lang="en-US" sz="1150" dirty="0">
-                <a:solidFill>
-                  <a:srgbClr val="434A63"/>
-                </a:solidFill>
-                <a:latin typeface="Arial" pitchFamily="34" charset="0"/>
-                <a:ea typeface="Arial" pitchFamily="34" charset="-122"/>
-                <a:cs typeface="Arial" pitchFamily="34" charset="-120"/>
-              </a:rPr>
-              <a:t>/26</a:t>
-            </a:r>
-            <a:endParaRPr lang="en-US" sz="1150" dirty="0"/>
-          </a:p>
-        </p:txBody>
-      </p:sp>
-      <p:sp>
-        <p:nvSpPr>
-          <p:cNvPr id="15" name="Text 13"/>
-          <p:cNvSpPr/>
-          <p:nvPr/>
-        </p:nvSpPr>
-        <p:spPr>
-          <a:xfrm>
-            <a:off x="3310128" y="2468880"/>
-            <a:ext cx="5175504" cy="365760"/>
-          </a:xfrm>
-          <a:prstGeom prst="rect">
-            <a:avLst/>
-          </a:prstGeom>
-          <a:noFill/>
-          <a:ln/>
-        </p:spPr>
-        <p:txBody>
-          <a:bodyPr wrap="square" lIns="0" tIns="0" rIns="0" bIns="0" rtlCol="0" anchor="ctr"/>
-          <a:lstStyle/>
-          <a:p>
-            <a:pPr indent="0" marL="0">
-              <a:buNone/>
-            </a:pPr>
-            <a:r>
-              <a:rPr lang="en-US" sz="1150" dirty="0">
-                <a:solidFill>
-                  <a:srgbClr val="434A63"/>
-                </a:solidFill>
-                <a:latin typeface="Arial" pitchFamily="34" charset="0"/>
-                <a:ea typeface="Arial" pitchFamily="34" charset="-122"/>
-                <a:cs typeface="Arial" pitchFamily="34" charset="-120"/>
-              </a:rPr>
-              <a:t>192.168.10.128 · .129–.190 · .191</a:t>
-            </a:r>
-            <a:endParaRPr lang="en-US" sz="1150" dirty="0"/>
-          </a:p>
-        </p:txBody>
-      </p:sp>
-      <p:sp>
-        <p:nvSpPr>
-          <p:cNvPr id="16" name="Shape 14"/>
-          <p:cNvSpPr/>
-          <p:nvPr/>
-        </p:nvSpPr>
-        <p:spPr>
-          <a:xfrm>
-            <a:off x="475488" y="2834640"/>
-            <a:ext cx="8193024" cy="365760"/>
+              <a:t>Vergleich: Wo unterscheiden sich die Pläne – und sind beide richtig?</a:t>
+            </a:r>
+            <a:endParaRPr lang="en-US" sz="1200" dirty="0"/>
+          </a:p>
+        </p:txBody>
+      </p:sp>
+      <p:sp>
+        <p:nvSpPr>
+          <p:cNvPr id="10" name="Shape 8"/>
+          <p:cNvSpPr/>
+          <p:nvPr/>
+        </p:nvSpPr>
+        <p:spPr>
+          <a:xfrm>
+            <a:off x="438912" y="2505456"/>
+            <a:ext cx="8266176" cy="384048"/>
           </a:xfrm>
           <a:prstGeom prst="rect">
             <a:avLst/>
@@ -10967,69 +10389,69 @@
       </p:sp>
       <p:sp>
         <p:nvSpPr>
-          <p:cNvPr id="17" name="Text 15"/>
-          <p:cNvSpPr/>
-          <p:nvPr/>
-        </p:nvSpPr>
-        <p:spPr>
-          <a:xfrm>
-            <a:off x="658368" y="2834640"/>
-            <a:ext cx="1554480" cy="365760"/>
-          </a:xfrm>
-          <a:prstGeom prst="rect">
-            <a:avLst/>
-          </a:prstGeom>
-          <a:noFill/>
-          <a:ln/>
-        </p:spPr>
-        <p:txBody>
-          <a:bodyPr wrap="square" lIns="0" tIns="0" rIns="0" bIns="0" rtlCol="0" anchor="ctr"/>
-          <a:lstStyle/>
-          <a:p>
-            <a:pPr indent="0" marL="0">
-              <a:buNone/>
-            </a:pPr>
-            <a:r>
-              <a:rPr lang="en-US" sz="1150" b="1" dirty="0">
-                <a:solidFill>
-                  <a:srgbClr val="272E52"/>
-                </a:solidFill>
-                <a:latin typeface="Arial" pitchFamily="34" charset="0"/>
-                <a:ea typeface="Arial" pitchFamily="34" charset="-122"/>
-                <a:cs typeface="Arial" pitchFamily="34" charset="-120"/>
-              </a:rPr>
-              <a:t>Produktion (20)</a:t>
-            </a:r>
-            <a:endParaRPr lang="en-US" sz="1150" dirty="0"/>
-          </a:p>
-        </p:txBody>
-      </p:sp>
-      <p:sp>
-        <p:nvSpPr>
-          <p:cNvPr id="18" name="Text 16"/>
-          <p:cNvSpPr/>
-          <p:nvPr/>
-        </p:nvSpPr>
-        <p:spPr>
-          <a:xfrm>
-            <a:off x="2395728" y="2834640"/>
-            <a:ext cx="731520" cy="365760"/>
-          </a:xfrm>
-          <a:prstGeom prst="rect">
-            <a:avLst/>
-          </a:prstGeom>
-          <a:noFill/>
-          <a:ln/>
-        </p:spPr>
-        <p:txBody>
-          <a:bodyPr wrap="square" lIns="0" tIns="0" rIns="0" bIns="0" rtlCol="0" anchor="ctr"/>
-          <a:lstStyle/>
-          <a:p>
-            <a:pPr indent="0" marL="0">
-              <a:buNone/>
-            </a:pPr>
-            <a:r>
-              <a:rPr lang="en-US" sz="1150" dirty="0">
+          <p:cNvPr id="11" name="Text 9"/>
+          <p:cNvSpPr/>
+          <p:nvPr/>
+        </p:nvSpPr>
+        <p:spPr>
+          <a:xfrm>
+            <a:off x="566928" y="2505456"/>
+            <a:ext cx="411480" cy="384048"/>
+          </a:xfrm>
+          <a:prstGeom prst="rect">
+            <a:avLst/>
+          </a:prstGeom>
+          <a:noFill/>
+          <a:ln/>
+        </p:spPr>
+        <p:txBody>
+          <a:bodyPr wrap="square" lIns="0" tIns="0" rIns="0" bIns="0" rtlCol="0" anchor="ctr"/>
+          <a:lstStyle/>
+          <a:p>
+            <a:pPr indent="0" marL="0">
+              <a:buNone/>
+            </a:pPr>
+            <a:r>
+              <a:rPr lang="en-US" sz="1200" b="1" dirty="0">
+                <a:solidFill>
+                  <a:srgbClr val="3843AF"/>
+                </a:solidFill>
+                <a:latin typeface="Courier New" pitchFamily="34" charset="0"/>
+                <a:ea typeface="Courier New" pitchFamily="34" charset="-122"/>
+                <a:cs typeface="Courier New" pitchFamily="34" charset="-120"/>
+              </a:rPr>
+              <a:t>3</a:t>
+            </a:r>
+            <a:endParaRPr lang="en-US" sz="1200" dirty="0"/>
+          </a:p>
+        </p:txBody>
+      </p:sp>
+      <p:sp>
+        <p:nvSpPr>
+          <p:cNvPr id="12" name="Text 10"/>
+          <p:cNvSpPr/>
+          <p:nvPr/>
+        </p:nvSpPr>
+        <p:spPr>
+          <a:xfrm>
+            <a:off x="978408" y="2505456"/>
+            <a:ext cx="7598664" cy="384048"/>
+          </a:xfrm>
+          <a:prstGeom prst="rect">
+            <a:avLst/>
+          </a:prstGeom>
+          <a:noFill/>
+          <a:ln/>
+        </p:spPr>
+        <p:txBody>
+          <a:bodyPr wrap="square" lIns="0" tIns="0" rIns="0" bIns="0" rtlCol="0" anchor="ctr"/>
+          <a:lstStyle/>
+          <a:p>
+            <a:pPr indent="0" marL="0">
+              <a:buNone/>
+            </a:pPr>
+            <a:r>
+              <a:rPr lang="en-US" sz="1200" dirty="0">
                 <a:solidFill>
                   <a:srgbClr val="434A63"/>
                 </a:solidFill>
@@ -11037,38 +10459,77 @@
                 <a:ea typeface="Arial" pitchFamily="34" charset="-122"/>
                 <a:cs typeface="Arial" pitchFamily="34" charset="-120"/>
               </a:rPr>
-              <a:t>/27</a:t>
-            </a:r>
-            <a:endParaRPr lang="en-US" sz="1150" dirty="0"/>
-          </a:p>
-        </p:txBody>
-      </p:sp>
-      <p:sp>
-        <p:nvSpPr>
-          <p:cNvPr id="19" name="Text 17"/>
-          <p:cNvSpPr/>
-          <p:nvPr/>
-        </p:nvSpPr>
-        <p:spPr>
-          <a:xfrm>
-            <a:off x="3310128" y="2834640"/>
-            <a:ext cx="5175504" cy="365760"/>
-          </a:xfrm>
-          <a:prstGeom prst="rect">
-            <a:avLst/>
-          </a:prstGeom>
-          <a:noFill/>
-          <a:ln/>
-        </p:spPr>
-        <p:txBody>
-          <a:bodyPr wrap="square" lIns="0" tIns="0" rIns="0" bIns="0" rtlCol="0" anchor="ctr"/>
-          <a:lstStyle/>
-          <a:p>
-            <a:pPr indent="0" marL="0">
-              <a:buNone/>
-            </a:pPr>
-            <a:r>
-              <a:rPr lang="en-US" sz="1150" dirty="0">
+              <a:t>Die Probe: Passen alle Blöcke zusammen in das /24?</a:t>
+            </a:r>
+            <a:endParaRPr lang="en-US" sz="1200" dirty="0"/>
+          </a:p>
+        </p:txBody>
+      </p:sp>
+      <p:sp>
+        <p:nvSpPr>
+          <p:cNvPr id="13" name="Text 11"/>
+          <p:cNvSpPr/>
+          <p:nvPr/>
+        </p:nvSpPr>
+        <p:spPr>
+          <a:xfrm>
+            <a:off x="566928" y="2889504"/>
+            <a:ext cx="411480" cy="384048"/>
+          </a:xfrm>
+          <a:prstGeom prst="rect">
+            <a:avLst/>
+          </a:prstGeom>
+          <a:noFill/>
+          <a:ln/>
+        </p:spPr>
+        <p:txBody>
+          <a:bodyPr wrap="square" lIns="0" tIns="0" rIns="0" bIns="0" rtlCol="0" anchor="ctr"/>
+          <a:lstStyle/>
+          <a:p>
+            <a:pPr indent="0" marL="0">
+              <a:buNone/>
+            </a:pPr>
+            <a:r>
+              <a:rPr lang="en-US" sz="1200" b="1" dirty="0">
+                <a:solidFill>
+                  <a:srgbClr val="3843AF"/>
+                </a:solidFill>
+                <a:latin typeface="Courier New" pitchFamily="34" charset="0"/>
+                <a:ea typeface="Courier New" pitchFamily="34" charset="-122"/>
+                <a:cs typeface="Courier New" pitchFamily="34" charset="-120"/>
+              </a:rPr>
+              <a:t>4</a:t>
+            </a:r>
+            <a:endParaRPr lang="en-US" sz="1200" dirty="0"/>
+          </a:p>
+        </p:txBody>
+      </p:sp>
+      <p:sp>
+        <p:nvSpPr>
+          <p:cNvPr id="14" name="Text 12"/>
+          <p:cNvSpPr/>
+          <p:nvPr/>
+        </p:nvSpPr>
+        <p:spPr>
+          <a:xfrm>
+            <a:off x="978408" y="2889504"/>
+            <a:ext cx="7598664" cy="384048"/>
+          </a:xfrm>
+          <a:prstGeom prst="rect">
+            <a:avLst/>
+          </a:prstGeom>
+          <a:noFill/>
+          <a:ln/>
+        </p:spPr>
+        <p:txBody>
+          <a:bodyPr wrap="square" lIns="0" tIns="0" rIns="0" bIns="0" rtlCol="0" anchor="ctr"/>
+          <a:lstStyle/>
+          <a:p>
+            <a:pPr indent="0" marL="0">
+              <a:buNone/>
+            </a:pPr>
+            <a:r>
+              <a:rPr lang="en-US" sz="1200" dirty="0">
                 <a:solidFill>
                   <a:srgbClr val="434A63"/>
                 </a:solidFill>
@@ -11076,139 +10537,22 @@
                 <a:ea typeface="Arial" pitchFamily="34" charset="-122"/>
                 <a:cs typeface="Arial" pitchFamily="34" charset="-120"/>
               </a:rPr>
-              <a:t>192.168.10.192 · .193–.222 · .223</a:t>
-            </a:r>
-            <a:endParaRPr lang="en-US" sz="1150" dirty="0"/>
-          </a:p>
-        </p:txBody>
-      </p:sp>
-      <p:sp>
-        <p:nvSpPr>
-          <p:cNvPr id="20" name="Text 18"/>
-          <p:cNvSpPr/>
-          <p:nvPr/>
-        </p:nvSpPr>
-        <p:spPr>
-          <a:xfrm>
-            <a:off x="658368" y="3200400"/>
-            <a:ext cx="1554480" cy="365760"/>
-          </a:xfrm>
-          <a:prstGeom prst="rect">
-            <a:avLst/>
-          </a:prstGeom>
-          <a:noFill/>
-          <a:ln/>
-        </p:spPr>
-        <p:txBody>
-          <a:bodyPr wrap="square" lIns="0" tIns="0" rIns="0" bIns="0" rtlCol="0" anchor="ctr"/>
-          <a:lstStyle/>
-          <a:p>
-            <a:pPr indent="0" marL="0">
-              <a:buNone/>
-            </a:pPr>
-            <a:r>
-              <a:rPr lang="en-US" sz="1150" b="1" dirty="0">
-                <a:solidFill>
-                  <a:srgbClr val="272E52"/>
-                </a:solidFill>
-                <a:latin typeface="Arial" pitchFamily="34" charset="0"/>
-                <a:ea typeface="Arial" pitchFamily="34" charset="-122"/>
-                <a:cs typeface="Arial" pitchFamily="34" charset="-120"/>
-              </a:rPr>
-              <a:t>Server (10)</a:t>
-            </a:r>
-            <a:endParaRPr lang="en-US" sz="1150" dirty="0"/>
-          </a:p>
-        </p:txBody>
-      </p:sp>
-      <p:sp>
-        <p:nvSpPr>
-          <p:cNvPr id="21" name="Text 19"/>
-          <p:cNvSpPr/>
-          <p:nvPr/>
-        </p:nvSpPr>
-        <p:spPr>
-          <a:xfrm>
-            <a:off x="2395728" y="3200400"/>
-            <a:ext cx="731520" cy="365760"/>
-          </a:xfrm>
-          <a:prstGeom prst="rect">
-            <a:avLst/>
-          </a:prstGeom>
-          <a:noFill/>
-          <a:ln/>
-        </p:spPr>
-        <p:txBody>
-          <a:bodyPr wrap="square" lIns="0" tIns="0" rIns="0" bIns="0" rtlCol="0" anchor="ctr"/>
-          <a:lstStyle/>
-          <a:p>
-            <a:pPr indent="0" marL="0">
-              <a:buNone/>
-            </a:pPr>
-            <a:r>
-              <a:rPr lang="en-US" sz="1150" dirty="0">
-                <a:solidFill>
-                  <a:srgbClr val="434A63"/>
-                </a:solidFill>
-                <a:latin typeface="Arial" pitchFamily="34" charset="0"/>
-                <a:ea typeface="Arial" pitchFamily="34" charset="-122"/>
-                <a:cs typeface="Arial" pitchFamily="34" charset="-120"/>
-              </a:rPr>
-              <a:t>/28</a:t>
-            </a:r>
-            <a:endParaRPr lang="en-US" sz="1150" dirty="0"/>
-          </a:p>
-        </p:txBody>
-      </p:sp>
-      <p:sp>
-        <p:nvSpPr>
-          <p:cNvPr id="22" name="Text 20"/>
-          <p:cNvSpPr/>
-          <p:nvPr/>
-        </p:nvSpPr>
-        <p:spPr>
-          <a:xfrm>
-            <a:off x="3310128" y="3200400"/>
-            <a:ext cx="5175504" cy="365760"/>
-          </a:xfrm>
-          <a:prstGeom prst="rect">
-            <a:avLst/>
-          </a:prstGeom>
-          <a:noFill/>
-          <a:ln/>
-        </p:spPr>
-        <p:txBody>
-          <a:bodyPr wrap="square" lIns="0" tIns="0" rIns="0" bIns="0" rtlCol="0" anchor="ctr"/>
-          <a:lstStyle/>
-          <a:p>
-            <a:pPr indent="0" marL="0">
-              <a:buNone/>
-            </a:pPr>
-            <a:r>
-              <a:rPr lang="en-US" sz="1150" dirty="0">
-                <a:solidFill>
-                  <a:srgbClr val="434A63"/>
-                </a:solidFill>
-                <a:latin typeface="Arial" pitchFamily="34" charset="0"/>
-                <a:ea typeface="Arial" pitchFamily="34" charset="-122"/>
-                <a:cs typeface="Arial" pitchFamily="34" charset="-120"/>
-              </a:rPr>
-              <a:t>192.168.10.224 · .225–.238 · .239</a:t>
-            </a:r>
-            <a:endParaRPr lang="en-US" sz="1150" dirty="0"/>
-          </a:p>
-        </p:txBody>
-      </p:sp>
-      <p:sp>
-        <p:nvSpPr>
-          <p:cNvPr id="23" name="Shape 21"/>
-          <p:cNvSpPr/>
-          <p:nvPr/>
-        </p:nvSpPr>
-        <p:spPr>
-          <a:xfrm>
-            <a:off x="475488" y="3566160"/>
-            <a:ext cx="8193024" cy="365760"/>
+              <a:t>Was bleibt übrig – und warum ist Reserve kein Fehler?</a:t>
+            </a:r>
+            <a:endParaRPr lang="en-US" sz="1200" dirty="0"/>
+          </a:p>
+        </p:txBody>
+      </p:sp>
+      <p:sp>
+        <p:nvSpPr>
+          <p:cNvPr id="15" name="Shape 13"/>
+          <p:cNvSpPr/>
+          <p:nvPr/>
+        </p:nvSpPr>
+        <p:spPr>
+          <a:xfrm>
+            <a:off x="438912" y="3273552"/>
+            <a:ext cx="8266176" cy="384048"/>
           </a:xfrm>
           <a:prstGeom prst="rect">
             <a:avLst/>
@@ -11221,69 +10565,69 @@
       </p:sp>
       <p:sp>
         <p:nvSpPr>
-          <p:cNvPr id="24" name="Text 22"/>
-          <p:cNvSpPr/>
-          <p:nvPr/>
-        </p:nvSpPr>
-        <p:spPr>
-          <a:xfrm>
-            <a:off x="658368" y="3566160"/>
-            <a:ext cx="1554480" cy="365760"/>
-          </a:xfrm>
-          <a:prstGeom prst="rect">
-            <a:avLst/>
-          </a:prstGeom>
-          <a:noFill/>
-          <a:ln/>
-        </p:spPr>
-        <p:txBody>
-          <a:bodyPr wrap="square" lIns="0" tIns="0" rIns="0" bIns="0" rtlCol="0" anchor="ctr"/>
-          <a:lstStyle/>
-          <a:p>
-            <a:pPr indent="0" marL="0">
-              <a:buNone/>
-            </a:pPr>
-            <a:r>
-              <a:rPr lang="en-US" sz="1150" b="1" dirty="0">
-                <a:solidFill>
-                  <a:srgbClr val="272E52"/>
-                </a:solidFill>
-                <a:latin typeface="Arial" pitchFamily="34" charset="0"/>
-                <a:ea typeface="Arial" pitchFamily="34" charset="-122"/>
-                <a:cs typeface="Arial" pitchFamily="34" charset="-120"/>
-              </a:rPr>
-              <a:t>Reserve</a:t>
-            </a:r>
-            <a:endParaRPr lang="en-US" sz="1150" dirty="0"/>
-          </a:p>
-        </p:txBody>
-      </p:sp>
-      <p:sp>
-        <p:nvSpPr>
-          <p:cNvPr id="25" name="Text 23"/>
-          <p:cNvSpPr/>
-          <p:nvPr/>
-        </p:nvSpPr>
-        <p:spPr>
-          <a:xfrm>
-            <a:off x="2395728" y="3566160"/>
-            <a:ext cx="731520" cy="365760"/>
-          </a:xfrm>
-          <a:prstGeom prst="rect">
-            <a:avLst/>
-          </a:prstGeom>
-          <a:noFill/>
-          <a:ln/>
-        </p:spPr>
-        <p:txBody>
-          <a:bodyPr wrap="square" lIns="0" tIns="0" rIns="0" bIns="0" rtlCol="0" anchor="ctr"/>
-          <a:lstStyle/>
-          <a:p>
-            <a:pPr indent="0" marL="0">
-              <a:buNone/>
-            </a:pPr>
-            <a:r>
-              <a:rPr lang="en-US" sz="1150" dirty="0">
+          <p:cNvPr id="16" name="Text 14"/>
+          <p:cNvSpPr/>
+          <p:nvPr/>
+        </p:nvSpPr>
+        <p:spPr>
+          <a:xfrm>
+            <a:off x="566928" y="3273552"/>
+            <a:ext cx="411480" cy="384048"/>
+          </a:xfrm>
+          <a:prstGeom prst="rect">
+            <a:avLst/>
+          </a:prstGeom>
+          <a:noFill/>
+          <a:ln/>
+        </p:spPr>
+        <p:txBody>
+          <a:bodyPr wrap="square" lIns="0" tIns="0" rIns="0" bIns="0" rtlCol="0" anchor="ctr"/>
+          <a:lstStyle/>
+          <a:p>
+            <a:pPr indent="0" marL="0">
+              <a:buNone/>
+            </a:pPr>
+            <a:r>
+              <a:rPr lang="en-US" sz="1200" b="1" dirty="0">
+                <a:solidFill>
+                  <a:srgbClr val="3843AF"/>
+                </a:solidFill>
+                <a:latin typeface="Courier New" pitchFamily="34" charset="0"/>
+                <a:ea typeface="Courier New" pitchFamily="34" charset="-122"/>
+                <a:cs typeface="Courier New" pitchFamily="34" charset="-120"/>
+              </a:rPr>
+              <a:t>5</a:t>
+            </a:r>
+            <a:endParaRPr lang="en-US" sz="1200" dirty="0"/>
+          </a:p>
+        </p:txBody>
+      </p:sp>
+      <p:sp>
+        <p:nvSpPr>
+          <p:cNvPr id="17" name="Text 15"/>
+          <p:cNvSpPr/>
+          <p:nvPr/>
+        </p:nvSpPr>
+        <p:spPr>
+          <a:xfrm>
+            <a:off x="978408" y="3273552"/>
+            <a:ext cx="7598664" cy="384048"/>
+          </a:xfrm>
+          <a:prstGeom prst="rect">
+            <a:avLst/>
+          </a:prstGeom>
+          <a:noFill/>
+          <a:ln/>
+        </p:spPr>
+        <p:txBody>
+          <a:bodyPr wrap="square" lIns="0" tIns="0" rIns="0" bIns="0" rtlCol="0" anchor="ctr"/>
+          <a:lstStyle/>
+          <a:p>
+            <a:pPr indent="0" marL="0">
+              <a:buNone/>
+            </a:pPr>
+            <a:r>
+              <a:rPr lang="en-US" sz="1200" dirty="0">
                 <a:solidFill>
                   <a:srgbClr val="434A63"/>
                 </a:solidFill>
@@ -11291,61 +10635,42 @@
                 <a:ea typeface="Arial" pitchFamily="34" charset="-122"/>
                 <a:cs typeface="Arial" pitchFamily="34" charset="-120"/>
               </a:rPr>
-              <a:t>–</a:t>
-            </a:r>
-            <a:endParaRPr lang="en-US" sz="1150" dirty="0"/>
-          </a:p>
-        </p:txBody>
-      </p:sp>
-      <p:sp>
-        <p:nvSpPr>
-          <p:cNvPr id="26" name="Text 24"/>
-          <p:cNvSpPr/>
-          <p:nvPr/>
-        </p:nvSpPr>
-        <p:spPr>
-          <a:xfrm>
-            <a:off x="3310128" y="3566160"/>
-            <a:ext cx="5175504" cy="365760"/>
-          </a:xfrm>
-          <a:prstGeom prst="rect">
-            <a:avLst/>
-          </a:prstGeom>
-          <a:noFill/>
-          <a:ln/>
-        </p:spPr>
-        <p:txBody>
-          <a:bodyPr wrap="square" lIns="0" tIns="0" rIns="0" bIns="0" rtlCol="0" anchor="ctr"/>
-          <a:lstStyle/>
-          <a:p>
-            <a:pPr indent="0" marL="0">
-              <a:buNone/>
-            </a:pPr>
-            <a:r>
-              <a:rPr lang="en-US" sz="1150" dirty="0">
-                <a:solidFill>
-                  <a:srgbClr val="434A63"/>
-                </a:solidFill>
-                <a:latin typeface="Arial" pitchFamily="34" charset="0"/>
-                <a:ea typeface="Arial" pitchFamily="34" charset="-122"/>
-                <a:cs typeface="Arial" pitchFamily="34" charset="-120"/>
-              </a:rPr>
-              <a:t>.240 bis .255 bleiben frei – Platz zum Wachsen</a:t>
-            </a:r>
-            <a:endParaRPr lang="en-US" sz="1150" dirty="0"/>
-          </a:p>
-        </p:txBody>
-      </p:sp>
-      <p:sp>
-        <p:nvSpPr>
-          <p:cNvPr id="27" name="Shape 25"/>
-          <p:cNvSpPr/>
-          <p:nvPr/>
-        </p:nvSpPr>
-        <p:spPr>
-          <a:xfrm>
-            <a:off x="566928" y="4160520"/>
-            <a:ext cx="32004" cy="256032"/>
+              <a:t>Der Bogen zur Umfrage: die /26-Frage, noch einmal für alle</a:t>
+            </a:r>
+            <a:endParaRPr lang="en-US" sz="1200" dirty="0"/>
+          </a:p>
+        </p:txBody>
+      </p:sp>
+      <p:sp>
+        <p:nvSpPr>
+          <p:cNvPr id="18" name="Shape 16"/>
+          <p:cNvSpPr/>
+          <p:nvPr/>
+        </p:nvSpPr>
+        <p:spPr>
+          <a:xfrm>
+            <a:off x="566928" y="3794760"/>
+            <a:ext cx="8010144" cy="548640"/>
+          </a:xfrm>
+          <a:prstGeom prst="rect">
+            <a:avLst/>
+          </a:prstGeom>
+          <a:solidFill>
+            <a:srgbClr val="EEF0FB"/>
+          </a:solidFill>
+          <a:ln/>
+        </p:spPr>
+      </p:sp>
+      <p:sp>
+        <p:nvSpPr>
+          <p:cNvPr id="19" name="Shape 17"/>
+          <p:cNvSpPr/>
+          <p:nvPr/>
+        </p:nvSpPr>
+        <p:spPr>
+          <a:xfrm>
+            <a:off x="566928" y="3794760"/>
+            <a:ext cx="41148" cy="548640"/>
           </a:xfrm>
           <a:prstGeom prst="rect">
             <a:avLst/>
@@ -11358,30 +10683,33 @@
       </p:sp>
       <p:sp>
         <p:nvSpPr>
-          <p:cNvPr id="28" name="Text 26"/>
-          <p:cNvSpPr/>
-          <p:nvPr/>
-        </p:nvSpPr>
-        <p:spPr>
-          <a:xfrm>
-            <a:off x="749808" y="4114800"/>
-            <a:ext cx="7827264" cy="402336"/>
-          </a:xfrm>
-          <a:prstGeom prst="rect">
-            <a:avLst/>
-          </a:prstGeom>
-          <a:noFill/>
-          <a:ln/>
-        </p:spPr>
-        <p:txBody>
-          <a:bodyPr wrap="square" lIns="0" tIns="0" rIns="0" bIns="0" rtlCol="0" anchor="ctr"/>
-          <a:lstStyle/>
-          <a:p>
-            <a:pPr indent="0" marL="0">
-              <a:buNone/>
-            </a:pPr>
-            <a:r>
-              <a:rPr lang="en-US" sz="1200" b="1" dirty="0">
+          <p:cNvPr id="20" name="Text 18"/>
+          <p:cNvSpPr/>
+          <p:nvPr/>
+        </p:nvSpPr>
+        <p:spPr>
+          <a:xfrm>
+            <a:off x="804672" y="3941064"/>
+            <a:ext cx="7607808" cy="283464"/>
+          </a:xfrm>
+          <a:prstGeom prst="rect">
+            <a:avLst/>
+          </a:prstGeom>
+          <a:noFill/>
+          <a:ln/>
+        </p:spPr>
+        <p:txBody>
+          <a:bodyPr wrap="square" lIns="0" tIns="0" rIns="0" bIns="0" rtlCol="0" anchor="t"/>
+          <a:lstStyle/>
+          <a:p>
+            <a:pPr indent="0" marL="0">
+              <a:lnSpc>
+                <a:spcPct val="92000"/>
+              </a:lnSpc>
+              <a:buNone/>
+            </a:pPr>
+            <a:r>
+              <a:rPr lang="en-US" sz="1150" dirty="0">
                 <a:solidFill>
                   <a:srgbClr val="434A63"/>
                 </a:solidFill>
@@ -11389,15 +10717,15 @@
                 <a:ea typeface="Arial" pitchFamily="34" charset="-122"/>
                 <a:cs typeface="Arial" pitchFamily="34" charset="-120"/>
               </a:rPr>
-              <a:t>Größte zuerst vermeidet Lücken. Probe: 128 + 64 + 32 + 16 = 240 ≤ 256 – passt.</a:t>
-            </a:r>
-            <a:endParaRPr lang="en-US" sz="1200" dirty="0"/>
-          </a:p>
-        </p:txBody>
-      </p:sp>
-      <p:sp>
-        <p:nvSpPr>
-          <p:cNvPr id="29" name="Shape 27"/>
+              <a:t>Es gibt mehrere richtige Pläne. Falsch ist nur, was sich überlappt oder nicht reicht.</a:t>
+            </a:r>
+            <a:endParaRPr lang="en-US" sz="1150" dirty="0"/>
+          </a:p>
+        </p:txBody>
+      </p:sp>
+      <p:sp>
+        <p:nvSpPr>
+          <p:cNvPr id="21" name="Shape 19"/>
           <p:cNvSpPr/>
           <p:nvPr/>
         </p:nvSpPr>
@@ -11420,7 +10748,7 @@
       </p:sp>
       <p:sp>
         <p:nvSpPr>
-          <p:cNvPr id="30" name="Text 28"/>
+          <p:cNvPr id="22" name="Text 20"/>
           <p:cNvSpPr/>
           <p:nvPr/>
         </p:nvSpPr>
@@ -11459,7 +10787,7 @@
       </p:sp>
       <p:sp>
         <p:nvSpPr>
-          <p:cNvPr id="31" name="Text 29"/>
+          <p:cNvPr id="23" name="Text 21"/>
           <p:cNvSpPr/>
           <p:nvPr/>
         </p:nvSpPr>
@@ -11490,7 +10818,7 @@
                 <a:ea typeface="Arial" pitchFamily="34" charset="-122"/>
                 <a:cs typeface="Arial" pitchFamily="34" charset="-120"/>
               </a:rPr>
-              <a:t>19/21</a:t>
+              <a:t>19/22</a:t>
             </a:r>
             <a:endParaRPr lang="en-US" sz="1050" dirty="0"/>
           </a:p>
@@ -11581,7 +10909,7 @@
                 <a:ea typeface="Arial" pitchFamily="34" charset="-122"/>
                 <a:cs typeface="Arial" pitchFamily="34" charset="-120"/>
               </a:rPr>
-              <a:t>KERN DES ABENDS</a:t>
+              <a:t>AUSWERTUNG</a:t>
             </a:r>
             <a:endParaRPr lang="en-US" sz="1150" dirty="0"/>
           </a:p>
@@ -11620,7 +10948,7 @@
                 <a:ea typeface="Arial" pitchFamily="34" charset="-122"/>
                 <a:cs typeface="Arial" pitchFamily="34" charset="-120"/>
               </a:rPr>
-              <a:t>Das nehmt ihr heute mit</a:t>
+              <a:t>Eine mögliche Lösung</a:t>
             </a:r>
             <a:endParaRPr lang="en-US" sz="2600" dirty="0"/>
           </a:p>
@@ -11634,27 +10962,24 @@
         </p:nvSpPr>
         <p:spPr>
           <a:xfrm>
-            <a:off x="566928" y="1691640"/>
-            <a:ext cx="8010144" cy="1828800"/>
-          </a:xfrm>
-          <a:prstGeom prst="rect">
-            <a:avLst/>
-          </a:prstGeom>
-          <a:noFill/>
-          <a:ln/>
-        </p:spPr>
-        <p:txBody>
-          <a:bodyPr wrap="square" lIns="0" tIns="0" rIns="0" bIns="0" rtlCol="0" anchor="t"/>
-          <a:lstStyle/>
-          <a:p>
-            <a:pPr indent="0" marL="0">
-              <a:lnSpc>
-                <a:spcPct val="92000"/>
-              </a:lnSpc>
-              <a:buNone/>
-            </a:pPr>
-            <a:r>
-              <a:rPr lang="en-US" sz="1350" b="1" dirty="0">
+            <a:off x="658368" y="1737360"/>
+            <a:ext cx="1554480" cy="274320"/>
+          </a:xfrm>
+          <a:prstGeom prst="rect">
+            <a:avLst/>
+          </a:prstGeom>
+          <a:noFill/>
+          <a:ln/>
+        </p:spPr>
+        <p:txBody>
+          <a:bodyPr wrap="square" lIns="0" tIns="0" rIns="0" bIns="0" rtlCol="0" anchor="ctr"/>
+          <a:lstStyle/>
+          <a:p>
+            <a:pPr indent="0" marL="0">
+              <a:buNone/>
+            </a:pPr>
+            <a:r>
+              <a:rPr lang="en-US" sz="1050" b="1" spc="80" kern="0" dirty="0">
                 <a:solidFill>
                   <a:srgbClr val="3843AF"/>
                 </a:solidFill>
@@ -11662,19 +10987,198 @@
                 <a:ea typeface="Arial" pitchFamily="34" charset="-122"/>
                 <a:cs typeface="Arial" pitchFamily="34" charset="-120"/>
               </a:rPr>
-              <a:t>▸   </a:t>
-            </a:r>
-            <a:pPr indent="0" marL="0">
-              <a:lnSpc>
-                <a:spcPct val="92000"/>
-              </a:lnSpc>
-              <a:spcAft>
-                <a:spcPts val="900"/>
-              </a:spcAft>
-              <a:buNone/>
-            </a:pPr>
-            <a:r>
-              <a:rPr lang="en-US" sz="1350" b="1" dirty="0">
+              <a:t>Abteilung</a:t>
+            </a:r>
+            <a:endParaRPr lang="en-US" sz="1050" dirty="0"/>
+          </a:p>
+        </p:txBody>
+      </p:sp>
+      <p:sp>
+        <p:nvSpPr>
+          <p:cNvPr id="6" name="Text 4"/>
+          <p:cNvSpPr/>
+          <p:nvPr/>
+        </p:nvSpPr>
+        <p:spPr>
+          <a:xfrm>
+            <a:off x="2395728" y="1737360"/>
+            <a:ext cx="731520" cy="274320"/>
+          </a:xfrm>
+          <a:prstGeom prst="rect">
+            <a:avLst/>
+          </a:prstGeom>
+          <a:noFill/>
+          <a:ln/>
+        </p:spPr>
+        <p:txBody>
+          <a:bodyPr wrap="square" lIns="0" tIns="0" rIns="0" bIns="0" rtlCol="0" anchor="ctr"/>
+          <a:lstStyle/>
+          <a:p>
+            <a:pPr indent="0" marL="0">
+              <a:buNone/>
+            </a:pPr>
+            <a:r>
+              <a:rPr lang="en-US" sz="1050" b="1" spc="80" kern="0" dirty="0">
+                <a:solidFill>
+                  <a:srgbClr val="3843AF"/>
+                </a:solidFill>
+                <a:latin typeface="Arial" pitchFamily="34" charset="0"/>
+                <a:ea typeface="Arial" pitchFamily="34" charset="-122"/>
+                <a:cs typeface="Arial" pitchFamily="34" charset="-120"/>
+              </a:rPr>
+              <a:t>Präfix</a:t>
+            </a:r>
+            <a:endParaRPr lang="en-US" sz="1050" dirty="0"/>
+          </a:p>
+        </p:txBody>
+      </p:sp>
+      <p:sp>
+        <p:nvSpPr>
+          <p:cNvPr id="7" name="Text 5"/>
+          <p:cNvSpPr/>
+          <p:nvPr/>
+        </p:nvSpPr>
+        <p:spPr>
+          <a:xfrm>
+            <a:off x="3310128" y="1737360"/>
+            <a:ext cx="5175504" cy="274320"/>
+          </a:xfrm>
+          <a:prstGeom prst="rect">
+            <a:avLst/>
+          </a:prstGeom>
+          <a:noFill/>
+          <a:ln/>
+        </p:spPr>
+        <p:txBody>
+          <a:bodyPr wrap="square" lIns="0" tIns="0" rIns="0" bIns="0" rtlCol="0" anchor="ctr"/>
+          <a:lstStyle/>
+          <a:p>
+            <a:pPr indent="0" marL="0">
+              <a:buNone/>
+            </a:pPr>
+            <a:r>
+              <a:rPr lang="en-US" sz="1050" b="1" spc="80" kern="0" dirty="0">
+                <a:solidFill>
+                  <a:srgbClr val="3843AF"/>
+                </a:solidFill>
+                <a:latin typeface="Arial" pitchFamily="34" charset="0"/>
+                <a:ea typeface="Arial" pitchFamily="34" charset="-122"/>
+                <a:cs typeface="Arial" pitchFamily="34" charset="-120"/>
+              </a:rPr>
+              <a:t>Netz · nutzbar · Broadcast</a:t>
+            </a:r>
+            <a:endParaRPr lang="en-US" sz="1050" dirty="0"/>
+          </a:p>
+        </p:txBody>
+      </p:sp>
+      <p:sp>
+        <p:nvSpPr>
+          <p:cNvPr id="8" name="Shape 6"/>
+          <p:cNvSpPr/>
+          <p:nvPr/>
+        </p:nvSpPr>
+        <p:spPr>
+          <a:xfrm>
+            <a:off x="566928" y="2029968"/>
+            <a:ext cx="8010144" cy="0"/>
+          </a:xfrm>
+          <a:prstGeom prst="line">
+            <a:avLst/>
+          </a:prstGeom>
+          <a:noFill/>
+          <a:ln w="12700">
+            <a:solidFill>
+              <a:srgbClr val="DFE3F0"/>
+            </a:solidFill>
+            <a:prstDash val="solid"/>
+          </a:ln>
+        </p:spPr>
+      </p:sp>
+      <p:sp>
+        <p:nvSpPr>
+          <p:cNvPr id="9" name="Shape 7"/>
+          <p:cNvSpPr/>
+          <p:nvPr/>
+        </p:nvSpPr>
+        <p:spPr>
+          <a:xfrm>
+            <a:off x="475488" y="2103120"/>
+            <a:ext cx="8193024" cy="365760"/>
+          </a:xfrm>
+          <a:prstGeom prst="rect">
+            <a:avLst/>
+          </a:prstGeom>
+          <a:solidFill>
+            <a:srgbClr val="F5F6FC"/>
+          </a:solidFill>
+          <a:ln/>
+        </p:spPr>
+      </p:sp>
+      <p:sp>
+        <p:nvSpPr>
+          <p:cNvPr id="10" name="Text 8"/>
+          <p:cNvSpPr/>
+          <p:nvPr/>
+        </p:nvSpPr>
+        <p:spPr>
+          <a:xfrm>
+            <a:off x="658368" y="2103120"/>
+            <a:ext cx="1554480" cy="365760"/>
+          </a:xfrm>
+          <a:prstGeom prst="rect">
+            <a:avLst/>
+          </a:prstGeom>
+          <a:noFill/>
+          <a:ln/>
+        </p:spPr>
+        <p:txBody>
+          <a:bodyPr wrap="square" lIns="0" tIns="0" rIns="0" bIns="0" rtlCol="0" anchor="ctr"/>
+          <a:lstStyle/>
+          <a:p>
+            <a:pPr indent="0" marL="0">
+              <a:buNone/>
+            </a:pPr>
+            <a:r>
+              <a:rPr lang="en-US" sz="1150" b="1" dirty="0">
+                <a:solidFill>
+                  <a:srgbClr val="272E52"/>
+                </a:solidFill>
+                <a:latin typeface="Arial" pitchFamily="34" charset="0"/>
+                <a:ea typeface="Arial" pitchFamily="34" charset="-122"/>
+                <a:cs typeface="Arial" pitchFamily="34" charset="-120"/>
+              </a:rPr>
+              <a:t>Büro (100)</a:t>
+            </a:r>
+            <a:endParaRPr lang="en-US" sz="1150" dirty="0"/>
+          </a:p>
+        </p:txBody>
+      </p:sp>
+      <p:sp>
+        <p:nvSpPr>
+          <p:cNvPr id="11" name="Text 9"/>
+          <p:cNvSpPr/>
+          <p:nvPr/>
+        </p:nvSpPr>
+        <p:spPr>
+          <a:xfrm>
+            <a:off x="2395728" y="2103120"/>
+            <a:ext cx="731520" cy="365760"/>
+          </a:xfrm>
+          <a:prstGeom prst="rect">
+            <a:avLst/>
+          </a:prstGeom>
+          <a:noFill/>
+          <a:ln/>
+        </p:spPr>
+        <p:txBody>
+          <a:bodyPr wrap="square" lIns="0" tIns="0" rIns="0" bIns="0" rtlCol="0" anchor="ctr"/>
+          <a:lstStyle/>
+          <a:p>
+            <a:pPr indent="0" marL="0">
+              <a:buNone/>
+            </a:pPr>
+            <a:r>
+              <a:rPr lang="en-US" sz="1150" dirty="0">
                 <a:solidFill>
                   <a:srgbClr val="434A63"/>
                 </a:solidFill>
@@ -11682,39 +11186,38 @@
                 <a:ea typeface="Arial" pitchFamily="34" charset="-122"/>
                 <a:cs typeface="Arial" pitchFamily="34" charset="-120"/>
               </a:rPr>
-              <a:t>Die Maske zieht die Grenze zwischen Netzanteil und Hostanteil.</a:t>
-            </a:r>
-            <a:endParaRPr lang="en-US" sz="1350" dirty="0"/>
-          </a:p>
-          <a:p>
-            <a:pPr indent="0" marL="0">
-              <a:lnSpc>
-                <a:spcPct val="92000"/>
-              </a:lnSpc>
-              <a:buNone/>
-            </a:pPr>
-            <a:r>
-              <a:rPr lang="en-US" sz="1350" b="1" dirty="0">
-                <a:solidFill>
-                  <a:srgbClr val="3843AF"/>
-                </a:solidFill>
-                <a:latin typeface="Arial" pitchFamily="34" charset="0"/>
-                <a:ea typeface="Arial" pitchFamily="34" charset="-122"/>
-                <a:cs typeface="Arial" pitchFamily="34" charset="-120"/>
-              </a:rPr>
-              <a:t>▸   </a:t>
-            </a:r>
-            <a:pPr indent="0" marL="0">
-              <a:lnSpc>
-                <a:spcPct val="92000"/>
-              </a:lnSpc>
-              <a:spcAft>
-                <a:spcPts val="900"/>
-              </a:spcAft>
-              <a:buNone/>
-            </a:pPr>
-            <a:r>
-              <a:rPr lang="en-US" sz="1350" b="1" dirty="0">
+              <a:t>/25</a:t>
+            </a:r>
+            <a:endParaRPr lang="en-US" sz="1150" dirty="0"/>
+          </a:p>
+        </p:txBody>
+      </p:sp>
+      <p:sp>
+        <p:nvSpPr>
+          <p:cNvPr id="12" name="Text 10"/>
+          <p:cNvSpPr/>
+          <p:nvPr/>
+        </p:nvSpPr>
+        <p:spPr>
+          <a:xfrm>
+            <a:off x="3310128" y="2103120"/>
+            <a:ext cx="5175504" cy="365760"/>
+          </a:xfrm>
+          <a:prstGeom prst="rect">
+            <a:avLst/>
+          </a:prstGeom>
+          <a:noFill/>
+          <a:ln/>
+        </p:spPr>
+        <p:txBody>
+          <a:bodyPr wrap="square" lIns="0" tIns="0" rIns="0" bIns="0" rtlCol="0" anchor="ctr"/>
+          <a:lstStyle/>
+          <a:p>
+            <a:pPr indent="0" marL="0">
+              <a:buNone/>
+            </a:pPr>
+            <a:r>
+              <a:rPr lang="en-US" sz="1150" dirty="0">
                 <a:solidFill>
                   <a:srgbClr val="434A63"/>
                 </a:solidFill>
@@ -11722,39 +11225,77 @@
                 <a:ea typeface="Arial" pitchFamily="34" charset="-122"/>
                 <a:cs typeface="Arial" pitchFamily="34" charset="-120"/>
               </a:rPr>
-              <a:t>Blockgröße = 2 hoch Hostbits. Nutzbar = Blockgröße minus zwei.</a:t>
-            </a:r>
-            <a:endParaRPr lang="en-US" sz="1350" dirty="0"/>
-          </a:p>
-          <a:p>
-            <a:pPr indent="0" marL="0">
-              <a:lnSpc>
-                <a:spcPct val="92000"/>
-              </a:lnSpc>
-              <a:buNone/>
-            </a:pPr>
-            <a:r>
-              <a:rPr lang="en-US" sz="1350" b="1" dirty="0">
-                <a:solidFill>
-                  <a:srgbClr val="3843AF"/>
-                </a:solidFill>
-                <a:latin typeface="Arial" pitchFamily="34" charset="0"/>
-                <a:ea typeface="Arial" pitchFamily="34" charset="-122"/>
-                <a:cs typeface="Arial" pitchFamily="34" charset="-120"/>
-              </a:rPr>
-              <a:t>▸   </a:t>
-            </a:r>
-            <a:pPr indent="0" marL="0">
-              <a:lnSpc>
-                <a:spcPct val="92000"/>
-              </a:lnSpc>
-              <a:spcAft>
-                <a:spcPts val="900"/>
-              </a:spcAft>
-              <a:buNone/>
-            </a:pPr>
-            <a:r>
-              <a:rPr lang="en-US" sz="1350" b="1" dirty="0">
+              <a:t>192.168.10.0 · .1–.126 · .127</a:t>
+            </a:r>
+            <a:endParaRPr lang="en-US" sz="1150" dirty="0"/>
+          </a:p>
+        </p:txBody>
+      </p:sp>
+      <p:sp>
+        <p:nvSpPr>
+          <p:cNvPr id="13" name="Text 11"/>
+          <p:cNvSpPr/>
+          <p:nvPr/>
+        </p:nvSpPr>
+        <p:spPr>
+          <a:xfrm>
+            <a:off x="658368" y="2468880"/>
+            <a:ext cx="1554480" cy="365760"/>
+          </a:xfrm>
+          <a:prstGeom prst="rect">
+            <a:avLst/>
+          </a:prstGeom>
+          <a:noFill/>
+          <a:ln/>
+        </p:spPr>
+        <p:txBody>
+          <a:bodyPr wrap="square" lIns="0" tIns="0" rIns="0" bIns="0" rtlCol="0" anchor="ctr"/>
+          <a:lstStyle/>
+          <a:p>
+            <a:pPr indent="0" marL="0">
+              <a:buNone/>
+            </a:pPr>
+            <a:r>
+              <a:rPr lang="en-US" sz="1150" b="1" dirty="0">
+                <a:solidFill>
+                  <a:srgbClr val="272E52"/>
+                </a:solidFill>
+                <a:latin typeface="Arial" pitchFamily="34" charset="0"/>
+                <a:ea typeface="Arial" pitchFamily="34" charset="-122"/>
+                <a:cs typeface="Arial" pitchFamily="34" charset="-120"/>
+              </a:rPr>
+              <a:t>Gäste-WLAN (50)</a:t>
+            </a:r>
+            <a:endParaRPr lang="en-US" sz="1150" dirty="0"/>
+          </a:p>
+        </p:txBody>
+      </p:sp>
+      <p:sp>
+        <p:nvSpPr>
+          <p:cNvPr id="14" name="Text 12"/>
+          <p:cNvSpPr/>
+          <p:nvPr/>
+        </p:nvSpPr>
+        <p:spPr>
+          <a:xfrm>
+            <a:off x="2395728" y="2468880"/>
+            <a:ext cx="731520" cy="365760"/>
+          </a:xfrm>
+          <a:prstGeom prst="rect">
+            <a:avLst/>
+          </a:prstGeom>
+          <a:noFill/>
+          <a:ln/>
+        </p:spPr>
+        <p:txBody>
+          <a:bodyPr wrap="square" lIns="0" tIns="0" rIns="0" bIns="0" rtlCol="0" anchor="ctr"/>
+          <a:lstStyle/>
+          <a:p>
+            <a:pPr indent="0" marL="0">
+              <a:buNone/>
+            </a:pPr>
+            <a:r>
+              <a:rPr lang="en-US" sz="1150" dirty="0">
                 <a:solidFill>
                   <a:srgbClr val="434A63"/>
                 </a:solidFill>
@@ -11762,39 +11303,38 @@
                 <a:ea typeface="Arial" pitchFamily="34" charset="-122"/>
                 <a:cs typeface="Arial" pitchFamily="34" charset="-120"/>
               </a:rPr>
-              <a:t>Netzadresse benennt das Netz, Broadcast ruft alle – beide sind reserviert.</a:t>
-            </a:r>
-            <a:endParaRPr lang="en-US" sz="1350" dirty="0"/>
-          </a:p>
-          <a:p>
-            <a:pPr indent="0" marL="0">
-              <a:lnSpc>
-                <a:spcPct val="92000"/>
-              </a:lnSpc>
-              <a:buNone/>
-            </a:pPr>
-            <a:r>
-              <a:rPr lang="en-US" sz="1350" b="1" dirty="0">
-                <a:solidFill>
-                  <a:srgbClr val="3843AF"/>
-                </a:solidFill>
-                <a:latin typeface="Arial" pitchFamily="34" charset="0"/>
-                <a:ea typeface="Arial" pitchFamily="34" charset="-122"/>
-                <a:cs typeface="Arial" pitchFamily="34" charset="-120"/>
-              </a:rPr>
-              <a:t>▸   </a:t>
-            </a:r>
-            <a:pPr indent="0" marL="0">
-              <a:lnSpc>
-                <a:spcPct val="92000"/>
-              </a:lnSpc>
-              <a:spcAft>
-                <a:spcPts val="900"/>
-              </a:spcAft>
-              <a:buNone/>
-            </a:pPr>
-            <a:r>
-              <a:rPr lang="en-US" sz="1350" b="1" dirty="0">
+              <a:t>/26</a:t>
+            </a:r>
+            <a:endParaRPr lang="en-US" sz="1150" dirty="0"/>
+          </a:p>
+        </p:txBody>
+      </p:sp>
+      <p:sp>
+        <p:nvSpPr>
+          <p:cNvPr id="15" name="Text 13"/>
+          <p:cNvSpPr/>
+          <p:nvPr/>
+        </p:nvSpPr>
+        <p:spPr>
+          <a:xfrm>
+            <a:off x="3310128" y="2468880"/>
+            <a:ext cx="5175504" cy="365760"/>
+          </a:xfrm>
+          <a:prstGeom prst="rect">
+            <a:avLst/>
+          </a:prstGeom>
+          <a:noFill/>
+          <a:ln/>
+        </p:spPr>
+        <p:txBody>
+          <a:bodyPr wrap="square" lIns="0" tIns="0" rIns="0" bIns="0" rtlCol="0" anchor="ctr"/>
+          <a:lstStyle/>
+          <a:p>
+            <a:pPr indent="0" marL="0">
+              <a:buNone/>
+            </a:pPr>
+            <a:r>
+              <a:rPr lang="en-US" sz="1150" dirty="0">
                 <a:solidFill>
                   <a:srgbClr val="434A63"/>
                 </a:solidFill>
@@ -11802,39 +11342,97 @@
                 <a:ea typeface="Arial" pitchFamily="34" charset="-122"/>
                 <a:cs typeface="Arial" pitchFamily="34" charset="-120"/>
               </a:rPr>
-              <a:t>Privat heißt 10er, 172.16er, 192.168er – NAT übersetzt am Router nach draußen.</a:t>
-            </a:r>
-            <a:endParaRPr lang="en-US" sz="1350" dirty="0"/>
-          </a:p>
-          <a:p>
-            <a:pPr indent="0" marL="0">
-              <a:lnSpc>
-                <a:spcPct val="92000"/>
-              </a:lnSpc>
-              <a:buNone/>
-            </a:pPr>
-            <a:r>
-              <a:rPr lang="en-US" sz="1350" b="1" dirty="0">
-                <a:solidFill>
-                  <a:srgbClr val="3843AF"/>
-                </a:solidFill>
-                <a:latin typeface="Arial" pitchFamily="34" charset="0"/>
-                <a:ea typeface="Arial" pitchFamily="34" charset="-122"/>
-                <a:cs typeface="Arial" pitchFamily="34" charset="-120"/>
-              </a:rPr>
-              <a:t>▸   </a:t>
-            </a:r>
-            <a:pPr indent="0" marL="0">
-              <a:lnSpc>
-                <a:spcPct val="92000"/>
-              </a:lnSpc>
-              <a:spcAft>
-                <a:spcPts val="900"/>
-              </a:spcAft>
-              <a:buNone/>
-            </a:pPr>
-            <a:r>
-              <a:rPr lang="en-US" sz="1350" b="1" dirty="0">
+              <a:t>192.168.10.128 · .129–.190 · .191</a:t>
+            </a:r>
+            <a:endParaRPr lang="en-US" sz="1150" dirty="0"/>
+          </a:p>
+        </p:txBody>
+      </p:sp>
+      <p:sp>
+        <p:nvSpPr>
+          <p:cNvPr id="16" name="Shape 14"/>
+          <p:cNvSpPr/>
+          <p:nvPr/>
+        </p:nvSpPr>
+        <p:spPr>
+          <a:xfrm>
+            <a:off x="475488" y="2834640"/>
+            <a:ext cx="8193024" cy="365760"/>
+          </a:xfrm>
+          <a:prstGeom prst="rect">
+            <a:avLst/>
+          </a:prstGeom>
+          <a:solidFill>
+            <a:srgbClr val="F5F6FC"/>
+          </a:solidFill>
+          <a:ln/>
+        </p:spPr>
+      </p:sp>
+      <p:sp>
+        <p:nvSpPr>
+          <p:cNvPr id="17" name="Text 15"/>
+          <p:cNvSpPr/>
+          <p:nvPr/>
+        </p:nvSpPr>
+        <p:spPr>
+          <a:xfrm>
+            <a:off x="658368" y="2834640"/>
+            <a:ext cx="1554480" cy="365760"/>
+          </a:xfrm>
+          <a:prstGeom prst="rect">
+            <a:avLst/>
+          </a:prstGeom>
+          <a:noFill/>
+          <a:ln/>
+        </p:spPr>
+        <p:txBody>
+          <a:bodyPr wrap="square" lIns="0" tIns="0" rIns="0" bIns="0" rtlCol="0" anchor="ctr"/>
+          <a:lstStyle/>
+          <a:p>
+            <a:pPr indent="0" marL="0">
+              <a:buNone/>
+            </a:pPr>
+            <a:r>
+              <a:rPr lang="en-US" sz="1150" b="1" dirty="0">
+                <a:solidFill>
+                  <a:srgbClr val="272E52"/>
+                </a:solidFill>
+                <a:latin typeface="Arial" pitchFamily="34" charset="0"/>
+                <a:ea typeface="Arial" pitchFamily="34" charset="-122"/>
+                <a:cs typeface="Arial" pitchFamily="34" charset="-120"/>
+              </a:rPr>
+              <a:t>Produktion (20)</a:t>
+            </a:r>
+            <a:endParaRPr lang="en-US" sz="1150" dirty="0"/>
+          </a:p>
+        </p:txBody>
+      </p:sp>
+      <p:sp>
+        <p:nvSpPr>
+          <p:cNvPr id="18" name="Text 16"/>
+          <p:cNvSpPr/>
+          <p:nvPr/>
+        </p:nvSpPr>
+        <p:spPr>
+          <a:xfrm>
+            <a:off x="2395728" y="2834640"/>
+            <a:ext cx="731520" cy="365760"/>
+          </a:xfrm>
+          <a:prstGeom prst="rect">
+            <a:avLst/>
+          </a:prstGeom>
+          <a:noFill/>
+          <a:ln/>
+        </p:spPr>
+        <p:txBody>
+          <a:bodyPr wrap="square" lIns="0" tIns="0" rIns="0" bIns="0" rtlCol="0" anchor="ctr"/>
+          <a:lstStyle/>
+          <a:p>
+            <a:pPr indent="0" marL="0">
+              <a:buNone/>
+            </a:pPr>
+            <a:r>
+              <a:rPr lang="en-US" sz="1150" dirty="0">
                 <a:solidFill>
                   <a:srgbClr val="434A63"/>
                 </a:solidFill>
@@ -11842,42 +11440,315 @@
                 <a:ea typeface="Arial" pitchFamily="34" charset="-122"/>
                 <a:cs typeface="Arial" pitchFamily="34" charset="-120"/>
               </a:rPr>
-              <a:t>IPv6 nimmt euch das Rechnen ab – das Netz ist fast immer ein /64.</a:t>
-            </a:r>
-            <a:endParaRPr lang="en-US" sz="1350" dirty="0"/>
-          </a:p>
-        </p:txBody>
-      </p:sp>
-      <p:sp>
-        <p:nvSpPr>
-          <p:cNvPr id="6" name="Shape 4"/>
-          <p:cNvSpPr/>
-          <p:nvPr/>
-        </p:nvSpPr>
-        <p:spPr>
-          <a:xfrm>
-            <a:off x="566928" y="3566160"/>
-            <a:ext cx="8010144" cy="960120"/>
+              <a:t>/27</a:t>
+            </a:r>
+            <a:endParaRPr lang="en-US" sz="1150" dirty="0"/>
+          </a:p>
+        </p:txBody>
+      </p:sp>
+      <p:sp>
+        <p:nvSpPr>
+          <p:cNvPr id="19" name="Text 17"/>
+          <p:cNvSpPr/>
+          <p:nvPr/>
+        </p:nvSpPr>
+        <p:spPr>
+          <a:xfrm>
+            <a:off x="3310128" y="2834640"/>
+            <a:ext cx="5175504" cy="365760"/>
+          </a:xfrm>
+          <a:prstGeom prst="rect">
+            <a:avLst/>
+          </a:prstGeom>
+          <a:noFill/>
+          <a:ln/>
+        </p:spPr>
+        <p:txBody>
+          <a:bodyPr wrap="square" lIns="0" tIns="0" rIns="0" bIns="0" rtlCol="0" anchor="ctr"/>
+          <a:lstStyle/>
+          <a:p>
+            <a:pPr indent="0" marL="0">
+              <a:buNone/>
+            </a:pPr>
+            <a:r>
+              <a:rPr lang="en-US" sz="1150" dirty="0">
+                <a:solidFill>
+                  <a:srgbClr val="434A63"/>
+                </a:solidFill>
+                <a:latin typeface="Arial" pitchFamily="34" charset="0"/>
+                <a:ea typeface="Arial" pitchFamily="34" charset="-122"/>
+                <a:cs typeface="Arial" pitchFamily="34" charset="-120"/>
+              </a:rPr>
+              <a:t>192.168.10.192 · .193–.222 · .223</a:t>
+            </a:r>
+            <a:endParaRPr lang="en-US" sz="1150" dirty="0"/>
+          </a:p>
+        </p:txBody>
+      </p:sp>
+      <p:sp>
+        <p:nvSpPr>
+          <p:cNvPr id="20" name="Text 18"/>
+          <p:cNvSpPr/>
+          <p:nvPr/>
+        </p:nvSpPr>
+        <p:spPr>
+          <a:xfrm>
+            <a:off x="658368" y="3200400"/>
+            <a:ext cx="1554480" cy="365760"/>
+          </a:xfrm>
+          <a:prstGeom prst="rect">
+            <a:avLst/>
+          </a:prstGeom>
+          <a:noFill/>
+          <a:ln/>
+        </p:spPr>
+        <p:txBody>
+          <a:bodyPr wrap="square" lIns="0" tIns="0" rIns="0" bIns="0" rtlCol="0" anchor="ctr"/>
+          <a:lstStyle/>
+          <a:p>
+            <a:pPr indent="0" marL="0">
+              <a:buNone/>
+            </a:pPr>
+            <a:r>
+              <a:rPr lang="en-US" sz="1150" b="1" dirty="0">
+                <a:solidFill>
+                  <a:srgbClr val="272E52"/>
+                </a:solidFill>
+                <a:latin typeface="Arial" pitchFamily="34" charset="0"/>
+                <a:ea typeface="Arial" pitchFamily="34" charset="-122"/>
+                <a:cs typeface="Arial" pitchFamily="34" charset="-120"/>
+              </a:rPr>
+              <a:t>Server (10)</a:t>
+            </a:r>
+            <a:endParaRPr lang="en-US" sz="1150" dirty="0"/>
+          </a:p>
+        </p:txBody>
+      </p:sp>
+      <p:sp>
+        <p:nvSpPr>
+          <p:cNvPr id="21" name="Text 19"/>
+          <p:cNvSpPr/>
+          <p:nvPr/>
+        </p:nvSpPr>
+        <p:spPr>
+          <a:xfrm>
+            <a:off x="2395728" y="3200400"/>
+            <a:ext cx="731520" cy="365760"/>
+          </a:xfrm>
+          <a:prstGeom prst="rect">
+            <a:avLst/>
+          </a:prstGeom>
+          <a:noFill/>
+          <a:ln/>
+        </p:spPr>
+        <p:txBody>
+          <a:bodyPr wrap="square" lIns="0" tIns="0" rIns="0" bIns="0" rtlCol="0" anchor="ctr"/>
+          <a:lstStyle/>
+          <a:p>
+            <a:pPr indent="0" marL="0">
+              <a:buNone/>
+            </a:pPr>
+            <a:r>
+              <a:rPr lang="en-US" sz="1150" dirty="0">
+                <a:solidFill>
+                  <a:srgbClr val="434A63"/>
+                </a:solidFill>
+                <a:latin typeface="Arial" pitchFamily="34" charset="0"/>
+                <a:ea typeface="Arial" pitchFamily="34" charset="-122"/>
+                <a:cs typeface="Arial" pitchFamily="34" charset="-120"/>
+              </a:rPr>
+              <a:t>/28</a:t>
+            </a:r>
+            <a:endParaRPr lang="en-US" sz="1150" dirty="0"/>
+          </a:p>
+        </p:txBody>
+      </p:sp>
+      <p:sp>
+        <p:nvSpPr>
+          <p:cNvPr id="22" name="Text 20"/>
+          <p:cNvSpPr/>
+          <p:nvPr/>
+        </p:nvSpPr>
+        <p:spPr>
+          <a:xfrm>
+            <a:off x="3310128" y="3200400"/>
+            <a:ext cx="5175504" cy="365760"/>
+          </a:xfrm>
+          <a:prstGeom prst="rect">
+            <a:avLst/>
+          </a:prstGeom>
+          <a:noFill/>
+          <a:ln/>
+        </p:spPr>
+        <p:txBody>
+          <a:bodyPr wrap="square" lIns="0" tIns="0" rIns="0" bIns="0" rtlCol="0" anchor="ctr"/>
+          <a:lstStyle/>
+          <a:p>
+            <a:pPr indent="0" marL="0">
+              <a:buNone/>
+            </a:pPr>
+            <a:r>
+              <a:rPr lang="en-US" sz="1150" dirty="0">
+                <a:solidFill>
+                  <a:srgbClr val="434A63"/>
+                </a:solidFill>
+                <a:latin typeface="Arial" pitchFamily="34" charset="0"/>
+                <a:ea typeface="Arial" pitchFamily="34" charset="-122"/>
+                <a:cs typeface="Arial" pitchFamily="34" charset="-120"/>
+              </a:rPr>
+              <a:t>192.168.10.224 · .225–.238 · .239</a:t>
+            </a:r>
+            <a:endParaRPr lang="en-US" sz="1150" dirty="0"/>
+          </a:p>
+        </p:txBody>
+      </p:sp>
+      <p:sp>
+        <p:nvSpPr>
+          <p:cNvPr id="23" name="Shape 21"/>
+          <p:cNvSpPr/>
+          <p:nvPr/>
+        </p:nvSpPr>
+        <p:spPr>
+          <a:xfrm>
+            <a:off x="475488" y="3566160"/>
+            <a:ext cx="8193024" cy="365760"/>
           </a:xfrm>
           <a:prstGeom prst="rect">
             <a:avLst/>
           </a:prstGeom>
           <a:solidFill>
-            <a:srgbClr val="EEF0FB"/>
+            <a:srgbClr val="F5F6FC"/>
           </a:solidFill>
           <a:ln/>
         </p:spPr>
       </p:sp>
       <p:sp>
         <p:nvSpPr>
-          <p:cNvPr id="7" name="Shape 5"/>
-          <p:cNvSpPr/>
-          <p:nvPr/>
-        </p:nvSpPr>
-        <p:spPr>
-          <a:xfrm>
-            <a:off x="566928" y="3566160"/>
-            <a:ext cx="41148" cy="960120"/>
+          <p:cNvPr id="24" name="Text 22"/>
+          <p:cNvSpPr/>
+          <p:nvPr/>
+        </p:nvSpPr>
+        <p:spPr>
+          <a:xfrm>
+            <a:off x="658368" y="3566160"/>
+            <a:ext cx="1554480" cy="365760"/>
+          </a:xfrm>
+          <a:prstGeom prst="rect">
+            <a:avLst/>
+          </a:prstGeom>
+          <a:noFill/>
+          <a:ln/>
+        </p:spPr>
+        <p:txBody>
+          <a:bodyPr wrap="square" lIns="0" tIns="0" rIns="0" bIns="0" rtlCol="0" anchor="ctr"/>
+          <a:lstStyle/>
+          <a:p>
+            <a:pPr indent="0" marL="0">
+              <a:buNone/>
+            </a:pPr>
+            <a:r>
+              <a:rPr lang="en-US" sz="1150" b="1" dirty="0">
+                <a:solidFill>
+                  <a:srgbClr val="272E52"/>
+                </a:solidFill>
+                <a:latin typeface="Arial" pitchFamily="34" charset="0"/>
+                <a:ea typeface="Arial" pitchFamily="34" charset="-122"/>
+                <a:cs typeface="Arial" pitchFamily="34" charset="-120"/>
+              </a:rPr>
+              <a:t>Reserve</a:t>
+            </a:r>
+            <a:endParaRPr lang="en-US" sz="1150" dirty="0"/>
+          </a:p>
+        </p:txBody>
+      </p:sp>
+      <p:sp>
+        <p:nvSpPr>
+          <p:cNvPr id="25" name="Text 23"/>
+          <p:cNvSpPr/>
+          <p:nvPr/>
+        </p:nvSpPr>
+        <p:spPr>
+          <a:xfrm>
+            <a:off x="2395728" y="3566160"/>
+            <a:ext cx="731520" cy="365760"/>
+          </a:xfrm>
+          <a:prstGeom prst="rect">
+            <a:avLst/>
+          </a:prstGeom>
+          <a:noFill/>
+          <a:ln/>
+        </p:spPr>
+        <p:txBody>
+          <a:bodyPr wrap="square" lIns="0" tIns="0" rIns="0" bIns="0" rtlCol="0" anchor="ctr"/>
+          <a:lstStyle/>
+          <a:p>
+            <a:pPr indent="0" marL="0">
+              <a:buNone/>
+            </a:pPr>
+            <a:r>
+              <a:rPr lang="en-US" sz="1150" dirty="0">
+                <a:solidFill>
+                  <a:srgbClr val="434A63"/>
+                </a:solidFill>
+                <a:latin typeface="Arial" pitchFamily="34" charset="0"/>
+                <a:ea typeface="Arial" pitchFamily="34" charset="-122"/>
+                <a:cs typeface="Arial" pitchFamily="34" charset="-120"/>
+              </a:rPr>
+              <a:t>–</a:t>
+            </a:r>
+            <a:endParaRPr lang="en-US" sz="1150" dirty="0"/>
+          </a:p>
+        </p:txBody>
+      </p:sp>
+      <p:sp>
+        <p:nvSpPr>
+          <p:cNvPr id="26" name="Text 24"/>
+          <p:cNvSpPr/>
+          <p:nvPr/>
+        </p:nvSpPr>
+        <p:spPr>
+          <a:xfrm>
+            <a:off x="3310128" y="3566160"/>
+            <a:ext cx="5175504" cy="365760"/>
+          </a:xfrm>
+          <a:prstGeom prst="rect">
+            <a:avLst/>
+          </a:prstGeom>
+          <a:noFill/>
+          <a:ln/>
+        </p:spPr>
+        <p:txBody>
+          <a:bodyPr wrap="square" lIns="0" tIns="0" rIns="0" bIns="0" rtlCol="0" anchor="ctr"/>
+          <a:lstStyle/>
+          <a:p>
+            <a:pPr indent="0" marL="0">
+              <a:buNone/>
+            </a:pPr>
+            <a:r>
+              <a:rPr lang="en-US" sz="1150" dirty="0">
+                <a:solidFill>
+                  <a:srgbClr val="434A63"/>
+                </a:solidFill>
+                <a:latin typeface="Arial" pitchFamily="34" charset="0"/>
+                <a:ea typeface="Arial" pitchFamily="34" charset="-122"/>
+                <a:cs typeface="Arial" pitchFamily="34" charset="-120"/>
+              </a:rPr>
+              <a:t>.240 bis .255 bleiben frei – Platz zum Wachsen</a:t>
+            </a:r>
+            <a:endParaRPr lang="en-US" sz="1150" dirty="0"/>
+          </a:p>
+        </p:txBody>
+      </p:sp>
+      <p:sp>
+        <p:nvSpPr>
+          <p:cNvPr id="27" name="Shape 25"/>
+          <p:cNvSpPr/>
+          <p:nvPr/>
+        </p:nvSpPr>
+        <p:spPr>
+          <a:xfrm>
+            <a:off x="566928" y="4160520"/>
+            <a:ext cx="32004" cy="256032"/>
           </a:xfrm>
           <a:prstGeom prst="rect">
             <a:avLst/>
@@ -11890,72 +11761,30 @@
       </p:sp>
       <p:sp>
         <p:nvSpPr>
-          <p:cNvPr id="8" name="Text 6"/>
-          <p:cNvSpPr/>
-          <p:nvPr/>
-        </p:nvSpPr>
-        <p:spPr>
-          <a:xfrm>
-            <a:off x="804672" y="3712464"/>
-            <a:ext cx="7607808" cy="242062"/>
-          </a:xfrm>
-          <a:prstGeom prst="rect">
-            <a:avLst/>
-          </a:prstGeom>
-          <a:noFill/>
-          <a:ln/>
-        </p:spPr>
-        <p:txBody>
-          <a:bodyPr wrap="square" lIns="0" tIns="0" rIns="0" bIns="0" rtlCol="0" anchor="t"/>
-          <a:lstStyle/>
-          <a:p>
-            <a:pPr indent="0" marL="0">
-              <a:buNone/>
-            </a:pPr>
-            <a:r>
-              <a:rPr lang="en-US" sz="1300" b="1" dirty="0">
-                <a:solidFill>
-                  <a:srgbClr val="272E52"/>
-                </a:solidFill>
-                <a:latin typeface="Arial" pitchFamily="34" charset="0"/>
-                <a:ea typeface="Arial" pitchFamily="34" charset="-122"/>
-                <a:cs typeface="Arial" pitchFamily="34" charset="-120"/>
-              </a:rPr>
-              <a:t>Die Begriffe von heute</a:t>
-            </a:r>
-            <a:endParaRPr lang="en-US" sz="1300" dirty="0"/>
-          </a:p>
-        </p:txBody>
-      </p:sp>
-      <p:sp>
-        <p:nvSpPr>
-          <p:cNvPr id="9" name="Text 7"/>
-          <p:cNvSpPr/>
-          <p:nvPr/>
-        </p:nvSpPr>
-        <p:spPr>
-          <a:xfrm>
-            <a:off x="804672" y="4000246"/>
-            <a:ext cx="7607808" cy="407162"/>
-          </a:xfrm>
-          <a:prstGeom prst="rect">
-            <a:avLst/>
-          </a:prstGeom>
-          <a:noFill/>
-          <a:ln/>
-        </p:spPr>
-        <p:txBody>
-          <a:bodyPr wrap="square" lIns="0" tIns="0" rIns="0" bIns="0" rtlCol="0" anchor="t"/>
-          <a:lstStyle/>
-          <a:p>
-            <a:pPr indent="0" marL="0">
-              <a:lnSpc>
-                <a:spcPct val="92000"/>
-              </a:lnSpc>
-              <a:buNone/>
-            </a:pPr>
-            <a:r>
-              <a:rPr lang="en-US" sz="1100" dirty="0">
+          <p:cNvPr id="28" name="Text 26"/>
+          <p:cNvSpPr/>
+          <p:nvPr/>
+        </p:nvSpPr>
+        <p:spPr>
+          <a:xfrm>
+            <a:off x="749808" y="4114800"/>
+            <a:ext cx="7827264" cy="402336"/>
+          </a:xfrm>
+          <a:prstGeom prst="rect">
+            <a:avLst/>
+          </a:prstGeom>
+          <a:noFill/>
+          <a:ln/>
+        </p:spPr>
+        <p:txBody>
+          <a:bodyPr wrap="square" lIns="0" tIns="0" rIns="0" bIns="0" rtlCol="0" anchor="ctr"/>
+          <a:lstStyle/>
+          <a:p>
+            <a:pPr indent="0" marL="0">
+              <a:buNone/>
+            </a:pPr>
+            <a:r>
+              <a:rPr lang="en-US" sz="1200" b="1" dirty="0">
                 <a:solidFill>
                   <a:srgbClr val="434A63"/>
                 </a:solidFill>
@@ -11963,15 +11792,15 @@
                 <a:ea typeface="Arial" pitchFamily="34" charset="-122"/>
                 <a:cs typeface="Arial" pitchFamily="34" charset="-120"/>
               </a:rPr>
-              <a:t>Oktett · Maske · Präfix (CIDR) · Netzanteil, Hostanteil · Blockgröße · Netzadresse, Broadcast · RFC-1918-Bereiche · NAT · Link-local. Die Begriffe begleiten euch bis zum Schluss – im Kurs wie in der Prüfung.</a:t>
-            </a:r>
-            <a:endParaRPr lang="en-US" sz="1100" dirty="0"/>
-          </a:p>
-        </p:txBody>
-      </p:sp>
-      <p:sp>
-        <p:nvSpPr>
-          <p:cNvPr id="10" name="Shape 8"/>
+              <a:t>Größte zuerst vermeidet Lücken. Probe: 128 + 64 + 32 + 16 = 240 ≤ 256 – passt.</a:t>
+            </a:r>
+            <a:endParaRPr lang="en-US" sz="1200" dirty="0"/>
+          </a:p>
+        </p:txBody>
+      </p:sp>
+      <p:sp>
+        <p:nvSpPr>
+          <p:cNvPr id="29" name="Shape 27"/>
           <p:cNvSpPr/>
           <p:nvPr/>
         </p:nvSpPr>
@@ -11994,7 +11823,7 @@
       </p:sp>
       <p:sp>
         <p:nvSpPr>
-          <p:cNvPr id="11" name="Text 9"/>
+          <p:cNvPr id="30" name="Text 28"/>
           <p:cNvSpPr/>
           <p:nvPr/>
         </p:nvSpPr>
@@ -12025,7 +11854,7 @@
                 <a:ea typeface="Arial" pitchFamily="34" charset="-122"/>
                 <a:cs typeface="Arial" pitchFamily="34" charset="-120"/>
               </a:rPr>
-              <a:t>Abschluss</a:t>
+              <a:t>Auswertung</a:t>
             </a:r>
             <a:endParaRPr lang="en-US" sz="1050" dirty="0"/>
           </a:p>
@@ -12033,7 +11862,7 @@
       </p:sp>
       <p:sp>
         <p:nvSpPr>
-          <p:cNvPr id="12" name="Text 10"/>
+          <p:cNvPr id="31" name="Text 29"/>
           <p:cNvSpPr/>
           <p:nvPr/>
         </p:nvSpPr>
@@ -12064,7 +11893,7 @@
                 <a:ea typeface="Arial" pitchFamily="34" charset="-122"/>
                 <a:cs typeface="Arial" pitchFamily="34" charset="-120"/>
               </a:rPr>
-              <a:t>20/21</a:t>
+              <a:t>20/22</a:t>
             </a:r>
             <a:endParaRPr lang="en-US" sz="1050" dirty="0"/>
           </a:p>
@@ -12155,7 +11984,7 @@
                 <a:ea typeface="Arial" pitchFamily="34" charset="-122"/>
                 <a:cs typeface="Arial" pitchFamily="34" charset="-120"/>
               </a:rPr>
-              <a:t>NACHARBEIT</a:t>
+              <a:t>KERN DES ABENDS</a:t>
             </a:r>
             <a:endParaRPr lang="en-US" sz="1150" dirty="0"/>
           </a:p>
@@ -12194,7 +12023,7 @@
                 <a:ea typeface="Arial" pitchFamily="34" charset="-122"/>
                 <a:cs typeface="Arial" pitchFamily="34" charset="-120"/>
               </a:rPr>
-              <a:t>Bis Mittwoch</a:t>
+              <a:t>Das nehmt ihr heute mit</a:t>
             </a:r>
             <a:endParaRPr lang="en-US" sz="2600" dirty="0"/>
           </a:p>
@@ -12208,8 +12037,8 @@
         </p:nvSpPr>
         <p:spPr>
           <a:xfrm>
-            <a:off x="566928" y="1444752"/>
-            <a:ext cx="8010144" cy="438912"/>
+            <a:off x="566928" y="1691640"/>
+            <a:ext cx="8010144" cy="1828800"/>
           </a:xfrm>
           <a:prstGeom prst="rect">
             <a:avLst/>
@@ -12222,20 +12051,203 @@
           <a:lstStyle/>
           <a:p>
             <a:pPr indent="0" marL="0">
-              <a:buNone/>
-            </a:pPr>
-            <a:r>
-              <a:rPr lang="en-US" sz="1300" dirty="0">
-                <a:solidFill>
-                  <a:srgbClr val="5C6377"/>
-                </a:solidFill>
-                <a:latin typeface="Arial" pitchFamily="34" charset="0"/>
-                <a:ea typeface="Arial" pitchFamily="34" charset="-122"/>
-                <a:cs typeface="Arial" pitchFamily="34" charset="-120"/>
-              </a:rPr>
-              <a:t>Zwei Angebote, keine Pflicht – Mittwoch machen wir den Netzwerkblock fertig.</a:t>
-            </a:r>
-            <a:endParaRPr lang="en-US" sz="1300" dirty="0"/>
+              <a:lnSpc>
+                <a:spcPct val="92000"/>
+              </a:lnSpc>
+              <a:buNone/>
+            </a:pPr>
+            <a:r>
+              <a:rPr lang="en-US" sz="1350" b="1" dirty="0">
+                <a:solidFill>
+                  <a:srgbClr val="3843AF"/>
+                </a:solidFill>
+                <a:latin typeface="Arial" pitchFamily="34" charset="0"/>
+                <a:ea typeface="Arial" pitchFamily="34" charset="-122"/>
+                <a:cs typeface="Arial" pitchFamily="34" charset="-120"/>
+              </a:rPr>
+              <a:t>▸   </a:t>
+            </a:r>
+            <a:pPr indent="0" marL="0">
+              <a:lnSpc>
+                <a:spcPct val="92000"/>
+              </a:lnSpc>
+              <a:spcAft>
+                <a:spcPts val="900"/>
+              </a:spcAft>
+              <a:buNone/>
+            </a:pPr>
+            <a:r>
+              <a:rPr lang="en-US" sz="1350" b="1" dirty="0">
+                <a:solidFill>
+                  <a:srgbClr val="434A63"/>
+                </a:solidFill>
+                <a:latin typeface="Arial" pitchFamily="34" charset="0"/>
+                <a:ea typeface="Arial" pitchFamily="34" charset="-122"/>
+                <a:cs typeface="Arial" pitchFamily="34" charset="-120"/>
+              </a:rPr>
+              <a:t>Die Maske zieht die Grenze zwischen Netzanteil und Hostanteil.</a:t>
+            </a:r>
+            <a:endParaRPr lang="en-US" sz="1350" dirty="0"/>
+          </a:p>
+          <a:p>
+            <a:pPr indent="0" marL="0">
+              <a:lnSpc>
+                <a:spcPct val="92000"/>
+              </a:lnSpc>
+              <a:buNone/>
+            </a:pPr>
+            <a:r>
+              <a:rPr lang="en-US" sz="1350" b="1" dirty="0">
+                <a:solidFill>
+                  <a:srgbClr val="3843AF"/>
+                </a:solidFill>
+                <a:latin typeface="Arial" pitchFamily="34" charset="0"/>
+                <a:ea typeface="Arial" pitchFamily="34" charset="-122"/>
+                <a:cs typeface="Arial" pitchFamily="34" charset="-120"/>
+              </a:rPr>
+              <a:t>▸   </a:t>
+            </a:r>
+            <a:pPr indent="0" marL="0">
+              <a:lnSpc>
+                <a:spcPct val="92000"/>
+              </a:lnSpc>
+              <a:spcAft>
+                <a:spcPts val="900"/>
+              </a:spcAft>
+              <a:buNone/>
+            </a:pPr>
+            <a:r>
+              <a:rPr lang="en-US" sz="1350" b="1" dirty="0">
+                <a:solidFill>
+                  <a:srgbClr val="434A63"/>
+                </a:solidFill>
+                <a:latin typeface="Arial" pitchFamily="34" charset="0"/>
+                <a:ea typeface="Arial" pitchFamily="34" charset="-122"/>
+                <a:cs typeface="Arial" pitchFamily="34" charset="-120"/>
+              </a:rPr>
+              <a:t>Blockgröße = 2 hoch Hostbits. Nutzbar = Blockgröße minus zwei.</a:t>
+            </a:r>
+            <a:endParaRPr lang="en-US" sz="1350" dirty="0"/>
+          </a:p>
+          <a:p>
+            <a:pPr indent="0" marL="0">
+              <a:lnSpc>
+                <a:spcPct val="92000"/>
+              </a:lnSpc>
+              <a:buNone/>
+            </a:pPr>
+            <a:r>
+              <a:rPr lang="en-US" sz="1350" b="1" dirty="0">
+                <a:solidFill>
+                  <a:srgbClr val="3843AF"/>
+                </a:solidFill>
+                <a:latin typeface="Arial" pitchFamily="34" charset="0"/>
+                <a:ea typeface="Arial" pitchFamily="34" charset="-122"/>
+                <a:cs typeface="Arial" pitchFamily="34" charset="-120"/>
+              </a:rPr>
+              <a:t>▸   </a:t>
+            </a:r>
+            <a:pPr indent="0" marL="0">
+              <a:lnSpc>
+                <a:spcPct val="92000"/>
+              </a:lnSpc>
+              <a:spcAft>
+                <a:spcPts val="900"/>
+              </a:spcAft>
+              <a:buNone/>
+            </a:pPr>
+            <a:r>
+              <a:rPr lang="en-US" sz="1350" b="1" dirty="0">
+                <a:solidFill>
+                  <a:srgbClr val="434A63"/>
+                </a:solidFill>
+                <a:latin typeface="Arial" pitchFamily="34" charset="0"/>
+                <a:ea typeface="Arial" pitchFamily="34" charset="-122"/>
+                <a:cs typeface="Arial" pitchFamily="34" charset="-120"/>
+              </a:rPr>
+              <a:t>Netzadresse benennt das Netz, Broadcast ruft alle – beide sind reserviert.</a:t>
+            </a:r>
+            <a:endParaRPr lang="en-US" sz="1350" dirty="0"/>
+          </a:p>
+          <a:p>
+            <a:pPr indent="0" marL="0">
+              <a:lnSpc>
+                <a:spcPct val="92000"/>
+              </a:lnSpc>
+              <a:buNone/>
+            </a:pPr>
+            <a:r>
+              <a:rPr lang="en-US" sz="1350" b="1" dirty="0">
+                <a:solidFill>
+                  <a:srgbClr val="3843AF"/>
+                </a:solidFill>
+                <a:latin typeface="Arial" pitchFamily="34" charset="0"/>
+                <a:ea typeface="Arial" pitchFamily="34" charset="-122"/>
+                <a:cs typeface="Arial" pitchFamily="34" charset="-120"/>
+              </a:rPr>
+              <a:t>▸   </a:t>
+            </a:r>
+            <a:pPr indent="0" marL="0">
+              <a:lnSpc>
+                <a:spcPct val="92000"/>
+              </a:lnSpc>
+              <a:spcAft>
+                <a:spcPts val="900"/>
+              </a:spcAft>
+              <a:buNone/>
+            </a:pPr>
+            <a:r>
+              <a:rPr lang="en-US" sz="1350" b="1" dirty="0">
+                <a:solidFill>
+                  <a:srgbClr val="434A63"/>
+                </a:solidFill>
+                <a:latin typeface="Arial" pitchFamily="34" charset="0"/>
+                <a:ea typeface="Arial" pitchFamily="34" charset="-122"/>
+                <a:cs typeface="Arial" pitchFamily="34" charset="-120"/>
+              </a:rPr>
+              <a:t>Privat heißt 10er, 172.16er, 192.168er – NAT übersetzt am Router nach draußen.</a:t>
+            </a:r>
+            <a:endParaRPr lang="en-US" sz="1350" dirty="0"/>
+          </a:p>
+          <a:p>
+            <a:pPr indent="0" marL="0">
+              <a:lnSpc>
+                <a:spcPct val="92000"/>
+              </a:lnSpc>
+              <a:buNone/>
+            </a:pPr>
+            <a:r>
+              <a:rPr lang="en-US" sz="1350" b="1" dirty="0">
+                <a:solidFill>
+                  <a:srgbClr val="3843AF"/>
+                </a:solidFill>
+                <a:latin typeface="Arial" pitchFamily="34" charset="0"/>
+                <a:ea typeface="Arial" pitchFamily="34" charset="-122"/>
+                <a:cs typeface="Arial" pitchFamily="34" charset="-120"/>
+              </a:rPr>
+              <a:t>▸   </a:t>
+            </a:r>
+            <a:pPr indent="0" marL="0">
+              <a:lnSpc>
+                <a:spcPct val="92000"/>
+              </a:lnSpc>
+              <a:spcAft>
+                <a:spcPts val="900"/>
+              </a:spcAft>
+              <a:buNone/>
+            </a:pPr>
+            <a:r>
+              <a:rPr lang="en-US" sz="1350" b="1" dirty="0">
+                <a:solidFill>
+                  <a:srgbClr val="434A63"/>
+                </a:solidFill>
+                <a:latin typeface="Arial" pitchFamily="34" charset="0"/>
+                <a:ea typeface="Arial" pitchFamily="34" charset="-122"/>
+                <a:cs typeface="Arial" pitchFamily="34" charset="-120"/>
+              </a:rPr>
+              <a:t>IPv6 nimmt euch das Rechnen ab – das Netz ist fast immer ein /64.</a:t>
+            </a:r>
+            <a:endParaRPr lang="en-US" sz="1350" dirty="0"/>
           </a:p>
         </p:txBody>
       </p:sp>
@@ -12247,14 +12259,14 @@
         </p:nvSpPr>
         <p:spPr>
           <a:xfrm>
-            <a:off x="566928" y="1975104"/>
-            <a:ext cx="2523744" cy="1920240"/>
+            <a:off x="566928" y="3566160"/>
+            <a:ext cx="8010144" cy="960120"/>
           </a:xfrm>
           <a:prstGeom prst="rect">
             <a:avLst/>
           </a:prstGeom>
           <a:solidFill>
-            <a:srgbClr val="F5F6FC"/>
+            <a:srgbClr val="EEF0FB"/>
           </a:solidFill>
           <a:ln/>
         </p:spPr>
@@ -12267,8 +12279,8 @@
         </p:nvSpPr>
         <p:spPr>
           <a:xfrm>
-            <a:off x="566928" y="1975104"/>
-            <a:ext cx="41148" cy="1920240"/>
+            <a:off x="566928" y="3566160"/>
+            <a:ext cx="41148" cy="960120"/>
           </a:xfrm>
           <a:prstGeom prst="rect">
             <a:avLst/>
@@ -12287,8 +12299,8 @@
         </p:nvSpPr>
         <p:spPr>
           <a:xfrm>
-            <a:off x="804672" y="2121408"/>
-            <a:ext cx="2121408" cy="256032"/>
+            <a:off x="804672" y="3712464"/>
+            <a:ext cx="7607808" cy="242062"/>
           </a:xfrm>
           <a:prstGeom prst="rect">
             <a:avLst/>
@@ -12312,7 +12324,7 @@
                 <a:ea typeface="Arial" pitchFamily="34" charset="-122"/>
                 <a:cs typeface="Arial" pitchFamily="34" charset="-120"/>
               </a:rPr>
-              <a:t>Nachrechnen</a:t>
+              <a:t>Die Begriffe von heute</a:t>
             </a:r>
             <a:endParaRPr lang="en-US" sz="1300" dirty="0"/>
           </a:p>
@@ -12326,8 +12338,8 @@
         </p:nvSpPr>
         <p:spPr>
           <a:xfrm>
-            <a:off x="804672" y="2423160"/>
-            <a:ext cx="2121408" cy="1353312"/>
+            <a:off x="804672" y="4000246"/>
+            <a:ext cx="7607808" cy="407162"/>
           </a:xfrm>
           <a:prstGeom prst="rect">
             <a:avLst/>
@@ -12346,7 +12358,7 @@
               <a:buNone/>
             </a:pPr>
             <a:r>
-              <a:rPr lang="en-US" sz="1150" dirty="0">
+              <a:rPr lang="en-US" sz="1100" dirty="0">
                 <a:solidFill>
                   <a:srgbClr val="434A63"/>
                 </a:solidFill>
@@ -12354,316 +12366,15 @@
                 <a:ea typeface="Arial" pitchFamily="34" charset="-122"/>
                 <a:cs typeface="Arial" pitchFamily="34" charset="-120"/>
               </a:rPr>
-              <a:t>Wer heute noch gestolpert ist: Auf der Seite „Adressierung“ stehen weitere Aufgaben mit Lösungsweg – zwei davon reichen.</a:t>
-            </a:r>
-            <a:endParaRPr lang="en-US" sz="1150" dirty="0"/>
+              <a:t>Oktett · Maske · Präfix (CIDR) · Netzanteil, Hostanteil · Blockgröße · Netzadresse, Broadcast · RFC-1918-Bereiche · NAT · Link-local. Die Begriffe begleiten euch bis zum Schluss – im Kurs wie in der Prüfung.</a:t>
+            </a:r>
+            <a:endParaRPr lang="en-US" sz="1100" dirty="0"/>
           </a:p>
         </p:txBody>
       </p:sp>
       <p:sp>
         <p:nvSpPr>
           <p:cNvPr id="10" name="Shape 8"/>
-          <p:cNvSpPr/>
-          <p:nvPr/>
-        </p:nvSpPr>
-        <p:spPr>
-          <a:xfrm>
-            <a:off x="3310128" y="1975104"/>
-            <a:ext cx="2523744" cy="1920240"/>
-          </a:xfrm>
-          <a:prstGeom prst="rect">
-            <a:avLst/>
-          </a:prstGeom>
-          <a:solidFill>
-            <a:srgbClr val="F5F6FC"/>
-          </a:solidFill>
-          <a:ln/>
-        </p:spPr>
-      </p:sp>
-      <p:sp>
-        <p:nvSpPr>
-          <p:cNvPr id="11" name="Shape 9"/>
-          <p:cNvSpPr/>
-          <p:nvPr/>
-        </p:nvSpPr>
-        <p:spPr>
-          <a:xfrm>
-            <a:off x="3310128" y="1975104"/>
-            <a:ext cx="41148" cy="1920240"/>
-          </a:xfrm>
-          <a:prstGeom prst="rect">
-            <a:avLst/>
-          </a:prstGeom>
-          <a:solidFill>
-            <a:srgbClr val="3843AF"/>
-          </a:solidFill>
-          <a:ln/>
-        </p:spPr>
-      </p:sp>
-      <p:sp>
-        <p:nvSpPr>
-          <p:cNvPr id="12" name="Text 10"/>
-          <p:cNvSpPr/>
-          <p:nvPr/>
-        </p:nvSpPr>
-        <p:spPr>
-          <a:xfrm>
-            <a:off x="3547872" y="2121408"/>
-            <a:ext cx="2121408" cy="256032"/>
-          </a:xfrm>
-          <a:prstGeom prst="rect">
-            <a:avLst/>
-          </a:prstGeom>
-          <a:noFill/>
-          <a:ln/>
-        </p:spPr>
-        <p:txBody>
-          <a:bodyPr wrap="square" lIns="0" tIns="0" rIns="0" bIns="0" rtlCol="0" anchor="t"/>
-          <a:lstStyle/>
-          <a:p>
-            <a:pPr indent="0" marL="0">
-              <a:buNone/>
-            </a:pPr>
-            <a:r>
-              <a:rPr lang="en-US" sz="1300" b="1" dirty="0">
-                <a:solidFill>
-                  <a:srgbClr val="272E52"/>
-                </a:solidFill>
-                <a:latin typeface="Arial" pitchFamily="34" charset="0"/>
-                <a:ea typeface="Arial" pitchFamily="34" charset="-122"/>
-                <a:cs typeface="Arial" pitchFamily="34" charset="-120"/>
-              </a:rPr>
-              <a:t>Weiterlesen</a:t>
-            </a:r>
-            <a:endParaRPr lang="en-US" sz="1300" dirty="0"/>
-          </a:p>
-        </p:txBody>
-      </p:sp>
-      <p:sp>
-        <p:nvSpPr>
-          <p:cNvPr id="13" name="Text 11"/>
-          <p:cNvSpPr/>
-          <p:nvPr/>
-        </p:nvSpPr>
-        <p:spPr>
-          <a:xfrm>
-            <a:off x="3547872" y="2423160"/>
-            <a:ext cx="2121408" cy="1353312"/>
-          </a:xfrm>
-          <a:prstGeom prst="rect">
-            <a:avLst/>
-          </a:prstGeom>
-          <a:noFill/>
-          <a:ln/>
-        </p:spPr>
-        <p:txBody>
-          <a:bodyPr wrap="square" lIns="0" tIns="0" rIns="0" bIns="0" rtlCol="0" anchor="t"/>
-          <a:lstStyle/>
-          <a:p>
-            <a:pPr indent="0" marL="0">
-              <a:lnSpc>
-                <a:spcPct val="92000"/>
-              </a:lnSpc>
-              <a:buNone/>
-            </a:pPr>
-            <a:r>
-              <a:rPr lang="en-US" sz="1150" dirty="0">
-                <a:solidFill>
-                  <a:srgbClr val="434A63"/>
-                </a:solidFill>
-                <a:latin typeface="Arial" pitchFamily="34" charset="0"/>
-                <a:ea typeface="Arial" pitchFamily="34" charset="-122"/>
-                <a:cs typeface="Arial" pitchFamily="34" charset="-120"/>
-              </a:rPr>
-              <a:t>Wer wissen will, wie der Weg eines Aufrufs wirklich aussieht: „Praxis: github.com – die Spurensuche“ auf der Kursseite.</a:t>
-            </a:r>
-            <a:endParaRPr lang="en-US" sz="1150" dirty="0"/>
-          </a:p>
-        </p:txBody>
-      </p:sp>
-      <p:sp>
-        <p:nvSpPr>
-          <p:cNvPr id="14" name="Shape 12"/>
-          <p:cNvSpPr/>
-          <p:nvPr/>
-        </p:nvSpPr>
-        <p:spPr>
-          <a:xfrm>
-            <a:off x="6053328" y="1975104"/>
-            <a:ext cx="2523744" cy="1920240"/>
-          </a:xfrm>
-          <a:prstGeom prst="rect">
-            <a:avLst/>
-          </a:prstGeom>
-          <a:solidFill>
-            <a:srgbClr val="F5F6FC"/>
-          </a:solidFill>
-          <a:ln/>
-        </p:spPr>
-      </p:sp>
-      <p:sp>
-        <p:nvSpPr>
-          <p:cNvPr id="15" name="Shape 13"/>
-          <p:cNvSpPr/>
-          <p:nvPr/>
-        </p:nvSpPr>
-        <p:spPr>
-          <a:xfrm>
-            <a:off x="6053328" y="1975104"/>
-            <a:ext cx="41148" cy="1920240"/>
-          </a:xfrm>
-          <a:prstGeom prst="rect">
-            <a:avLst/>
-          </a:prstGeom>
-          <a:solidFill>
-            <a:srgbClr val="3843AF"/>
-          </a:solidFill>
-          <a:ln/>
-        </p:spPr>
-      </p:sp>
-      <p:sp>
-        <p:nvSpPr>
-          <p:cNvPr id="16" name="Text 14"/>
-          <p:cNvSpPr/>
-          <p:nvPr/>
-        </p:nvSpPr>
-        <p:spPr>
-          <a:xfrm>
-            <a:off x="6291072" y="2121408"/>
-            <a:ext cx="2121408" cy="256032"/>
-          </a:xfrm>
-          <a:prstGeom prst="rect">
-            <a:avLst/>
-          </a:prstGeom>
-          <a:noFill/>
-          <a:ln/>
-        </p:spPr>
-        <p:txBody>
-          <a:bodyPr wrap="square" lIns="0" tIns="0" rIns="0" bIns="0" rtlCol="0" anchor="t"/>
-          <a:lstStyle/>
-          <a:p>
-            <a:pPr indent="0" marL="0">
-              <a:buNone/>
-            </a:pPr>
-            <a:r>
-              <a:rPr lang="en-US" sz="1300" b="1" dirty="0">
-                <a:solidFill>
-                  <a:srgbClr val="272E52"/>
-                </a:solidFill>
-                <a:latin typeface="Arial" pitchFamily="34" charset="0"/>
-                <a:ea typeface="Arial" pitchFamily="34" charset="-122"/>
-                <a:cs typeface="Arial" pitchFamily="34" charset="-120"/>
-              </a:rPr>
-              <a:t>Mittwoch</a:t>
-            </a:r>
-            <a:endParaRPr lang="en-US" sz="1300" dirty="0"/>
-          </a:p>
-        </p:txBody>
-      </p:sp>
-      <p:sp>
-        <p:nvSpPr>
-          <p:cNvPr id="17" name="Text 15"/>
-          <p:cNvSpPr/>
-          <p:nvPr/>
-        </p:nvSpPr>
-        <p:spPr>
-          <a:xfrm>
-            <a:off x="6291072" y="2423160"/>
-            <a:ext cx="2121408" cy="1353312"/>
-          </a:xfrm>
-          <a:prstGeom prst="rect">
-            <a:avLst/>
-          </a:prstGeom>
-          <a:noFill/>
-          <a:ln/>
-        </p:spPr>
-        <p:txBody>
-          <a:bodyPr wrap="square" lIns="0" tIns="0" rIns="0" bIns="0" rtlCol="0" anchor="t"/>
-          <a:lstStyle/>
-          <a:p>
-            <a:pPr indent="0" marL="0">
-              <a:lnSpc>
-                <a:spcPct val="92000"/>
-              </a:lnSpc>
-              <a:buNone/>
-            </a:pPr>
-            <a:r>
-              <a:rPr lang="en-US" sz="1150" dirty="0">
-                <a:solidFill>
-                  <a:srgbClr val="434A63"/>
-                </a:solidFill>
-                <a:latin typeface="Arial" pitchFamily="34" charset="0"/>
-                <a:ea typeface="Arial" pitchFamily="34" charset="-122"/>
-                <a:cs typeface="Arial" pitchFamily="34" charset="-120"/>
-              </a:rPr>
-              <a:t>Routing, VLAN und Netzwerksicherheit kompakt – und zum Abschluss lösen wir die Leitfrage vom ersten Abend ein.</a:t>
-            </a:r>
-            <a:endParaRPr lang="en-US" sz="1150" dirty="0"/>
-          </a:p>
-        </p:txBody>
-      </p:sp>
-      <p:sp>
-        <p:nvSpPr>
-          <p:cNvPr id="18" name="Shape 16"/>
-          <p:cNvSpPr/>
-          <p:nvPr/>
-        </p:nvSpPr>
-        <p:spPr>
-          <a:xfrm>
-            <a:off x="566928" y="4160520"/>
-            <a:ext cx="32004" cy="256032"/>
-          </a:xfrm>
-          <a:prstGeom prst="rect">
-            <a:avLst/>
-          </a:prstGeom>
-          <a:solidFill>
-            <a:srgbClr val="3843AF"/>
-          </a:solidFill>
-          <a:ln/>
-        </p:spPr>
-      </p:sp>
-      <p:sp>
-        <p:nvSpPr>
-          <p:cNvPr id="19" name="Text 17"/>
-          <p:cNvSpPr/>
-          <p:nvPr/>
-        </p:nvSpPr>
-        <p:spPr>
-          <a:xfrm>
-            <a:off x="749808" y="4114800"/>
-            <a:ext cx="7827264" cy="402336"/>
-          </a:xfrm>
-          <a:prstGeom prst="rect">
-            <a:avLst/>
-          </a:prstGeom>
-          <a:noFill/>
-          <a:ln/>
-        </p:spPr>
-        <p:txBody>
-          <a:bodyPr wrap="square" lIns="0" tIns="0" rIns="0" bIns="0" rtlCol="0" anchor="ctr"/>
-          <a:lstStyle/>
-          <a:p>
-            <a:pPr indent="0" marL="0">
-              <a:buNone/>
-            </a:pPr>
-            <a:r>
-              <a:rPr lang="en-US" sz="1200" b="1" dirty="0">
-                <a:solidFill>
-                  <a:srgbClr val="434A63"/>
-                </a:solidFill>
-                <a:latin typeface="Arial" pitchFamily="34" charset="0"/>
-                <a:ea typeface="Arial" pitchFamily="34" charset="-122"/>
-                <a:cs typeface="Arial" pitchFamily="34" charset="-120"/>
-              </a:rPr>
-              <a:t>Nächster Termin: Mittwoch, 2. September, 18:00 Uhr – das Finale des Netzwerkblocks.</a:t>
-            </a:r>
-            <a:endParaRPr lang="en-US" sz="1200" dirty="0"/>
-          </a:p>
-        </p:txBody>
-      </p:sp>
-      <p:sp>
-        <p:nvSpPr>
-          <p:cNvPr id="20" name="Shape 18"/>
           <p:cNvSpPr/>
           <p:nvPr/>
         </p:nvSpPr>
@@ -12686,7 +12397,7 @@
       </p:sp>
       <p:sp>
         <p:nvSpPr>
-          <p:cNvPr id="21" name="Text 19"/>
+          <p:cNvPr id="11" name="Text 9"/>
           <p:cNvSpPr/>
           <p:nvPr/>
         </p:nvSpPr>
@@ -12725,7 +12436,7 @@
       </p:sp>
       <p:sp>
         <p:nvSpPr>
-          <p:cNvPr id="22" name="Text 20"/>
+          <p:cNvPr id="12" name="Text 10"/>
           <p:cNvSpPr/>
           <p:nvPr/>
         </p:nvSpPr>
@@ -12756,7 +12467,7 @@
                 <a:ea typeface="Arial" pitchFamily="34" charset="-122"/>
                 <a:cs typeface="Arial" pitchFamily="34" charset="-120"/>
               </a:rPr>
-              <a:t>21/21</a:t>
+              <a:t>21/22</a:t>
             </a:r>
             <a:endParaRPr lang="en-US" sz="1050" dirty="0"/>
           </a:p>
@@ -12773,6 +12484,698 @@
 <file path=ppt/slides/slide28.xml><?xml version="1.0" encoding="utf-8"?>
 <p:sld xmlns:a="http://schemas.openxmlformats.org/drawingml/2006/main" xmlns:r="http://schemas.openxmlformats.org/officeDocument/2006/relationships" xmlns:p="http://schemas.openxmlformats.org/presentationml/2006/main">
   <p:cSld name="Slide 28">
+    <p:bg>
+      <p:bgPr>
+        <a:solidFill>
+          <a:srgbClr val="FFFFFF"/>
+        </a:solidFill>
+      </p:bgPr>
+    </p:bg>
+    <p:spTree>
+      <p:nvGrpSpPr>
+        <p:cNvPr id="1" name=""/>
+        <p:cNvGrpSpPr/>
+        <p:nvPr/>
+      </p:nvGrpSpPr>
+      <p:grpSpPr>
+        <a:xfrm>
+          <a:off x="0" y="0"/>
+          <a:ext cx="0" cy="0"/>
+          <a:chOff x="0" y="0"/>
+          <a:chExt cx="0" cy="0"/>
+        </a:xfrm>
+      </p:grpSpPr>
+      <p:sp>
+        <p:nvSpPr>
+          <p:cNvPr id="2" name="Shape 0"/>
+          <p:cNvSpPr/>
+          <p:nvPr/>
+        </p:nvSpPr>
+        <p:spPr>
+          <a:xfrm>
+            <a:off x="566928" y="201168"/>
+            <a:ext cx="475488" cy="50292"/>
+          </a:xfrm>
+          <a:prstGeom prst="rect">
+            <a:avLst/>
+          </a:prstGeom>
+          <a:solidFill>
+            <a:srgbClr val="3843AF"/>
+          </a:solidFill>
+          <a:ln/>
+        </p:spPr>
+      </p:sp>
+      <p:sp>
+        <p:nvSpPr>
+          <p:cNvPr id="3" name="Text 1"/>
+          <p:cNvSpPr/>
+          <p:nvPr/>
+        </p:nvSpPr>
+        <p:spPr>
+          <a:xfrm>
+            <a:off x="566928" y="384048"/>
+            <a:ext cx="8010144" cy="237744"/>
+          </a:xfrm>
+          <a:prstGeom prst="rect">
+            <a:avLst/>
+          </a:prstGeom>
+          <a:noFill/>
+          <a:ln/>
+        </p:spPr>
+        <p:txBody>
+          <a:bodyPr wrap="square" lIns="0" tIns="0" rIns="0" bIns="0" rtlCol="0" anchor="ctr"/>
+          <a:lstStyle/>
+          <a:p>
+            <a:pPr indent="0" marL="0">
+              <a:buNone/>
+            </a:pPr>
+            <a:r>
+              <a:rPr lang="en-US" sz="1150" b="1" spc="180" kern="0" dirty="0">
+                <a:solidFill>
+                  <a:srgbClr val="3843AF"/>
+                </a:solidFill>
+                <a:latin typeface="Arial" pitchFamily="34" charset="0"/>
+                <a:ea typeface="Arial" pitchFamily="34" charset="-122"/>
+                <a:cs typeface="Arial" pitchFamily="34" charset="-120"/>
+              </a:rPr>
+              <a:t>NACHARBEIT</a:t>
+            </a:r>
+            <a:endParaRPr lang="en-US" sz="1150" dirty="0"/>
+          </a:p>
+        </p:txBody>
+      </p:sp>
+      <p:sp>
+        <p:nvSpPr>
+          <p:cNvPr id="4" name="Text 2"/>
+          <p:cNvSpPr/>
+          <p:nvPr/>
+        </p:nvSpPr>
+        <p:spPr>
+          <a:xfrm>
+            <a:off x="566928" y="731520"/>
+            <a:ext cx="8010144" cy="603504"/>
+          </a:xfrm>
+          <a:prstGeom prst="rect">
+            <a:avLst/>
+          </a:prstGeom>
+          <a:noFill/>
+          <a:ln/>
+        </p:spPr>
+        <p:txBody>
+          <a:bodyPr wrap="square" lIns="0" tIns="0" rIns="0" bIns="0" rtlCol="0" anchor="t"/>
+          <a:lstStyle/>
+          <a:p>
+            <a:pPr indent="0" marL="0">
+              <a:buNone/>
+            </a:pPr>
+            <a:r>
+              <a:rPr lang="en-US" sz="2600" b="1" dirty="0">
+                <a:solidFill>
+                  <a:srgbClr val="272E52"/>
+                </a:solidFill>
+                <a:latin typeface="Arial" pitchFamily="34" charset="0"/>
+                <a:ea typeface="Arial" pitchFamily="34" charset="-122"/>
+                <a:cs typeface="Arial" pitchFamily="34" charset="-120"/>
+              </a:rPr>
+              <a:t>Bis Mittwoch</a:t>
+            </a:r>
+            <a:endParaRPr lang="en-US" sz="2600" dirty="0"/>
+          </a:p>
+        </p:txBody>
+      </p:sp>
+      <p:sp>
+        <p:nvSpPr>
+          <p:cNvPr id="5" name="Text 3"/>
+          <p:cNvSpPr/>
+          <p:nvPr/>
+        </p:nvSpPr>
+        <p:spPr>
+          <a:xfrm>
+            <a:off x="566928" y="1444752"/>
+            <a:ext cx="8010144" cy="438912"/>
+          </a:xfrm>
+          <a:prstGeom prst="rect">
+            <a:avLst/>
+          </a:prstGeom>
+          <a:noFill/>
+          <a:ln/>
+        </p:spPr>
+        <p:txBody>
+          <a:bodyPr wrap="square" lIns="0" tIns="0" rIns="0" bIns="0" rtlCol="0" anchor="t"/>
+          <a:lstStyle/>
+          <a:p>
+            <a:pPr indent="0" marL="0">
+              <a:buNone/>
+            </a:pPr>
+            <a:r>
+              <a:rPr lang="en-US" sz="1300" dirty="0">
+                <a:solidFill>
+                  <a:srgbClr val="5C6377"/>
+                </a:solidFill>
+                <a:latin typeface="Arial" pitchFamily="34" charset="0"/>
+                <a:ea typeface="Arial" pitchFamily="34" charset="-122"/>
+                <a:cs typeface="Arial" pitchFamily="34" charset="-120"/>
+              </a:rPr>
+              <a:t>Zwei Angebote, keine Pflicht – Mittwoch machen wir den Netzwerkblock fertig.</a:t>
+            </a:r>
+            <a:endParaRPr lang="en-US" sz="1300" dirty="0"/>
+          </a:p>
+        </p:txBody>
+      </p:sp>
+      <p:sp>
+        <p:nvSpPr>
+          <p:cNvPr id="6" name="Shape 4"/>
+          <p:cNvSpPr/>
+          <p:nvPr/>
+        </p:nvSpPr>
+        <p:spPr>
+          <a:xfrm>
+            <a:off x="566928" y="1975104"/>
+            <a:ext cx="2523744" cy="1920240"/>
+          </a:xfrm>
+          <a:prstGeom prst="rect">
+            <a:avLst/>
+          </a:prstGeom>
+          <a:solidFill>
+            <a:srgbClr val="F5F6FC"/>
+          </a:solidFill>
+          <a:ln/>
+        </p:spPr>
+      </p:sp>
+      <p:sp>
+        <p:nvSpPr>
+          <p:cNvPr id="7" name="Shape 5"/>
+          <p:cNvSpPr/>
+          <p:nvPr/>
+        </p:nvSpPr>
+        <p:spPr>
+          <a:xfrm>
+            <a:off x="566928" y="1975104"/>
+            <a:ext cx="41148" cy="1920240"/>
+          </a:xfrm>
+          <a:prstGeom prst="rect">
+            <a:avLst/>
+          </a:prstGeom>
+          <a:solidFill>
+            <a:srgbClr val="3843AF"/>
+          </a:solidFill>
+          <a:ln/>
+        </p:spPr>
+      </p:sp>
+      <p:sp>
+        <p:nvSpPr>
+          <p:cNvPr id="8" name="Text 6"/>
+          <p:cNvSpPr/>
+          <p:nvPr/>
+        </p:nvSpPr>
+        <p:spPr>
+          <a:xfrm>
+            <a:off x="804672" y="2121408"/>
+            <a:ext cx="2121408" cy="256032"/>
+          </a:xfrm>
+          <a:prstGeom prst="rect">
+            <a:avLst/>
+          </a:prstGeom>
+          <a:noFill/>
+          <a:ln/>
+        </p:spPr>
+        <p:txBody>
+          <a:bodyPr wrap="square" lIns="0" tIns="0" rIns="0" bIns="0" rtlCol="0" anchor="t"/>
+          <a:lstStyle/>
+          <a:p>
+            <a:pPr indent="0" marL="0">
+              <a:buNone/>
+            </a:pPr>
+            <a:r>
+              <a:rPr lang="en-US" sz="1300" b="1" dirty="0">
+                <a:solidFill>
+                  <a:srgbClr val="272E52"/>
+                </a:solidFill>
+                <a:latin typeface="Arial" pitchFamily="34" charset="0"/>
+                <a:ea typeface="Arial" pitchFamily="34" charset="-122"/>
+                <a:cs typeface="Arial" pitchFamily="34" charset="-120"/>
+              </a:rPr>
+              <a:t>Nachrechnen</a:t>
+            </a:r>
+            <a:endParaRPr lang="en-US" sz="1300" dirty="0"/>
+          </a:p>
+        </p:txBody>
+      </p:sp>
+      <p:sp>
+        <p:nvSpPr>
+          <p:cNvPr id="9" name="Text 7"/>
+          <p:cNvSpPr/>
+          <p:nvPr/>
+        </p:nvSpPr>
+        <p:spPr>
+          <a:xfrm>
+            <a:off x="804672" y="2423160"/>
+            <a:ext cx="2121408" cy="1353312"/>
+          </a:xfrm>
+          <a:prstGeom prst="rect">
+            <a:avLst/>
+          </a:prstGeom>
+          <a:noFill/>
+          <a:ln/>
+        </p:spPr>
+        <p:txBody>
+          <a:bodyPr wrap="square" lIns="0" tIns="0" rIns="0" bIns="0" rtlCol="0" anchor="t"/>
+          <a:lstStyle/>
+          <a:p>
+            <a:pPr indent="0" marL="0">
+              <a:lnSpc>
+                <a:spcPct val="92000"/>
+              </a:lnSpc>
+              <a:buNone/>
+            </a:pPr>
+            <a:r>
+              <a:rPr lang="en-US" sz="1150" dirty="0">
+                <a:solidFill>
+                  <a:srgbClr val="434A63"/>
+                </a:solidFill>
+                <a:latin typeface="Arial" pitchFamily="34" charset="0"/>
+                <a:ea typeface="Arial" pitchFamily="34" charset="-122"/>
+                <a:cs typeface="Arial" pitchFamily="34" charset="-120"/>
+              </a:rPr>
+              <a:t>Wer heute noch gestolpert ist: Auf der Seite „Adressierung“ stehen weitere Aufgaben mit Lösungsweg – zwei davon reichen.</a:t>
+            </a:r>
+            <a:endParaRPr lang="en-US" sz="1150" dirty="0"/>
+          </a:p>
+        </p:txBody>
+      </p:sp>
+      <p:sp>
+        <p:nvSpPr>
+          <p:cNvPr id="10" name="Shape 8"/>
+          <p:cNvSpPr/>
+          <p:nvPr/>
+        </p:nvSpPr>
+        <p:spPr>
+          <a:xfrm>
+            <a:off x="3310128" y="1975104"/>
+            <a:ext cx="2523744" cy="1920240"/>
+          </a:xfrm>
+          <a:prstGeom prst="rect">
+            <a:avLst/>
+          </a:prstGeom>
+          <a:solidFill>
+            <a:srgbClr val="F5F6FC"/>
+          </a:solidFill>
+          <a:ln/>
+        </p:spPr>
+      </p:sp>
+      <p:sp>
+        <p:nvSpPr>
+          <p:cNvPr id="11" name="Shape 9"/>
+          <p:cNvSpPr/>
+          <p:nvPr/>
+        </p:nvSpPr>
+        <p:spPr>
+          <a:xfrm>
+            <a:off x="3310128" y="1975104"/>
+            <a:ext cx="41148" cy="1920240"/>
+          </a:xfrm>
+          <a:prstGeom prst="rect">
+            <a:avLst/>
+          </a:prstGeom>
+          <a:solidFill>
+            <a:srgbClr val="3843AF"/>
+          </a:solidFill>
+          <a:ln/>
+        </p:spPr>
+      </p:sp>
+      <p:sp>
+        <p:nvSpPr>
+          <p:cNvPr id="12" name="Text 10"/>
+          <p:cNvSpPr/>
+          <p:nvPr/>
+        </p:nvSpPr>
+        <p:spPr>
+          <a:xfrm>
+            <a:off x="3547872" y="2121408"/>
+            <a:ext cx="2121408" cy="256032"/>
+          </a:xfrm>
+          <a:prstGeom prst="rect">
+            <a:avLst/>
+          </a:prstGeom>
+          <a:noFill/>
+          <a:ln/>
+        </p:spPr>
+        <p:txBody>
+          <a:bodyPr wrap="square" lIns="0" tIns="0" rIns="0" bIns="0" rtlCol="0" anchor="t"/>
+          <a:lstStyle/>
+          <a:p>
+            <a:pPr indent="0" marL="0">
+              <a:buNone/>
+            </a:pPr>
+            <a:r>
+              <a:rPr lang="en-US" sz="1300" b="1" dirty="0">
+                <a:solidFill>
+                  <a:srgbClr val="272E52"/>
+                </a:solidFill>
+                <a:latin typeface="Arial" pitchFamily="34" charset="0"/>
+                <a:ea typeface="Arial" pitchFamily="34" charset="-122"/>
+                <a:cs typeface="Arial" pitchFamily="34" charset="-120"/>
+              </a:rPr>
+              <a:t>Weiterlesen</a:t>
+            </a:r>
+            <a:endParaRPr lang="en-US" sz="1300" dirty="0"/>
+          </a:p>
+        </p:txBody>
+      </p:sp>
+      <p:sp>
+        <p:nvSpPr>
+          <p:cNvPr id="13" name="Text 11"/>
+          <p:cNvSpPr/>
+          <p:nvPr/>
+        </p:nvSpPr>
+        <p:spPr>
+          <a:xfrm>
+            <a:off x="3547872" y="2423160"/>
+            <a:ext cx="2121408" cy="1353312"/>
+          </a:xfrm>
+          <a:prstGeom prst="rect">
+            <a:avLst/>
+          </a:prstGeom>
+          <a:noFill/>
+          <a:ln/>
+        </p:spPr>
+        <p:txBody>
+          <a:bodyPr wrap="square" lIns="0" tIns="0" rIns="0" bIns="0" rtlCol="0" anchor="t"/>
+          <a:lstStyle/>
+          <a:p>
+            <a:pPr indent="0" marL="0">
+              <a:lnSpc>
+                <a:spcPct val="92000"/>
+              </a:lnSpc>
+              <a:buNone/>
+            </a:pPr>
+            <a:r>
+              <a:rPr lang="en-US" sz="1150" dirty="0">
+                <a:solidFill>
+                  <a:srgbClr val="434A63"/>
+                </a:solidFill>
+                <a:latin typeface="Arial" pitchFamily="34" charset="0"/>
+                <a:ea typeface="Arial" pitchFamily="34" charset="-122"/>
+                <a:cs typeface="Arial" pitchFamily="34" charset="-120"/>
+              </a:rPr>
+              <a:t>Wer wissen will, wie der Weg eines Aufrufs wirklich aussieht: „Praxis: github.com – die Spurensuche“ auf der Kursseite.</a:t>
+            </a:r>
+            <a:endParaRPr lang="en-US" sz="1150" dirty="0"/>
+          </a:p>
+        </p:txBody>
+      </p:sp>
+      <p:sp>
+        <p:nvSpPr>
+          <p:cNvPr id="14" name="Shape 12"/>
+          <p:cNvSpPr/>
+          <p:nvPr/>
+        </p:nvSpPr>
+        <p:spPr>
+          <a:xfrm>
+            <a:off x="6053328" y="1975104"/>
+            <a:ext cx="2523744" cy="1920240"/>
+          </a:xfrm>
+          <a:prstGeom prst="rect">
+            <a:avLst/>
+          </a:prstGeom>
+          <a:solidFill>
+            <a:srgbClr val="F5F6FC"/>
+          </a:solidFill>
+          <a:ln/>
+        </p:spPr>
+      </p:sp>
+      <p:sp>
+        <p:nvSpPr>
+          <p:cNvPr id="15" name="Shape 13"/>
+          <p:cNvSpPr/>
+          <p:nvPr/>
+        </p:nvSpPr>
+        <p:spPr>
+          <a:xfrm>
+            <a:off x="6053328" y="1975104"/>
+            <a:ext cx="41148" cy="1920240"/>
+          </a:xfrm>
+          <a:prstGeom prst="rect">
+            <a:avLst/>
+          </a:prstGeom>
+          <a:solidFill>
+            <a:srgbClr val="3843AF"/>
+          </a:solidFill>
+          <a:ln/>
+        </p:spPr>
+      </p:sp>
+      <p:sp>
+        <p:nvSpPr>
+          <p:cNvPr id="16" name="Text 14"/>
+          <p:cNvSpPr/>
+          <p:nvPr/>
+        </p:nvSpPr>
+        <p:spPr>
+          <a:xfrm>
+            <a:off x="6291072" y="2121408"/>
+            <a:ext cx="2121408" cy="256032"/>
+          </a:xfrm>
+          <a:prstGeom prst="rect">
+            <a:avLst/>
+          </a:prstGeom>
+          <a:noFill/>
+          <a:ln/>
+        </p:spPr>
+        <p:txBody>
+          <a:bodyPr wrap="square" lIns="0" tIns="0" rIns="0" bIns="0" rtlCol="0" anchor="t"/>
+          <a:lstStyle/>
+          <a:p>
+            <a:pPr indent="0" marL="0">
+              <a:buNone/>
+            </a:pPr>
+            <a:r>
+              <a:rPr lang="en-US" sz="1300" b="1" dirty="0">
+                <a:solidFill>
+                  <a:srgbClr val="272E52"/>
+                </a:solidFill>
+                <a:latin typeface="Arial" pitchFamily="34" charset="0"/>
+                <a:ea typeface="Arial" pitchFamily="34" charset="-122"/>
+                <a:cs typeface="Arial" pitchFamily="34" charset="-120"/>
+              </a:rPr>
+              <a:t>Mittwoch</a:t>
+            </a:r>
+            <a:endParaRPr lang="en-US" sz="1300" dirty="0"/>
+          </a:p>
+        </p:txBody>
+      </p:sp>
+      <p:sp>
+        <p:nvSpPr>
+          <p:cNvPr id="17" name="Text 15"/>
+          <p:cNvSpPr/>
+          <p:nvPr/>
+        </p:nvSpPr>
+        <p:spPr>
+          <a:xfrm>
+            <a:off x="6291072" y="2423160"/>
+            <a:ext cx="2121408" cy="1353312"/>
+          </a:xfrm>
+          <a:prstGeom prst="rect">
+            <a:avLst/>
+          </a:prstGeom>
+          <a:noFill/>
+          <a:ln/>
+        </p:spPr>
+        <p:txBody>
+          <a:bodyPr wrap="square" lIns="0" tIns="0" rIns="0" bIns="0" rtlCol="0" anchor="t"/>
+          <a:lstStyle/>
+          <a:p>
+            <a:pPr indent="0" marL="0">
+              <a:lnSpc>
+                <a:spcPct val="92000"/>
+              </a:lnSpc>
+              <a:buNone/>
+            </a:pPr>
+            <a:r>
+              <a:rPr lang="en-US" sz="1150" dirty="0">
+                <a:solidFill>
+                  <a:srgbClr val="434A63"/>
+                </a:solidFill>
+                <a:latin typeface="Arial" pitchFamily="34" charset="0"/>
+                <a:ea typeface="Arial" pitchFamily="34" charset="-122"/>
+                <a:cs typeface="Arial" pitchFamily="34" charset="-120"/>
+              </a:rPr>
+              <a:t>Routing, VLAN und Netzwerksicherheit kompakt – und zum Abschluss lösen wir die Leitfrage vom ersten Abend ein.</a:t>
+            </a:r>
+            <a:endParaRPr lang="en-US" sz="1150" dirty="0"/>
+          </a:p>
+        </p:txBody>
+      </p:sp>
+      <p:sp>
+        <p:nvSpPr>
+          <p:cNvPr id="18" name="Shape 16"/>
+          <p:cNvSpPr/>
+          <p:nvPr/>
+        </p:nvSpPr>
+        <p:spPr>
+          <a:xfrm>
+            <a:off x="566928" y="4160520"/>
+            <a:ext cx="32004" cy="256032"/>
+          </a:xfrm>
+          <a:prstGeom prst="rect">
+            <a:avLst/>
+          </a:prstGeom>
+          <a:solidFill>
+            <a:srgbClr val="3843AF"/>
+          </a:solidFill>
+          <a:ln/>
+        </p:spPr>
+      </p:sp>
+      <p:sp>
+        <p:nvSpPr>
+          <p:cNvPr id="19" name="Text 17"/>
+          <p:cNvSpPr/>
+          <p:nvPr/>
+        </p:nvSpPr>
+        <p:spPr>
+          <a:xfrm>
+            <a:off x="749808" y="4114800"/>
+            <a:ext cx="7827264" cy="402336"/>
+          </a:xfrm>
+          <a:prstGeom prst="rect">
+            <a:avLst/>
+          </a:prstGeom>
+          <a:noFill/>
+          <a:ln/>
+        </p:spPr>
+        <p:txBody>
+          <a:bodyPr wrap="square" lIns="0" tIns="0" rIns="0" bIns="0" rtlCol="0" anchor="ctr"/>
+          <a:lstStyle/>
+          <a:p>
+            <a:pPr indent="0" marL="0">
+              <a:buNone/>
+            </a:pPr>
+            <a:r>
+              <a:rPr lang="en-US" sz="1200" b="1" dirty="0">
+                <a:solidFill>
+                  <a:srgbClr val="434A63"/>
+                </a:solidFill>
+                <a:latin typeface="Arial" pitchFamily="34" charset="0"/>
+                <a:ea typeface="Arial" pitchFamily="34" charset="-122"/>
+                <a:cs typeface="Arial" pitchFamily="34" charset="-120"/>
+              </a:rPr>
+              <a:t>Nächster Termin: Mittwoch, 2. September, 18:00 Uhr – das Finale des Netzwerkblocks.</a:t>
+            </a:r>
+            <a:endParaRPr lang="en-US" sz="1200" dirty="0"/>
+          </a:p>
+        </p:txBody>
+      </p:sp>
+      <p:sp>
+        <p:nvSpPr>
+          <p:cNvPr id="20" name="Shape 18"/>
+          <p:cNvSpPr/>
+          <p:nvPr/>
+        </p:nvSpPr>
+        <p:spPr>
+          <a:xfrm>
+            <a:off x="566928" y="4631436"/>
+            <a:ext cx="8010144" cy="0"/>
+          </a:xfrm>
+          <a:prstGeom prst="line">
+            <a:avLst/>
+          </a:prstGeom>
+          <a:noFill/>
+          <a:ln w="9525">
+            <a:solidFill>
+              <a:srgbClr val="DFE3F0"/>
+            </a:solidFill>
+            <a:prstDash val="solid"/>
+          </a:ln>
+        </p:spPr>
+      </p:sp>
+      <p:sp>
+        <p:nvSpPr>
+          <p:cNvPr id="21" name="Text 19"/>
+          <p:cNvSpPr/>
+          <p:nvPr/>
+        </p:nvSpPr>
+        <p:spPr>
+          <a:xfrm>
+            <a:off x="566928" y="4722876"/>
+            <a:ext cx="5029200" cy="237744"/>
+          </a:xfrm>
+          <a:prstGeom prst="rect">
+            <a:avLst/>
+          </a:prstGeom>
+          <a:noFill/>
+          <a:ln/>
+        </p:spPr>
+        <p:txBody>
+          <a:bodyPr wrap="square" lIns="0" tIns="0" rIns="0" bIns="0" rtlCol="0" anchor="ctr"/>
+          <a:lstStyle/>
+          <a:p>
+            <a:pPr indent="0" marL="0">
+              <a:buNone/>
+            </a:pPr>
+            <a:r>
+              <a:rPr lang="en-US" sz="1050" spc="30" kern="0" dirty="0">
+                <a:solidFill>
+                  <a:srgbClr val="5C6377"/>
+                </a:solidFill>
+                <a:latin typeface="Arial" pitchFamily="34" charset="0"/>
+                <a:ea typeface="Arial" pitchFamily="34" charset="-122"/>
+                <a:cs typeface="Arial" pitchFamily="34" charset="-120"/>
+              </a:rPr>
+              <a:t>Abschluss</a:t>
+            </a:r>
+            <a:endParaRPr lang="en-US" sz="1050" dirty="0"/>
+          </a:p>
+        </p:txBody>
+      </p:sp>
+      <p:sp>
+        <p:nvSpPr>
+          <p:cNvPr id="22" name="Text 20"/>
+          <p:cNvSpPr/>
+          <p:nvPr/>
+        </p:nvSpPr>
+        <p:spPr>
+          <a:xfrm>
+            <a:off x="8028432" y="4722876"/>
+            <a:ext cx="548640" cy="237744"/>
+          </a:xfrm>
+          <a:prstGeom prst="rect">
+            <a:avLst/>
+          </a:prstGeom>
+          <a:noFill/>
+          <a:ln/>
+        </p:spPr>
+        <p:txBody>
+          <a:bodyPr wrap="square" lIns="0" tIns="0" rIns="0" bIns="0" rtlCol="0" anchor="ctr"/>
+          <a:lstStyle/>
+          <a:p>
+            <a:pPr algn="r" indent="0" marL="0">
+              <a:buNone/>
+            </a:pPr>
+            <a:r>
+              <a:rPr lang="en-US" sz="1050" dirty="0">
+                <a:solidFill>
+                  <a:srgbClr val="5C6377"/>
+                </a:solidFill>
+                <a:latin typeface="Arial" pitchFamily="34" charset="0"/>
+                <a:ea typeface="Arial" pitchFamily="34" charset="-122"/>
+                <a:cs typeface="Arial" pitchFamily="34" charset="-120"/>
+              </a:rPr>
+              <a:t>22/22</a:t>
+            </a:r>
+            <a:endParaRPr lang="en-US" sz="1050" dirty="0"/>
+          </a:p>
+        </p:txBody>
+      </p:sp>
+    </p:spTree>
+  </p:cSld>
+  <p:clrMapOvr>
+    <a:masterClrMapping/>
+  </p:clrMapOvr>
+</p:sld>
+</file>
+
+<file path=ppt/slides/slide29.xml><?xml version="1.0" encoding="utf-8"?>
+<p:sld xmlns:a="http://schemas.openxmlformats.org/drawingml/2006/main" xmlns:r="http://schemas.openxmlformats.org/officeDocument/2006/relationships" xmlns:p="http://schemas.openxmlformats.org/presentationml/2006/main">
+  <p:cSld name="Slide 29">
     <p:bg>
       <p:bgPr>
         <a:solidFill>
@@ -13278,7 +13681,7 @@
                 <a:ea typeface="Arial" pitchFamily="34" charset="-122"/>
                 <a:cs typeface="Arial" pitchFamily="34" charset="-120"/>
               </a:rPr>
-              <a:t>2/21</a:t>
+              <a:t>2/22</a:t>
             </a:r>
             <a:endParaRPr lang="en-US" sz="1050" dirty="0"/>
           </a:p>
@@ -13801,7 +14204,7 @@
                 <a:ea typeface="Arial" pitchFamily="34" charset="-122"/>
                 <a:cs typeface="Arial" pitchFamily="34" charset="-120"/>
               </a:rPr>
-              <a:t>3/21</a:t>
+              <a:t>3/22</a:t>
             </a:r>
             <a:endParaRPr lang="en-US" sz="1050" dirty="0"/>
           </a:p>
@@ -14115,7 +14518,7 @@
                 <a:ea typeface="Arial" pitchFamily="34" charset="-122"/>
                 <a:cs typeface="Arial" pitchFamily="34" charset="-120"/>
               </a:rPr>
-              <a:t>4/21</a:t>
+              <a:t>4/22</a:t>
             </a:r>
             <a:endParaRPr lang="en-US" sz="1050" dirty="0"/>
           </a:p>
@@ -15546,7 +15949,7 @@
                 <a:ea typeface="Arial" pitchFamily="34" charset="-122"/>
                 <a:cs typeface="Arial" pitchFamily="34" charset="-120"/>
               </a:rPr>
-              <a:t>5/21</a:t>
+              <a:t>5/22</a:t>
             </a:r>
             <a:endParaRPr lang="en-US" sz="1050" dirty="0"/>
           </a:p>
@@ -15860,7 +16263,7 @@
                 <a:ea typeface="Arial" pitchFamily="34" charset="-122"/>
                 <a:cs typeface="Arial" pitchFamily="34" charset="-120"/>
               </a:rPr>
-              <a:t>6/21</a:t>
+              <a:t>6/22</a:t>
             </a:r>
             <a:endParaRPr lang="en-US" sz="1050" dirty="0"/>
           </a:p>

--- a/folien/02-adressierung-subnetting.pptx
+++ b/folien/02-adressierung-subnetting.pptx
@@ -14687,7 +14687,7 @@
                 <a:ea typeface="Arial" pitchFamily="34" charset="-122"/>
                 <a:cs typeface="Arial" pitchFamily="34" charset="-120"/>
               </a:rPr>
-              <a:t>Euer Werkzeug für heute. Blockgröße = 2 hoch Hostbits – jeder Schritt halbiert.</a:t>
+              <a:t>Euer Werkzeug für heute. In der Maske gilt: Einsen = Netz, Nullen = Gerät.</a:t>
             </a:r>
             <a:endParaRPr lang="en-US" sz="1300" dirty="0"/>
           </a:p>
@@ -14702,7 +14702,7 @@
         <p:spPr>
           <a:xfrm>
             <a:off x="658368" y="1783080"/>
-            <a:ext cx="731520" cy="274320"/>
+            <a:ext cx="594360" cy="274320"/>
           </a:xfrm>
           <a:prstGeom prst="rect">
             <a:avLst/>
@@ -14740,8 +14740,8 @@
         </p:nvSpPr>
         <p:spPr>
           <a:xfrm>
-            <a:off x="1572768" y="1783080"/>
-            <a:ext cx="1737360" cy="274320"/>
+            <a:off x="1435608" y="1783080"/>
+            <a:ext cx="1554480" cy="274320"/>
           </a:xfrm>
           <a:prstGeom prst="rect">
             <a:avLst/>
@@ -14779,8 +14779,8 @@
         </p:nvSpPr>
         <p:spPr>
           <a:xfrm>
-            <a:off x="3493008" y="1783080"/>
-            <a:ext cx="2468880" cy="274320"/>
+            <a:off x="3172968" y="1783080"/>
+            <a:ext cx="1051560" cy="274320"/>
           </a:xfrm>
           <a:prstGeom prst="rect">
             <a:avLst/>
@@ -14804,6 +14804,45 @@
                 <a:ea typeface="Arial" pitchFamily="34" charset="-122"/>
                 <a:cs typeface="Arial" pitchFamily="34" charset="-120"/>
               </a:rPr>
+              <a:t>letztes Oktett</a:t>
+            </a:r>
+            <a:endParaRPr lang="en-US" sz="1050" dirty="0"/>
+          </a:p>
+        </p:txBody>
+      </p:sp>
+      <p:sp>
+        <p:nvSpPr>
+          <p:cNvPr id="9" name="Text 7"/>
+          <p:cNvSpPr/>
+          <p:nvPr/>
+        </p:nvSpPr>
+        <p:spPr>
+          <a:xfrm>
+            <a:off x="4407408" y="1783080"/>
+            <a:ext cx="1691640" cy="274320"/>
+          </a:xfrm>
+          <a:prstGeom prst="rect">
+            <a:avLst/>
+          </a:prstGeom>
+          <a:noFill/>
+          <a:ln/>
+        </p:spPr>
+        <p:txBody>
+          <a:bodyPr wrap="square" lIns="0" tIns="0" rIns="0" bIns="0" rtlCol="0" anchor="ctr"/>
+          <a:lstStyle/>
+          <a:p>
+            <a:pPr indent="0" marL="0">
+              <a:buNone/>
+            </a:pPr>
+            <a:r>
+              <a:rPr lang="en-US" sz="1050" b="1" spc="80" kern="0" dirty="0">
+                <a:solidFill>
+                  <a:srgbClr val="3843AF"/>
+                </a:solidFill>
+                <a:latin typeface="Arial" pitchFamily="34" charset="0"/>
+                <a:ea typeface="Arial" pitchFamily="34" charset="-122"/>
+                <a:cs typeface="Arial" pitchFamily="34" charset="-120"/>
+              </a:rPr>
               <a:t>Blockgröße · nutzbar</a:t>
             </a:r>
             <a:endParaRPr lang="en-US" sz="1050" dirty="0"/>
@@ -14812,14 +14851,14 @@
       </p:sp>
       <p:sp>
         <p:nvSpPr>
-          <p:cNvPr id="9" name="Shape 7"/>
+          <p:cNvPr id="10" name="Shape 8"/>
           <p:cNvSpPr/>
           <p:nvPr/>
         </p:nvSpPr>
         <p:spPr>
           <a:xfrm>
             <a:off x="566928" y="2075688"/>
-            <a:ext cx="5486400" cy="0"/>
+            <a:ext cx="5623560" cy="0"/>
           </a:xfrm>
           <a:prstGeom prst="line">
             <a:avLst/>
@@ -14835,14 +14874,14 @@
       </p:sp>
       <p:sp>
         <p:nvSpPr>
-          <p:cNvPr id="10" name="Shape 8"/>
+          <p:cNvPr id="11" name="Shape 9"/>
           <p:cNvSpPr/>
           <p:nvPr/>
         </p:nvSpPr>
         <p:spPr>
           <a:xfrm>
             <a:off x="475488" y="2148840"/>
-            <a:ext cx="5669280" cy="283464"/>
+            <a:ext cx="5806440" cy="283464"/>
           </a:xfrm>
           <a:prstGeom prst="rect">
             <a:avLst/>
@@ -14855,14 +14894,14 @@
       </p:sp>
       <p:sp>
         <p:nvSpPr>
-          <p:cNvPr id="11" name="Text 9"/>
+          <p:cNvPr id="12" name="Text 10"/>
           <p:cNvSpPr/>
           <p:nvPr/>
         </p:nvSpPr>
         <p:spPr>
           <a:xfrm>
             <a:off x="658368" y="2148840"/>
-            <a:ext cx="731520" cy="283464"/>
+            <a:ext cx="594360" cy="283464"/>
           </a:xfrm>
           <a:prstGeom prst="rect">
             <a:avLst/>
@@ -14894,14 +14933,14 @@
       </p:sp>
       <p:sp>
         <p:nvSpPr>
-          <p:cNvPr id="12" name="Text 10"/>
-          <p:cNvSpPr/>
-          <p:nvPr/>
-        </p:nvSpPr>
-        <p:spPr>
-          <a:xfrm>
-            <a:off x="1572768" y="2148840"/>
-            <a:ext cx="1737360" cy="283464"/>
+          <p:cNvPr id="13" name="Text 11"/>
+          <p:cNvSpPr/>
+          <p:nvPr/>
+        </p:nvSpPr>
+        <p:spPr>
+          <a:xfrm>
+            <a:off x="1435608" y="2148840"/>
+            <a:ext cx="1554480" cy="283464"/>
           </a:xfrm>
           <a:prstGeom prst="rect">
             <a:avLst/>
@@ -14933,14 +14972,14 @@
       </p:sp>
       <p:sp>
         <p:nvSpPr>
-          <p:cNvPr id="13" name="Text 11"/>
-          <p:cNvSpPr/>
-          <p:nvPr/>
-        </p:nvSpPr>
-        <p:spPr>
-          <a:xfrm>
-            <a:off x="3493008" y="2148840"/>
-            <a:ext cx="2468880" cy="283464"/>
+          <p:cNvPr id="14" name="Text 12"/>
+          <p:cNvSpPr/>
+          <p:nvPr/>
+        </p:nvSpPr>
+        <p:spPr>
+          <a:xfrm>
+            <a:off x="3172968" y="2148840"/>
+            <a:ext cx="1051560" cy="283464"/>
           </a:xfrm>
           <a:prstGeom prst="rect">
             <a:avLst/>
@@ -14958,6 +14997,45 @@
             <a:r>
               <a:rPr lang="en-US" sz="1100" dirty="0">
                 <a:solidFill>
+                  <a:srgbClr val="9A6310"/>
+                </a:solidFill>
+                <a:latin typeface="Arial" pitchFamily="34" charset="0"/>
+                <a:ea typeface="Arial" pitchFamily="34" charset="-122"/>
+                <a:cs typeface="Arial" pitchFamily="34" charset="-120"/>
+              </a:rPr>
+              <a:t>00000000</a:t>
+            </a:r>
+            <a:endParaRPr lang="en-US" sz="1100" dirty="0"/>
+          </a:p>
+        </p:txBody>
+      </p:sp>
+      <p:sp>
+        <p:nvSpPr>
+          <p:cNvPr id="15" name="Text 13"/>
+          <p:cNvSpPr/>
+          <p:nvPr/>
+        </p:nvSpPr>
+        <p:spPr>
+          <a:xfrm>
+            <a:off x="4407408" y="2148840"/>
+            <a:ext cx="1691640" cy="283464"/>
+          </a:xfrm>
+          <a:prstGeom prst="rect">
+            <a:avLst/>
+          </a:prstGeom>
+          <a:noFill/>
+          <a:ln/>
+        </p:spPr>
+        <p:txBody>
+          <a:bodyPr wrap="square" lIns="0" tIns="0" rIns="0" bIns="0" rtlCol="0" anchor="ctr"/>
+          <a:lstStyle/>
+          <a:p>
+            <a:pPr indent="0" marL="0">
+              <a:buNone/>
+            </a:pPr>
+            <a:r>
+              <a:rPr lang="en-US" sz="1100" dirty="0">
+                <a:solidFill>
                   <a:srgbClr val="434A63"/>
                 </a:solidFill>
                 <a:latin typeface="Arial" pitchFamily="34" charset="0"/>
@@ -14972,14 +15050,14 @@
       </p:sp>
       <p:sp>
         <p:nvSpPr>
-          <p:cNvPr id="14" name="Text 12"/>
+          <p:cNvPr id="16" name="Text 14"/>
           <p:cNvSpPr/>
           <p:nvPr/>
         </p:nvSpPr>
         <p:spPr>
           <a:xfrm>
             <a:off x="658368" y="2432304"/>
-            <a:ext cx="731520" cy="283464"/>
+            <a:ext cx="594360" cy="283464"/>
           </a:xfrm>
           <a:prstGeom prst="rect">
             <a:avLst/>
@@ -15011,14 +15089,14 @@
       </p:sp>
       <p:sp>
         <p:nvSpPr>
-          <p:cNvPr id="15" name="Text 13"/>
-          <p:cNvSpPr/>
-          <p:nvPr/>
-        </p:nvSpPr>
-        <p:spPr>
-          <a:xfrm>
-            <a:off x="1572768" y="2432304"/>
-            <a:ext cx="1737360" cy="283464"/>
+          <p:cNvPr id="17" name="Text 15"/>
+          <p:cNvSpPr/>
+          <p:nvPr/>
+        </p:nvSpPr>
+        <p:spPr>
+          <a:xfrm>
+            <a:off x="1435608" y="2432304"/>
+            <a:ext cx="1554480" cy="283464"/>
           </a:xfrm>
           <a:prstGeom prst="rect">
             <a:avLst/>
@@ -15050,31 +15128,84 @@
       </p:sp>
       <p:sp>
         <p:nvSpPr>
-          <p:cNvPr id="16" name="Text 14"/>
-          <p:cNvSpPr/>
-          <p:nvPr/>
-        </p:nvSpPr>
-        <p:spPr>
-          <a:xfrm>
-            <a:off x="3493008" y="2432304"/>
-            <a:ext cx="2468880" cy="283464"/>
-          </a:xfrm>
-          <a:prstGeom prst="rect">
-            <a:avLst/>
-          </a:prstGeom>
-          <a:noFill/>
-          <a:ln/>
-        </p:spPr>
-        <p:txBody>
-          <a:bodyPr wrap="square" lIns="0" tIns="0" rIns="0" bIns="0" rtlCol="0" anchor="ctr"/>
-          <a:lstStyle/>
-          <a:p>
+          <p:cNvPr id="18" name="Text 16"/>
+          <p:cNvSpPr/>
+          <p:nvPr/>
+        </p:nvSpPr>
+        <p:spPr>
+          <a:xfrm>
+            <a:off x="3172968" y="2432304"/>
+            <a:ext cx="1051560" cy="283464"/>
+          </a:xfrm>
+          <a:prstGeom prst="rect">
+            <a:avLst/>
+          </a:prstGeom>
+          <a:noFill/>
+          <a:ln/>
+        </p:spPr>
+        <p:txBody>
+          <a:bodyPr wrap="square" lIns="0" tIns="0" rIns="0" bIns="0" rtlCol="0" anchor="ctr"/>
+          <a:lstStyle/>
+          <a:p>
+            <a:pPr indent="0" marL="0">
+              <a:buNone/>
+            </a:pPr>
+            <a:r>
+              <a:rPr lang="en-US" sz="1100" b="1" dirty="0">
+                <a:solidFill>
+                  <a:srgbClr val="3843AF"/>
+                </a:solidFill>
+                <a:latin typeface="Arial" pitchFamily="34" charset="0"/>
+                <a:ea typeface="Arial" pitchFamily="34" charset="-122"/>
+                <a:cs typeface="Arial" pitchFamily="34" charset="-120"/>
+              </a:rPr>
+              <a:t>1</a:t>
+            </a:r>
             <a:pPr indent="0" marL="0">
               <a:buNone/>
             </a:pPr>
             <a:r>
               <a:rPr lang="en-US" sz="1100" dirty="0">
                 <a:solidFill>
+                  <a:srgbClr val="9A6310"/>
+                </a:solidFill>
+                <a:latin typeface="Arial" pitchFamily="34" charset="0"/>
+                <a:ea typeface="Arial" pitchFamily="34" charset="-122"/>
+                <a:cs typeface="Arial" pitchFamily="34" charset="-120"/>
+              </a:rPr>
+              <a:t>0000000</a:t>
+            </a:r>
+            <a:endParaRPr lang="en-US" sz="1100" dirty="0"/>
+          </a:p>
+        </p:txBody>
+      </p:sp>
+      <p:sp>
+        <p:nvSpPr>
+          <p:cNvPr id="19" name="Text 17"/>
+          <p:cNvSpPr/>
+          <p:nvPr/>
+        </p:nvSpPr>
+        <p:spPr>
+          <a:xfrm>
+            <a:off x="4407408" y="2432304"/>
+            <a:ext cx="1691640" cy="283464"/>
+          </a:xfrm>
+          <a:prstGeom prst="rect">
+            <a:avLst/>
+          </a:prstGeom>
+          <a:noFill/>
+          <a:ln/>
+        </p:spPr>
+        <p:txBody>
+          <a:bodyPr wrap="square" lIns="0" tIns="0" rIns="0" bIns="0" rtlCol="0" anchor="ctr"/>
+          <a:lstStyle/>
+          <a:p>
+            <a:pPr indent="0" marL="0">
+              <a:buNone/>
+            </a:pPr>
+            <a:r>
+              <a:rPr lang="en-US" sz="1100" dirty="0">
+                <a:solidFill>
                   <a:srgbClr val="434A63"/>
                 </a:solidFill>
                 <a:latin typeface="Arial" pitchFamily="34" charset="0"/>
@@ -15089,14 +15220,14 @@
       </p:sp>
       <p:sp>
         <p:nvSpPr>
-          <p:cNvPr id="17" name="Shape 15"/>
+          <p:cNvPr id="20" name="Shape 18"/>
           <p:cNvSpPr/>
           <p:nvPr/>
         </p:nvSpPr>
         <p:spPr>
           <a:xfrm>
             <a:off x="475488" y="2715768"/>
-            <a:ext cx="5669280" cy="283464"/>
+            <a:ext cx="5806440" cy="283464"/>
           </a:xfrm>
           <a:prstGeom prst="rect">
             <a:avLst/>
@@ -15109,14 +15240,14 @@
       </p:sp>
       <p:sp>
         <p:nvSpPr>
-          <p:cNvPr id="18" name="Text 16"/>
+          <p:cNvPr id="21" name="Text 19"/>
           <p:cNvSpPr/>
           <p:nvPr/>
         </p:nvSpPr>
         <p:spPr>
           <a:xfrm>
             <a:off x="658368" y="2715768"/>
-            <a:ext cx="731520" cy="283464"/>
+            <a:ext cx="594360" cy="283464"/>
           </a:xfrm>
           <a:prstGeom prst="rect">
             <a:avLst/>
@@ -15148,14 +15279,14 @@
       </p:sp>
       <p:sp>
         <p:nvSpPr>
-          <p:cNvPr id="19" name="Text 17"/>
-          <p:cNvSpPr/>
-          <p:nvPr/>
-        </p:nvSpPr>
-        <p:spPr>
-          <a:xfrm>
-            <a:off x="1572768" y="2715768"/>
-            <a:ext cx="1737360" cy="283464"/>
+          <p:cNvPr id="22" name="Text 20"/>
+          <p:cNvSpPr/>
+          <p:nvPr/>
+        </p:nvSpPr>
+        <p:spPr>
+          <a:xfrm>
+            <a:off x="1435608" y="2715768"/>
+            <a:ext cx="1554480" cy="283464"/>
           </a:xfrm>
           <a:prstGeom prst="rect">
             <a:avLst/>
@@ -15187,31 +15318,84 @@
       </p:sp>
       <p:sp>
         <p:nvSpPr>
-          <p:cNvPr id="20" name="Text 18"/>
-          <p:cNvSpPr/>
-          <p:nvPr/>
-        </p:nvSpPr>
-        <p:spPr>
-          <a:xfrm>
-            <a:off x="3493008" y="2715768"/>
-            <a:ext cx="2468880" cy="283464"/>
-          </a:xfrm>
-          <a:prstGeom prst="rect">
-            <a:avLst/>
-          </a:prstGeom>
-          <a:noFill/>
-          <a:ln/>
-        </p:spPr>
-        <p:txBody>
-          <a:bodyPr wrap="square" lIns="0" tIns="0" rIns="0" bIns="0" rtlCol="0" anchor="ctr"/>
-          <a:lstStyle/>
-          <a:p>
+          <p:cNvPr id="23" name="Text 21"/>
+          <p:cNvSpPr/>
+          <p:nvPr/>
+        </p:nvSpPr>
+        <p:spPr>
+          <a:xfrm>
+            <a:off x="3172968" y="2715768"/>
+            <a:ext cx="1051560" cy="283464"/>
+          </a:xfrm>
+          <a:prstGeom prst="rect">
+            <a:avLst/>
+          </a:prstGeom>
+          <a:noFill/>
+          <a:ln/>
+        </p:spPr>
+        <p:txBody>
+          <a:bodyPr wrap="square" lIns="0" tIns="0" rIns="0" bIns="0" rtlCol="0" anchor="ctr"/>
+          <a:lstStyle/>
+          <a:p>
+            <a:pPr indent="0" marL="0">
+              <a:buNone/>
+            </a:pPr>
+            <a:r>
+              <a:rPr lang="en-US" sz="1100" b="1" dirty="0">
+                <a:solidFill>
+                  <a:srgbClr val="3843AF"/>
+                </a:solidFill>
+                <a:latin typeface="Arial" pitchFamily="34" charset="0"/>
+                <a:ea typeface="Arial" pitchFamily="34" charset="-122"/>
+                <a:cs typeface="Arial" pitchFamily="34" charset="-120"/>
+              </a:rPr>
+              <a:t>11</a:t>
+            </a:r>
             <a:pPr indent="0" marL="0">
               <a:buNone/>
             </a:pPr>
             <a:r>
               <a:rPr lang="en-US" sz="1100" dirty="0">
                 <a:solidFill>
+                  <a:srgbClr val="9A6310"/>
+                </a:solidFill>
+                <a:latin typeface="Arial" pitchFamily="34" charset="0"/>
+                <a:ea typeface="Arial" pitchFamily="34" charset="-122"/>
+                <a:cs typeface="Arial" pitchFamily="34" charset="-120"/>
+              </a:rPr>
+              <a:t>000000</a:t>
+            </a:r>
+            <a:endParaRPr lang="en-US" sz="1100" dirty="0"/>
+          </a:p>
+        </p:txBody>
+      </p:sp>
+      <p:sp>
+        <p:nvSpPr>
+          <p:cNvPr id="24" name="Text 22"/>
+          <p:cNvSpPr/>
+          <p:nvPr/>
+        </p:nvSpPr>
+        <p:spPr>
+          <a:xfrm>
+            <a:off x="4407408" y="2715768"/>
+            <a:ext cx="1691640" cy="283464"/>
+          </a:xfrm>
+          <a:prstGeom prst="rect">
+            <a:avLst/>
+          </a:prstGeom>
+          <a:noFill/>
+          <a:ln/>
+        </p:spPr>
+        <p:txBody>
+          <a:bodyPr wrap="square" lIns="0" tIns="0" rIns="0" bIns="0" rtlCol="0" anchor="ctr"/>
+          <a:lstStyle/>
+          <a:p>
+            <a:pPr indent="0" marL="0">
+              <a:buNone/>
+            </a:pPr>
+            <a:r>
+              <a:rPr lang="en-US" sz="1100" dirty="0">
+                <a:solidFill>
                   <a:srgbClr val="434A63"/>
                 </a:solidFill>
                 <a:latin typeface="Arial" pitchFamily="34" charset="0"/>
@@ -15226,14 +15410,14 @@
       </p:sp>
       <p:sp>
         <p:nvSpPr>
-          <p:cNvPr id="21" name="Text 19"/>
+          <p:cNvPr id="25" name="Text 23"/>
           <p:cNvSpPr/>
           <p:nvPr/>
         </p:nvSpPr>
         <p:spPr>
           <a:xfrm>
             <a:off x="658368" y="2999232"/>
-            <a:ext cx="731520" cy="283464"/>
+            <a:ext cx="594360" cy="283464"/>
           </a:xfrm>
           <a:prstGeom prst="rect">
             <a:avLst/>
@@ -15265,14 +15449,14 @@
       </p:sp>
       <p:sp>
         <p:nvSpPr>
-          <p:cNvPr id="22" name="Text 20"/>
-          <p:cNvSpPr/>
-          <p:nvPr/>
-        </p:nvSpPr>
-        <p:spPr>
-          <a:xfrm>
-            <a:off x="1572768" y="2999232"/>
-            <a:ext cx="1737360" cy="283464"/>
+          <p:cNvPr id="26" name="Text 24"/>
+          <p:cNvSpPr/>
+          <p:nvPr/>
+        </p:nvSpPr>
+        <p:spPr>
+          <a:xfrm>
+            <a:off x="1435608" y="2999232"/>
+            <a:ext cx="1554480" cy="283464"/>
           </a:xfrm>
           <a:prstGeom prst="rect">
             <a:avLst/>
@@ -15304,31 +15488,84 @@
       </p:sp>
       <p:sp>
         <p:nvSpPr>
-          <p:cNvPr id="23" name="Text 21"/>
-          <p:cNvSpPr/>
-          <p:nvPr/>
-        </p:nvSpPr>
-        <p:spPr>
-          <a:xfrm>
-            <a:off x="3493008" y="2999232"/>
-            <a:ext cx="2468880" cy="283464"/>
-          </a:xfrm>
-          <a:prstGeom prst="rect">
-            <a:avLst/>
-          </a:prstGeom>
-          <a:noFill/>
-          <a:ln/>
-        </p:spPr>
-        <p:txBody>
-          <a:bodyPr wrap="square" lIns="0" tIns="0" rIns="0" bIns="0" rtlCol="0" anchor="ctr"/>
-          <a:lstStyle/>
-          <a:p>
+          <p:cNvPr id="27" name="Text 25"/>
+          <p:cNvSpPr/>
+          <p:nvPr/>
+        </p:nvSpPr>
+        <p:spPr>
+          <a:xfrm>
+            <a:off x="3172968" y="2999232"/>
+            <a:ext cx="1051560" cy="283464"/>
+          </a:xfrm>
+          <a:prstGeom prst="rect">
+            <a:avLst/>
+          </a:prstGeom>
+          <a:noFill/>
+          <a:ln/>
+        </p:spPr>
+        <p:txBody>
+          <a:bodyPr wrap="square" lIns="0" tIns="0" rIns="0" bIns="0" rtlCol="0" anchor="ctr"/>
+          <a:lstStyle/>
+          <a:p>
+            <a:pPr indent="0" marL="0">
+              <a:buNone/>
+            </a:pPr>
+            <a:r>
+              <a:rPr lang="en-US" sz="1100" b="1" dirty="0">
+                <a:solidFill>
+                  <a:srgbClr val="3843AF"/>
+                </a:solidFill>
+                <a:latin typeface="Arial" pitchFamily="34" charset="0"/>
+                <a:ea typeface="Arial" pitchFamily="34" charset="-122"/>
+                <a:cs typeface="Arial" pitchFamily="34" charset="-120"/>
+              </a:rPr>
+              <a:t>111</a:t>
+            </a:r>
             <a:pPr indent="0" marL="0">
               <a:buNone/>
             </a:pPr>
             <a:r>
               <a:rPr lang="en-US" sz="1100" dirty="0">
                 <a:solidFill>
+                  <a:srgbClr val="9A6310"/>
+                </a:solidFill>
+                <a:latin typeface="Arial" pitchFamily="34" charset="0"/>
+                <a:ea typeface="Arial" pitchFamily="34" charset="-122"/>
+                <a:cs typeface="Arial" pitchFamily="34" charset="-120"/>
+              </a:rPr>
+              <a:t>00000</a:t>
+            </a:r>
+            <a:endParaRPr lang="en-US" sz="1100" dirty="0"/>
+          </a:p>
+        </p:txBody>
+      </p:sp>
+      <p:sp>
+        <p:nvSpPr>
+          <p:cNvPr id="28" name="Text 26"/>
+          <p:cNvSpPr/>
+          <p:nvPr/>
+        </p:nvSpPr>
+        <p:spPr>
+          <a:xfrm>
+            <a:off x="4407408" y="2999232"/>
+            <a:ext cx="1691640" cy="283464"/>
+          </a:xfrm>
+          <a:prstGeom prst="rect">
+            <a:avLst/>
+          </a:prstGeom>
+          <a:noFill/>
+          <a:ln/>
+        </p:spPr>
+        <p:txBody>
+          <a:bodyPr wrap="square" lIns="0" tIns="0" rIns="0" bIns="0" rtlCol="0" anchor="ctr"/>
+          <a:lstStyle/>
+          <a:p>
+            <a:pPr indent="0" marL="0">
+              <a:buNone/>
+            </a:pPr>
+            <a:r>
+              <a:rPr lang="en-US" sz="1100" dirty="0">
+                <a:solidFill>
                   <a:srgbClr val="434A63"/>
                 </a:solidFill>
                 <a:latin typeface="Arial" pitchFamily="34" charset="0"/>
@@ -15343,14 +15580,14 @@
       </p:sp>
       <p:sp>
         <p:nvSpPr>
-          <p:cNvPr id="24" name="Shape 22"/>
+          <p:cNvPr id="29" name="Shape 27"/>
           <p:cNvSpPr/>
           <p:nvPr/>
         </p:nvSpPr>
         <p:spPr>
           <a:xfrm>
             <a:off x="475488" y="3282696"/>
-            <a:ext cx="5669280" cy="283464"/>
+            <a:ext cx="5806440" cy="283464"/>
           </a:xfrm>
           <a:prstGeom prst="rect">
             <a:avLst/>
@@ -15363,14 +15600,14 @@
       </p:sp>
       <p:sp>
         <p:nvSpPr>
-          <p:cNvPr id="25" name="Text 23"/>
+          <p:cNvPr id="30" name="Text 28"/>
           <p:cNvSpPr/>
           <p:nvPr/>
         </p:nvSpPr>
         <p:spPr>
           <a:xfrm>
             <a:off x="658368" y="3282696"/>
-            <a:ext cx="731520" cy="283464"/>
+            <a:ext cx="594360" cy="283464"/>
           </a:xfrm>
           <a:prstGeom prst="rect">
             <a:avLst/>
@@ -15402,14 +15639,14 @@
       </p:sp>
       <p:sp>
         <p:nvSpPr>
-          <p:cNvPr id="26" name="Text 24"/>
-          <p:cNvSpPr/>
-          <p:nvPr/>
-        </p:nvSpPr>
-        <p:spPr>
-          <a:xfrm>
-            <a:off x="1572768" y="3282696"/>
-            <a:ext cx="1737360" cy="283464"/>
+          <p:cNvPr id="31" name="Text 29"/>
+          <p:cNvSpPr/>
+          <p:nvPr/>
+        </p:nvSpPr>
+        <p:spPr>
+          <a:xfrm>
+            <a:off x="1435608" y="3282696"/>
+            <a:ext cx="1554480" cy="283464"/>
           </a:xfrm>
           <a:prstGeom prst="rect">
             <a:avLst/>
@@ -15441,31 +15678,84 @@
       </p:sp>
       <p:sp>
         <p:nvSpPr>
-          <p:cNvPr id="27" name="Text 25"/>
-          <p:cNvSpPr/>
-          <p:nvPr/>
-        </p:nvSpPr>
-        <p:spPr>
-          <a:xfrm>
-            <a:off x="3493008" y="3282696"/>
-            <a:ext cx="2468880" cy="283464"/>
-          </a:xfrm>
-          <a:prstGeom prst="rect">
-            <a:avLst/>
-          </a:prstGeom>
-          <a:noFill/>
-          <a:ln/>
-        </p:spPr>
-        <p:txBody>
-          <a:bodyPr wrap="square" lIns="0" tIns="0" rIns="0" bIns="0" rtlCol="0" anchor="ctr"/>
-          <a:lstStyle/>
-          <a:p>
+          <p:cNvPr id="32" name="Text 30"/>
+          <p:cNvSpPr/>
+          <p:nvPr/>
+        </p:nvSpPr>
+        <p:spPr>
+          <a:xfrm>
+            <a:off x="3172968" y="3282696"/>
+            <a:ext cx="1051560" cy="283464"/>
+          </a:xfrm>
+          <a:prstGeom prst="rect">
+            <a:avLst/>
+          </a:prstGeom>
+          <a:noFill/>
+          <a:ln/>
+        </p:spPr>
+        <p:txBody>
+          <a:bodyPr wrap="square" lIns="0" tIns="0" rIns="0" bIns="0" rtlCol="0" anchor="ctr"/>
+          <a:lstStyle/>
+          <a:p>
+            <a:pPr indent="0" marL="0">
+              <a:buNone/>
+            </a:pPr>
+            <a:r>
+              <a:rPr lang="en-US" sz="1100" b="1" dirty="0">
+                <a:solidFill>
+                  <a:srgbClr val="3843AF"/>
+                </a:solidFill>
+                <a:latin typeface="Arial" pitchFamily="34" charset="0"/>
+                <a:ea typeface="Arial" pitchFamily="34" charset="-122"/>
+                <a:cs typeface="Arial" pitchFamily="34" charset="-120"/>
+              </a:rPr>
+              <a:t>1111</a:t>
+            </a:r>
             <a:pPr indent="0" marL="0">
               <a:buNone/>
             </a:pPr>
             <a:r>
               <a:rPr lang="en-US" sz="1100" dirty="0">
                 <a:solidFill>
+                  <a:srgbClr val="9A6310"/>
+                </a:solidFill>
+                <a:latin typeface="Arial" pitchFamily="34" charset="0"/>
+                <a:ea typeface="Arial" pitchFamily="34" charset="-122"/>
+                <a:cs typeface="Arial" pitchFamily="34" charset="-120"/>
+              </a:rPr>
+              <a:t>0000</a:t>
+            </a:r>
+            <a:endParaRPr lang="en-US" sz="1100" dirty="0"/>
+          </a:p>
+        </p:txBody>
+      </p:sp>
+      <p:sp>
+        <p:nvSpPr>
+          <p:cNvPr id="33" name="Text 31"/>
+          <p:cNvSpPr/>
+          <p:nvPr/>
+        </p:nvSpPr>
+        <p:spPr>
+          <a:xfrm>
+            <a:off x="4407408" y="3282696"/>
+            <a:ext cx="1691640" cy="283464"/>
+          </a:xfrm>
+          <a:prstGeom prst="rect">
+            <a:avLst/>
+          </a:prstGeom>
+          <a:noFill/>
+          <a:ln/>
+        </p:spPr>
+        <p:txBody>
+          <a:bodyPr wrap="square" lIns="0" tIns="0" rIns="0" bIns="0" rtlCol="0" anchor="ctr"/>
+          <a:lstStyle/>
+          <a:p>
+            <a:pPr indent="0" marL="0">
+              <a:buNone/>
+            </a:pPr>
+            <a:r>
+              <a:rPr lang="en-US" sz="1100" dirty="0">
+                <a:solidFill>
                   <a:srgbClr val="434A63"/>
                 </a:solidFill>
                 <a:latin typeface="Arial" pitchFamily="34" charset="0"/>
@@ -15480,14 +15770,14 @@
       </p:sp>
       <p:sp>
         <p:nvSpPr>
-          <p:cNvPr id="28" name="Text 26"/>
+          <p:cNvPr id="34" name="Text 32"/>
           <p:cNvSpPr/>
           <p:nvPr/>
         </p:nvSpPr>
         <p:spPr>
           <a:xfrm>
             <a:off x="658368" y="3566160"/>
-            <a:ext cx="731520" cy="283464"/>
+            <a:ext cx="594360" cy="283464"/>
           </a:xfrm>
           <a:prstGeom prst="rect">
             <a:avLst/>
@@ -15519,14 +15809,14 @@
       </p:sp>
       <p:sp>
         <p:nvSpPr>
-          <p:cNvPr id="29" name="Text 27"/>
-          <p:cNvSpPr/>
-          <p:nvPr/>
-        </p:nvSpPr>
-        <p:spPr>
-          <a:xfrm>
-            <a:off x="1572768" y="3566160"/>
-            <a:ext cx="1737360" cy="283464"/>
+          <p:cNvPr id="35" name="Text 33"/>
+          <p:cNvSpPr/>
+          <p:nvPr/>
+        </p:nvSpPr>
+        <p:spPr>
+          <a:xfrm>
+            <a:off x="1435608" y="3566160"/>
+            <a:ext cx="1554480" cy="283464"/>
           </a:xfrm>
           <a:prstGeom prst="rect">
             <a:avLst/>
@@ -15558,31 +15848,84 @@
       </p:sp>
       <p:sp>
         <p:nvSpPr>
-          <p:cNvPr id="30" name="Text 28"/>
-          <p:cNvSpPr/>
-          <p:nvPr/>
-        </p:nvSpPr>
-        <p:spPr>
-          <a:xfrm>
-            <a:off x="3493008" y="3566160"/>
-            <a:ext cx="2468880" cy="283464"/>
-          </a:xfrm>
-          <a:prstGeom prst="rect">
-            <a:avLst/>
-          </a:prstGeom>
-          <a:noFill/>
-          <a:ln/>
-        </p:spPr>
-        <p:txBody>
-          <a:bodyPr wrap="square" lIns="0" tIns="0" rIns="0" bIns="0" rtlCol="0" anchor="ctr"/>
-          <a:lstStyle/>
-          <a:p>
+          <p:cNvPr id="36" name="Text 34"/>
+          <p:cNvSpPr/>
+          <p:nvPr/>
+        </p:nvSpPr>
+        <p:spPr>
+          <a:xfrm>
+            <a:off x="3172968" y="3566160"/>
+            <a:ext cx="1051560" cy="283464"/>
+          </a:xfrm>
+          <a:prstGeom prst="rect">
+            <a:avLst/>
+          </a:prstGeom>
+          <a:noFill/>
+          <a:ln/>
+        </p:spPr>
+        <p:txBody>
+          <a:bodyPr wrap="square" lIns="0" tIns="0" rIns="0" bIns="0" rtlCol="0" anchor="ctr"/>
+          <a:lstStyle/>
+          <a:p>
+            <a:pPr indent="0" marL="0">
+              <a:buNone/>
+            </a:pPr>
+            <a:r>
+              <a:rPr lang="en-US" sz="1100" b="1" dirty="0">
+                <a:solidFill>
+                  <a:srgbClr val="3843AF"/>
+                </a:solidFill>
+                <a:latin typeface="Arial" pitchFamily="34" charset="0"/>
+                <a:ea typeface="Arial" pitchFamily="34" charset="-122"/>
+                <a:cs typeface="Arial" pitchFamily="34" charset="-120"/>
+              </a:rPr>
+              <a:t>11111</a:t>
+            </a:r>
             <a:pPr indent="0" marL="0">
               <a:buNone/>
             </a:pPr>
             <a:r>
               <a:rPr lang="en-US" sz="1100" dirty="0">
                 <a:solidFill>
+                  <a:srgbClr val="9A6310"/>
+                </a:solidFill>
+                <a:latin typeface="Arial" pitchFamily="34" charset="0"/>
+                <a:ea typeface="Arial" pitchFamily="34" charset="-122"/>
+                <a:cs typeface="Arial" pitchFamily="34" charset="-120"/>
+              </a:rPr>
+              <a:t>000</a:t>
+            </a:r>
+            <a:endParaRPr lang="en-US" sz="1100" dirty="0"/>
+          </a:p>
+        </p:txBody>
+      </p:sp>
+      <p:sp>
+        <p:nvSpPr>
+          <p:cNvPr id="37" name="Text 35"/>
+          <p:cNvSpPr/>
+          <p:nvPr/>
+        </p:nvSpPr>
+        <p:spPr>
+          <a:xfrm>
+            <a:off x="4407408" y="3566160"/>
+            <a:ext cx="1691640" cy="283464"/>
+          </a:xfrm>
+          <a:prstGeom prst="rect">
+            <a:avLst/>
+          </a:prstGeom>
+          <a:noFill/>
+          <a:ln/>
+        </p:spPr>
+        <p:txBody>
+          <a:bodyPr wrap="square" lIns="0" tIns="0" rIns="0" bIns="0" rtlCol="0" anchor="ctr"/>
+          <a:lstStyle/>
+          <a:p>
+            <a:pPr indent="0" marL="0">
+              <a:buNone/>
+            </a:pPr>
+            <a:r>
+              <a:rPr lang="en-US" sz="1100" dirty="0">
+                <a:solidFill>
                   <a:srgbClr val="434A63"/>
                 </a:solidFill>
                 <a:latin typeface="Arial" pitchFamily="34" charset="0"/>
@@ -15597,14 +15940,14 @@
       </p:sp>
       <p:sp>
         <p:nvSpPr>
-          <p:cNvPr id="31" name="Shape 29"/>
+          <p:cNvPr id="38" name="Shape 36"/>
           <p:cNvSpPr/>
           <p:nvPr/>
         </p:nvSpPr>
         <p:spPr>
           <a:xfrm>
             <a:off x="475488" y="3849624"/>
-            <a:ext cx="5669280" cy="283464"/>
+            <a:ext cx="5806440" cy="283464"/>
           </a:xfrm>
           <a:prstGeom prst="rect">
             <a:avLst/>
@@ -15617,14 +15960,14 @@
       </p:sp>
       <p:sp>
         <p:nvSpPr>
-          <p:cNvPr id="32" name="Text 30"/>
+          <p:cNvPr id="39" name="Text 37"/>
           <p:cNvSpPr/>
           <p:nvPr/>
         </p:nvSpPr>
         <p:spPr>
           <a:xfrm>
             <a:off x="658368" y="3849624"/>
-            <a:ext cx="731520" cy="283464"/>
+            <a:ext cx="594360" cy="283464"/>
           </a:xfrm>
           <a:prstGeom prst="rect">
             <a:avLst/>
@@ -15656,14 +15999,14 @@
       </p:sp>
       <p:sp>
         <p:nvSpPr>
-          <p:cNvPr id="33" name="Text 31"/>
-          <p:cNvSpPr/>
-          <p:nvPr/>
-        </p:nvSpPr>
-        <p:spPr>
-          <a:xfrm>
-            <a:off x="1572768" y="3849624"/>
-            <a:ext cx="1737360" cy="283464"/>
+          <p:cNvPr id="40" name="Text 38"/>
+          <p:cNvSpPr/>
+          <p:nvPr/>
+        </p:nvSpPr>
+        <p:spPr>
+          <a:xfrm>
+            <a:off x="1435608" y="3849624"/>
+            <a:ext cx="1554480" cy="283464"/>
           </a:xfrm>
           <a:prstGeom prst="rect">
             <a:avLst/>
@@ -15695,31 +16038,84 @@
       </p:sp>
       <p:sp>
         <p:nvSpPr>
-          <p:cNvPr id="34" name="Text 32"/>
-          <p:cNvSpPr/>
-          <p:nvPr/>
-        </p:nvSpPr>
-        <p:spPr>
-          <a:xfrm>
-            <a:off x="3493008" y="3849624"/>
-            <a:ext cx="2468880" cy="283464"/>
-          </a:xfrm>
-          <a:prstGeom prst="rect">
-            <a:avLst/>
-          </a:prstGeom>
-          <a:noFill/>
-          <a:ln/>
-        </p:spPr>
-        <p:txBody>
-          <a:bodyPr wrap="square" lIns="0" tIns="0" rIns="0" bIns="0" rtlCol="0" anchor="ctr"/>
-          <a:lstStyle/>
-          <a:p>
+          <p:cNvPr id="41" name="Text 39"/>
+          <p:cNvSpPr/>
+          <p:nvPr/>
+        </p:nvSpPr>
+        <p:spPr>
+          <a:xfrm>
+            <a:off x="3172968" y="3849624"/>
+            <a:ext cx="1051560" cy="283464"/>
+          </a:xfrm>
+          <a:prstGeom prst="rect">
+            <a:avLst/>
+          </a:prstGeom>
+          <a:noFill/>
+          <a:ln/>
+        </p:spPr>
+        <p:txBody>
+          <a:bodyPr wrap="square" lIns="0" tIns="0" rIns="0" bIns="0" rtlCol="0" anchor="ctr"/>
+          <a:lstStyle/>
+          <a:p>
+            <a:pPr indent="0" marL="0">
+              <a:buNone/>
+            </a:pPr>
+            <a:r>
+              <a:rPr lang="en-US" sz="1100" b="1" dirty="0">
+                <a:solidFill>
+                  <a:srgbClr val="3843AF"/>
+                </a:solidFill>
+                <a:latin typeface="Arial" pitchFamily="34" charset="0"/>
+                <a:ea typeface="Arial" pitchFamily="34" charset="-122"/>
+                <a:cs typeface="Arial" pitchFamily="34" charset="-120"/>
+              </a:rPr>
+              <a:t>111111</a:t>
+            </a:r>
             <a:pPr indent="0" marL="0">
               <a:buNone/>
             </a:pPr>
             <a:r>
               <a:rPr lang="en-US" sz="1100" dirty="0">
                 <a:solidFill>
+                  <a:srgbClr val="9A6310"/>
+                </a:solidFill>
+                <a:latin typeface="Arial" pitchFamily="34" charset="0"/>
+                <a:ea typeface="Arial" pitchFamily="34" charset="-122"/>
+                <a:cs typeface="Arial" pitchFamily="34" charset="-120"/>
+              </a:rPr>
+              <a:t>00</a:t>
+            </a:r>
+            <a:endParaRPr lang="en-US" sz="1100" dirty="0"/>
+          </a:p>
+        </p:txBody>
+      </p:sp>
+      <p:sp>
+        <p:nvSpPr>
+          <p:cNvPr id="42" name="Text 40"/>
+          <p:cNvSpPr/>
+          <p:nvPr/>
+        </p:nvSpPr>
+        <p:spPr>
+          <a:xfrm>
+            <a:off x="4407408" y="3849624"/>
+            <a:ext cx="1691640" cy="283464"/>
+          </a:xfrm>
+          <a:prstGeom prst="rect">
+            <a:avLst/>
+          </a:prstGeom>
+          <a:noFill/>
+          <a:ln/>
+        </p:spPr>
+        <p:txBody>
+          <a:bodyPr wrap="square" lIns="0" tIns="0" rIns="0" bIns="0" rtlCol="0" anchor="ctr"/>
+          <a:lstStyle/>
+          <a:p>
+            <a:pPr indent="0" marL="0">
+              <a:buNone/>
+            </a:pPr>
+            <a:r>
+              <a:rPr lang="en-US" sz="1100" dirty="0">
+                <a:solidFill>
                   <a:srgbClr val="434A63"/>
                 </a:solidFill>
                 <a:latin typeface="Arial" pitchFamily="34" charset="0"/>
@@ -15734,7 +16130,7 @@
       </p:sp>
       <p:sp>
         <p:nvSpPr>
-          <p:cNvPr id="35" name="Text 33"/>
+          <p:cNvPr id="43" name="Text 41"/>
           <p:cNvSpPr/>
           <p:nvPr/>
         </p:nvSpPr>
@@ -15773,7 +16169,7 @@
       </p:sp>
       <p:pic>
         <p:nvPicPr>
-          <p:cNvPr id="36" name="Image 0" descr="/Users/jacobmenge/Desktop/kurs-26.2b-orga/folienwerkstatt/assets/diagramme/praefix-balken.png">    </p:cNvPr>
+          <p:cNvPr id="44" name="Image 0" descr="/Users/jacobmenge/Desktop/kurs-26.2b-orga/folienwerkstatt/assets/diagramme/praefix-balken.png">    </p:cNvPr>
           <p:cNvPicPr>
             <a:picLocks noChangeAspect="1"/>
           </p:cNvPicPr>
@@ -15797,7 +16193,7 @@
       </p:pic>
       <p:sp>
         <p:nvSpPr>
-          <p:cNvPr id="37" name="Shape 34"/>
+          <p:cNvPr id="45" name="Shape 42"/>
           <p:cNvSpPr/>
           <p:nvPr/>
         </p:nvSpPr>
@@ -15817,7 +16213,7 @@
       </p:sp>
       <p:sp>
         <p:nvSpPr>
-          <p:cNvPr id="38" name="Text 35"/>
+          <p:cNvPr id="46" name="Text 43"/>
           <p:cNvSpPr/>
           <p:nvPr/>
         </p:nvSpPr>
@@ -15856,7 +16252,7 @@
       </p:sp>
       <p:sp>
         <p:nvSpPr>
-          <p:cNvPr id="39" name="Shape 36"/>
+          <p:cNvPr id="47" name="Shape 44"/>
           <p:cNvSpPr/>
           <p:nvPr/>
         </p:nvSpPr>
@@ -15879,7 +16275,7 @@
       </p:sp>
       <p:sp>
         <p:nvSpPr>
-          <p:cNvPr id="40" name="Text 37"/>
+          <p:cNvPr id="48" name="Text 45"/>
           <p:cNvSpPr/>
           <p:nvPr/>
         </p:nvSpPr>
@@ -15918,7 +16314,7 @@
       </p:sp>
       <p:sp>
         <p:nvSpPr>
-          <p:cNvPr id="41" name="Text 38"/>
+          <p:cNvPr id="49" name="Text 46"/>
           <p:cNvSpPr/>
           <p:nvPr/>
         </p:nvSpPr>

--- a/folien/02-adressierung-subnetting.pptx
+++ b/folien/02-adressierung-subnetting.pptx
@@ -4437,8 +4437,8 @@
         </p:blipFill>
         <p:spPr>
           <a:xfrm>
-            <a:off x="566928" y="1536192"/>
-            <a:ext cx="8010144" cy="2468880"/>
+            <a:off x="566928" y="1426464"/>
+            <a:ext cx="8010144" cy="2743200"/>
           </a:xfrm>
           <a:prstGeom prst="rect">
             <a:avLst/>
@@ -4453,7 +4453,7 @@
         </p:nvSpPr>
         <p:spPr>
           <a:xfrm>
-            <a:off x="566928" y="4206240"/>
+            <a:off x="566928" y="4288536"/>
             <a:ext cx="32004" cy="256032"/>
           </a:xfrm>
           <a:prstGeom prst="rect">
@@ -4473,7 +4473,7 @@
         </p:nvSpPr>
         <p:spPr>
           <a:xfrm>
-            <a:off x="749808" y="4160520"/>
+            <a:off x="749808" y="4242816"/>
             <a:ext cx="7827264" cy="402336"/>
           </a:xfrm>
           <a:prstGeom prst="rect">
@@ -5075,7 +5075,7 @@
       </p:pic>
       <p:pic>
         <p:nvPicPr>
-          <p:cNvPr id="6" name="Image 1" descr="/Users/jacobmenge/Desktop/kurs-26.2b-orga/folienwerkstatt/assets/diagramme/block-strahl.png">    </p:cNvPr>
+          <p:cNvPr id="6" name="Image 1" descr="/Users/jacobmenge/Desktop/kurs-26.2b-orga/folienwerkstatt/assets/diagramme/loesungsweg-a.png">    </p:cNvPr>
           <p:cNvPicPr>
             <a:picLocks noChangeAspect="1"/>
           </p:cNvPicPr>
@@ -5089,8 +5089,8 @@
         </p:blipFill>
         <p:spPr>
           <a:xfrm>
-            <a:off x="566928" y="3200400"/>
-            <a:ext cx="8010144" cy="1115568"/>
+            <a:off x="566928" y="3310128"/>
+            <a:ext cx="8010144" cy="877824"/>
           </a:xfrm>
           <a:prstGeom prst="rect">
             <a:avLst/>
@@ -5658,7 +5658,7 @@
         </p:blipFill>
         <p:spPr>
           <a:xfrm>
-            <a:off x="566928" y="1874520"/>
+            <a:off x="566928" y="1572768"/>
             <a:ext cx="8010144" cy="1536192"/>
           </a:xfrm>
           <a:prstGeom prst="rect">
@@ -5666,68 +5666,33 @@
           </a:prstGeom>
         </p:spPr>
       </p:pic>
-      <p:sp>
-        <p:nvSpPr>
-          <p:cNvPr id="6" name="Shape 3"/>
-          <p:cNvSpPr/>
-          <p:nvPr/>
-        </p:nvSpPr>
-        <p:spPr>
-          <a:xfrm>
-            <a:off x="566928" y="4160520"/>
-            <a:ext cx="32004" cy="256032"/>
-          </a:xfrm>
-          <a:prstGeom prst="rect">
-            <a:avLst/>
-          </a:prstGeom>
-          <a:solidFill>
-            <a:srgbClr val="0F7C86"/>
-          </a:solidFill>
-          <a:ln/>
-        </p:spPr>
-      </p:sp>
-      <p:sp>
-        <p:nvSpPr>
-          <p:cNvPr id="7" name="Text 4"/>
-          <p:cNvSpPr/>
-          <p:nvPr/>
-        </p:nvSpPr>
-        <p:spPr>
-          <a:xfrm>
-            <a:off x="749808" y="4114800"/>
-            <a:ext cx="7827264" cy="402336"/>
-          </a:xfrm>
-          <a:prstGeom prst="rect">
-            <a:avLst/>
-          </a:prstGeom>
-          <a:noFill/>
-          <a:ln/>
-        </p:spPr>
-        <p:txBody>
-          <a:bodyPr wrap="square" lIns="0" tIns="0" rIns="0" bIns="0" rtlCol="0" anchor="ctr"/>
-          <a:lstStyle/>
-          <a:p>
-            <a:pPr indent="0" marL="0">
-              <a:buNone/>
-            </a:pPr>
-            <a:r>
-              <a:rPr lang="en-US" sz="1200" b="1" dirty="0">
-                <a:solidFill>
-                  <a:srgbClr val="5C6377"/>
-                </a:solidFill>
-                <a:latin typeface="Arial" pitchFamily="34" charset="0"/>
-                <a:ea typeface="Arial" pitchFamily="34" charset="-122"/>
-                <a:cs typeface="Arial" pitchFamily="34" charset="-120"/>
-              </a:rPr>
-              <a:t>Das Rezept: Hostbits → Blockgröße → Block finden → minus zwei.</a:t>
-            </a:r>
-            <a:endParaRPr lang="en-US" sz="1200" dirty="0"/>
-          </a:p>
-        </p:txBody>
-      </p:sp>
-      <p:sp>
-        <p:nvSpPr>
-          <p:cNvPr id="8" name="Shape 5"/>
+      <p:pic>
+        <p:nvPicPr>
+          <p:cNvPr id="6" name="Image 1" descr="/Users/jacobmenge/Desktop/kurs-26.2b-orga/folienwerkstatt/assets/diagramme/loesungsweg-b.png">    </p:cNvPr>
+          <p:cNvPicPr>
+            <a:picLocks noChangeAspect="1"/>
+          </p:cNvPicPr>
+          <p:nvPr/>
+        </p:nvPicPr>
+        <p:blipFill>
+          <a:blip r:embed="rId2"/>
+          <a:stretch>
+            <a:fillRect/>
+          </a:stretch>
+        </p:blipFill>
+        <p:spPr>
+          <a:xfrm>
+            <a:off x="566928" y="3310128"/>
+            <a:ext cx="8010144" cy="877824"/>
+          </a:xfrm>
+          <a:prstGeom prst="rect">
+            <a:avLst/>
+          </a:prstGeom>
+        </p:spPr>
+      </p:pic>
+      <p:sp>
+        <p:nvSpPr>
+          <p:cNvPr id="7" name="Shape 3"/>
           <p:cNvSpPr/>
           <p:nvPr/>
         </p:nvSpPr>
@@ -5750,7 +5715,7 @@
       </p:sp>
       <p:sp>
         <p:nvSpPr>
-          <p:cNvPr id="9" name="Text 6"/>
+          <p:cNvPr id="8" name="Text 4"/>
           <p:cNvSpPr/>
           <p:nvPr/>
         </p:nvSpPr>
@@ -5789,7 +5754,7 @@
       </p:sp>
       <p:sp>
         <p:nvSpPr>
-          <p:cNvPr id="10" name="Text 7"/>
+          <p:cNvPr id="9" name="Text 5"/>
           <p:cNvSpPr/>
           <p:nvPr/>
         </p:nvSpPr>
@@ -6286,7 +6251,7 @@
         </p:blipFill>
         <p:spPr>
           <a:xfrm>
-            <a:off x="566928" y="1874520"/>
+            <a:off x="566928" y="1572768"/>
             <a:ext cx="8010144" cy="1536192"/>
           </a:xfrm>
           <a:prstGeom prst="rect">
@@ -6294,68 +6259,33 @@
           </a:prstGeom>
         </p:spPr>
       </p:pic>
-      <p:sp>
-        <p:nvSpPr>
-          <p:cNvPr id="6" name="Shape 3"/>
-          <p:cNvSpPr/>
-          <p:nvPr/>
-        </p:nvSpPr>
-        <p:spPr>
-          <a:xfrm>
-            <a:off x="566928" y="4160520"/>
-            <a:ext cx="32004" cy="256032"/>
-          </a:xfrm>
-          <a:prstGeom prst="rect">
-            <a:avLst/>
-          </a:prstGeom>
-          <a:solidFill>
-            <a:srgbClr val="0F7C86"/>
-          </a:solidFill>
-          <a:ln/>
-        </p:spPr>
-      </p:sp>
-      <p:sp>
-        <p:nvSpPr>
-          <p:cNvPr id="7" name="Text 4"/>
-          <p:cNvSpPr/>
-          <p:nvPr/>
-        </p:nvSpPr>
-        <p:spPr>
-          <a:xfrm>
-            <a:off x="749808" y="4114800"/>
-            <a:ext cx="7827264" cy="402336"/>
-          </a:xfrm>
-          <a:prstGeom prst="rect">
-            <a:avLst/>
-          </a:prstGeom>
-          <a:noFill/>
-          <a:ln/>
-        </p:spPr>
-        <p:txBody>
-          <a:bodyPr wrap="square" lIns="0" tIns="0" rIns="0" bIns="0" rtlCol="0" anchor="ctr"/>
-          <a:lstStyle/>
-          <a:p>
-            <a:pPr indent="0" marL="0">
-              <a:buNone/>
-            </a:pPr>
-            <a:r>
-              <a:rPr lang="en-US" sz="1200" b="1" dirty="0">
-                <a:solidFill>
-                  <a:srgbClr val="5C6377"/>
-                </a:solidFill>
-                <a:latin typeface="Arial" pitchFamily="34" charset="0"/>
-                <a:ea typeface="Arial" pitchFamily="34" charset="-122"/>
-                <a:cs typeface="Arial" pitchFamily="34" charset="-120"/>
-              </a:rPr>
-              <a:t>Das Rezept: Hostbits → Blockgröße → Block finden → minus zwei.</a:t>
-            </a:r>
-            <a:endParaRPr lang="en-US" sz="1200" dirty="0"/>
-          </a:p>
-        </p:txBody>
-      </p:sp>
-      <p:sp>
-        <p:nvSpPr>
-          <p:cNvPr id="8" name="Shape 5"/>
+      <p:pic>
+        <p:nvPicPr>
+          <p:cNvPr id="6" name="Image 1" descr="/Users/jacobmenge/Desktop/kurs-26.2b-orga/folienwerkstatt/assets/diagramme/loesungsweg-c.png">    </p:cNvPr>
+          <p:cNvPicPr>
+            <a:picLocks noChangeAspect="1"/>
+          </p:cNvPicPr>
+          <p:nvPr/>
+        </p:nvPicPr>
+        <p:blipFill>
+          <a:blip r:embed="rId2"/>
+          <a:stretch>
+            <a:fillRect/>
+          </a:stretch>
+        </p:blipFill>
+        <p:spPr>
+          <a:xfrm>
+            <a:off x="566928" y="3310128"/>
+            <a:ext cx="8010144" cy="877824"/>
+          </a:xfrm>
+          <a:prstGeom prst="rect">
+            <a:avLst/>
+          </a:prstGeom>
+        </p:spPr>
+      </p:pic>
+      <p:sp>
+        <p:nvSpPr>
+          <p:cNvPr id="7" name="Shape 3"/>
           <p:cNvSpPr/>
           <p:nvPr/>
         </p:nvSpPr>
@@ -6378,7 +6308,7 @@
       </p:sp>
       <p:sp>
         <p:nvSpPr>
-          <p:cNvPr id="9" name="Text 6"/>
+          <p:cNvPr id="8" name="Text 4"/>
           <p:cNvSpPr/>
           <p:nvPr/>
         </p:nvSpPr>
@@ -6417,7 +6347,7 @@
       </p:sp>
       <p:sp>
         <p:nvSpPr>
-          <p:cNvPr id="10" name="Text 7"/>
+          <p:cNvPr id="9" name="Text 5"/>
           <p:cNvSpPr/>
           <p:nvPr/>
         </p:nvSpPr>

--- a/folien/02-adressierung-subnetting.pptx
+++ b/folien/02-adressierung-subnetting.pptx
@@ -11593,7 +11593,7 @@
         </p:nvSpPr>
         <p:spPr>
           <a:xfrm>
-            <a:off x="658368" y="1737360"/>
+            <a:off x="658368" y="1627632"/>
             <a:ext cx="1554480" cy="274320"/>
           </a:xfrm>
           <a:prstGeom prst="rect">
@@ -11632,7 +11632,7 @@
         </p:nvSpPr>
         <p:spPr>
           <a:xfrm>
-            <a:off x="2395728" y="1737360"/>
+            <a:off x="2395728" y="1627632"/>
             <a:ext cx="731520" cy="274320"/>
           </a:xfrm>
           <a:prstGeom prst="rect">
@@ -11671,7 +11671,7 @@
         </p:nvSpPr>
         <p:spPr>
           <a:xfrm>
-            <a:off x="3310128" y="1737360"/>
+            <a:off x="3310128" y="1627632"/>
             <a:ext cx="5175504" cy="274320"/>
           </a:xfrm>
           <a:prstGeom prst="rect">
@@ -11710,7 +11710,7 @@
         </p:nvSpPr>
         <p:spPr>
           <a:xfrm>
-            <a:off x="566928" y="2029968"/>
+            <a:off x="566928" y="1920240"/>
             <a:ext cx="8010144" cy="0"/>
           </a:xfrm>
           <a:prstGeom prst="line">
@@ -11733,8 +11733,8 @@
         </p:nvSpPr>
         <p:spPr>
           <a:xfrm>
-            <a:off x="475488" y="2103120"/>
-            <a:ext cx="8193024" cy="365760"/>
+            <a:off x="475488" y="1993392"/>
+            <a:ext cx="8193024" cy="310896"/>
           </a:xfrm>
           <a:prstGeom prst="rect">
             <a:avLst/>
@@ -11753,8 +11753,8 @@
         </p:nvSpPr>
         <p:spPr>
           <a:xfrm>
-            <a:off x="658368" y="2103120"/>
-            <a:ext cx="1554480" cy="365760"/>
+            <a:off x="658368" y="1993392"/>
+            <a:ext cx="1554480" cy="310896"/>
           </a:xfrm>
           <a:prstGeom prst="rect">
             <a:avLst/>
@@ -11792,8 +11792,8 @@
         </p:nvSpPr>
         <p:spPr>
           <a:xfrm>
-            <a:off x="2395728" y="2103120"/>
-            <a:ext cx="731520" cy="365760"/>
+            <a:off x="2395728" y="1993392"/>
+            <a:ext cx="731520" cy="310896"/>
           </a:xfrm>
           <a:prstGeom prst="rect">
             <a:avLst/>
@@ -11831,8 +11831,8 @@
         </p:nvSpPr>
         <p:spPr>
           <a:xfrm>
-            <a:off x="3310128" y="2103120"/>
-            <a:ext cx="5175504" cy="365760"/>
+            <a:off x="3310128" y="1993392"/>
+            <a:ext cx="5175504" cy="310896"/>
           </a:xfrm>
           <a:prstGeom prst="rect">
             <a:avLst/>
@@ -11870,8 +11870,8 @@
         </p:nvSpPr>
         <p:spPr>
           <a:xfrm>
-            <a:off x="658368" y="2468880"/>
-            <a:ext cx="1554480" cy="365760"/>
+            <a:off x="658368" y="2304288"/>
+            <a:ext cx="1554480" cy="310896"/>
           </a:xfrm>
           <a:prstGeom prst="rect">
             <a:avLst/>
@@ -11909,8 +11909,8 @@
         </p:nvSpPr>
         <p:spPr>
           <a:xfrm>
-            <a:off x="2395728" y="2468880"/>
-            <a:ext cx="731520" cy="365760"/>
+            <a:off x="2395728" y="2304288"/>
+            <a:ext cx="731520" cy="310896"/>
           </a:xfrm>
           <a:prstGeom prst="rect">
             <a:avLst/>
@@ -11948,8 +11948,8 @@
         </p:nvSpPr>
         <p:spPr>
           <a:xfrm>
-            <a:off x="3310128" y="2468880"/>
-            <a:ext cx="5175504" cy="365760"/>
+            <a:off x="3310128" y="2304288"/>
+            <a:ext cx="5175504" cy="310896"/>
           </a:xfrm>
           <a:prstGeom prst="rect">
             <a:avLst/>
@@ -11987,8 +11987,8 @@
         </p:nvSpPr>
         <p:spPr>
           <a:xfrm>
-            <a:off x="475488" y="2834640"/>
-            <a:ext cx="8193024" cy="365760"/>
+            <a:off x="475488" y="2615184"/>
+            <a:ext cx="8193024" cy="310896"/>
           </a:xfrm>
           <a:prstGeom prst="rect">
             <a:avLst/>
@@ -12007,8 +12007,8 @@
         </p:nvSpPr>
         <p:spPr>
           <a:xfrm>
-            <a:off x="658368" y="2834640"/>
-            <a:ext cx="1554480" cy="365760"/>
+            <a:off x="658368" y="2615184"/>
+            <a:ext cx="1554480" cy="310896"/>
           </a:xfrm>
           <a:prstGeom prst="rect">
             <a:avLst/>
@@ -12046,8 +12046,8 @@
         </p:nvSpPr>
         <p:spPr>
           <a:xfrm>
-            <a:off x="2395728" y="2834640"/>
-            <a:ext cx="731520" cy="365760"/>
+            <a:off x="2395728" y="2615184"/>
+            <a:ext cx="731520" cy="310896"/>
           </a:xfrm>
           <a:prstGeom prst="rect">
             <a:avLst/>
@@ -12085,8 +12085,8 @@
         </p:nvSpPr>
         <p:spPr>
           <a:xfrm>
-            <a:off x="3310128" y="2834640"/>
-            <a:ext cx="5175504" cy="365760"/>
+            <a:off x="3310128" y="2615184"/>
+            <a:ext cx="5175504" cy="310896"/>
           </a:xfrm>
           <a:prstGeom prst="rect">
             <a:avLst/>
@@ -12124,8 +12124,8 @@
         </p:nvSpPr>
         <p:spPr>
           <a:xfrm>
-            <a:off x="658368" y="3200400"/>
-            <a:ext cx="1554480" cy="365760"/>
+            <a:off x="658368" y="2926080"/>
+            <a:ext cx="1554480" cy="310896"/>
           </a:xfrm>
           <a:prstGeom prst="rect">
             <a:avLst/>
@@ -12163,8 +12163,8 @@
         </p:nvSpPr>
         <p:spPr>
           <a:xfrm>
-            <a:off x="2395728" y="3200400"/>
-            <a:ext cx="731520" cy="365760"/>
+            <a:off x="2395728" y="2926080"/>
+            <a:ext cx="731520" cy="310896"/>
           </a:xfrm>
           <a:prstGeom prst="rect">
             <a:avLst/>
@@ -12202,8 +12202,8 @@
         </p:nvSpPr>
         <p:spPr>
           <a:xfrm>
-            <a:off x="3310128" y="3200400"/>
-            <a:ext cx="5175504" cy="365760"/>
+            <a:off x="3310128" y="2926080"/>
+            <a:ext cx="5175504" cy="310896"/>
           </a:xfrm>
           <a:prstGeom prst="rect">
             <a:avLst/>
@@ -12233,152 +12233,39 @@
           </a:p>
         </p:txBody>
       </p:sp>
-      <p:sp>
-        <p:nvSpPr>
-          <p:cNvPr id="23" name="Shape 21"/>
-          <p:cNvSpPr/>
-          <p:nvPr/>
-        </p:nvSpPr>
-        <p:spPr>
-          <a:xfrm>
-            <a:off x="475488" y="3566160"/>
-            <a:ext cx="8193024" cy="365760"/>
-          </a:xfrm>
-          <a:prstGeom prst="rect">
-            <a:avLst/>
-          </a:prstGeom>
-          <a:solidFill>
-            <a:srgbClr val="F5F6FC"/>
-          </a:solidFill>
-          <a:ln/>
-        </p:spPr>
-      </p:sp>
-      <p:sp>
-        <p:nvSpPr>
-          <p:cNvPr id="24" name="Text 22"/>
-          <p:cNvSpPr/>
-          <p:nvPr/>
-        </p:nvSpPr>
-        <p:spPr>
-          <a:xfrm>
-            <a:off x="658368" y="3566160"/>
-            <a:ext cx="1554480" cy="365760"/>
-          </a:xfrm>
-          <a:prstGeom prst="rect">
-            <a:avLst/>
-          </a:prstGeom>
-          <a:noFill/>
-          <a:ln/>
-        </p:spPr>
-        <p:txBody>
-          <a:bodyPr wrap="square" lIns="0" tIns="0" rIns="0" bIns="0" rtlCol="0" anchor="ctr"/>
-          <a:lstStyle/>
-          <a:p>
-            <a:pPr indent="0" marL="0">
-              <a:buNone/>
-            </a:pPr>
-            <a:r>
-              <a:rPr lang="en-US" sz="1150" b="1" dirty="0">
-                <a:solidFill>
-                  <a:srgbClr val="272E52"/>
-                </a:solidFill>
-                <a:latin typeface="Arial" pitchFamily="34" charset="0"/>
-                <a:ea typeface="Arial" pitchFamily="34" charset="-122"/>
-                <a:cs typeface="Arial" pitchFamily="34" charset="-120"/>
-              </a:rPr>
-              <a:t>Reserve</a:t>
-            </a:r>
-            <a:endParaRPr lang="en-US" sz="1150" dirty="0"/>
-          </a:p>
-        </p:txBody>
-      </p:sp>
-      <p:sp>
-        <p:nvSpPr>
-          <p:cNvPr id="25" name="Text 23"/>
-          <p:cNvSpPr/>
-          <p:nvPr/>
-        </p:nvSpPr>
-        <p:spPr>
-          <a:xfrm>
-            <a:off x="2395728" y="3566160"/>
-            <a:ext cx="731520" cy="365760"/>
-          </a:xfrm>
-          <a:prstGeom prst="rect">
-            <a:avLst/>
-          </a:prstGeom>
-          <a:noFill/>
-          <a:ln/>
-        </p:spPr>
-        <p:txBody>
-          <a:bodyPr wrap="square" lIns="0" tIns="0" rIns="0" bIns="0" rtlCol="0" anchor="ctr"/>
-          <a:lstStyle/>
-          <a:p>
-            <a:pPr indent="0" marL="0">
-              <a:buNone/>
-            </a:pPr>
-            <a:r>
-              <a:rPr lang="en-US" sz="1150" dirty="0">
-                <a:solidFill>
-                  <a:srgbClr val="434A63"/>
-                </a:solidFill>
-                <a:latin typeface="Arial" pitchFamily="34" charset="0"/>
-                <a:ea typeface="Arial" pitchFamily="34" charset="-122"/>
-                <a:cs typeface="Arial" pitchFamily="34" charset="-120"/>
-              </a:rPr>
-              <a:t>–</a:t>
-            </a:r>
-            <a:endParaRPr lang="en-US" sz="1150" dirty="0"/>
-          </a:p>
-        </p:txBody>
-      </p:sp>
-      <p:sp>
-        <p:nvSpPr>
-          <p:cNvPr id="26" name="Text 24"/>
-          <p:cNvSpPr/>
-          <p:nvPr/>
-        </p:nvSpPr>
-        <p:spPr>
-          <a:xfrm>
-            <a:off x="3310128" y="3566160"/>
-            <a:ext cx="5175504" cy="365760"/>
-          </a:xfrm>
-          <a:prstGeom prst="rect">
-            <a:avLst/>
-          </a:prstGeom>
-          <a:noFill/>
-          <a:ln/>
-        </p:spPr>
-        <p:txBody>
-          <a:bodyPr wrap="square" lIns="0" tIns="0" rIns="0" bIns="0" rtlCol="0" anchor="ctr"/>
-          <a:lstStyle/>
-          <a:p>
-            <a:pPr indent="0" marL="0">
-              <a:buNone/>
-            </a:pPr>
-            <a:r>
-              <a:rPr lang="en-US" sz="1150" dirty="0">
-                <a:solidFill>
-                  <a:srgbClr val="434A63"/>
-                </a:solidFill>
-                <a:latin typeface="Arial" pitchFamily="34" charset="0"/>
-                <a:ea typeface="Arial" pitchFamily="34" charset="-122"/>
-                <a:cs typeface="Arial" pitchFamily="34" charset="-120"/>
-              </a:rPr>
-              <a:t>.240 bis .255 bleiben frei – Platz zum Wachsen</a:t>
-            </a:r>
-            <a:endParaRPr lang="en-US" sz="1150" dirty="0"/>
-          </a:p>
-        </p:txBody>
-      </p:sp>
-      <p:sp>
-        <p:nvSpPr>
-          <p:cNvPr id="27" name="Shape 25"/>
-          <p:cNvSpPr/>
-          <p:nvPr/>
-        </p:nvSpPr>
-        <p:spPr>
-          <a:xfrm>
-            <a:off x="566928" y="4160520"/>
+      <p:pic>
+        <p:nvPicPr>
+          <p:cNvPr id="23" name="Image 0" descr="/Users/jacobmenge/Desktop/kurs-26.2b-orga/folienwerkstatt/assets/diagramme/subnetz-plan.png">    </p:cNvPr>
+          <p:cNvPicPr>
+            <a:picLocks noChangeAspect="1"/>
+          </p:cNvPicPr>
+          <p:nvPr/>
+        </p:nvPicPr>
+        <p:blipFill>
+          <a:blip r:embed="rId1"/>
+          <a:stretch>
+            <a:fillRect/>
+          </a:stretch>
+        </p:blipFill>
+        <p:spPr>
+          <a:xfrm>
+            <a:off x="566928" y="3364992"/>
+            <a:ext cx="8010144" cy="777240"/>
+          </a:xfrm>
+          <a:prstGeom prst="rect">
+            <a:avLst/>
+          </a:prstGeom>
+        </p:spPr>
+      </p:pic>
+      <p:sp>
+        <p:nvSpPr>
+          <p:cNvPr id="24" name="Shape 21"/>
+          <p:cNvSpPr/>
+          <p:nvPr/>
+        </p:nvSpPr>
+        <p:spPr>
+          <a:xfrm>
+            <a:off x="566928" y="4288536"/>
             <a:ext cx="32004" cy="256032"/>
           </a:xfrm>
           <a:prstGeom prst="rect">
@@ -12392,13 +12279,13 @@
       </p:sp>
       <p:sp>
         <p:nvSpPr>
-          <p:cNvPr id="28" name="Text 26"/>
-          <p:cNvSpPr/>
-          <p:nvPr/>
-        </p:nvSpPr>
-        <p:spPr>
-          <a:xfrm>
-            <a:off x="749808" y="4114800"/>
+          <p:cNvPr id="25" name="Text 22"/>
+          <p:cNvSpPr/>
+          <p:nvPr/>
+        </p:nvSpPr>
+        <p:spPr>
+          <a:xfrm>
+            <a:off x="749808" y="4242816"/>
             <a:ext cx="7827264" cy="402336"/>
           </a:xfrm>
           <a:prstGeom prst="rect">
@@ -12423,7 +12310,7 @@
                 <a:ea typeface="Arial" pitchFamily="34" charset="-122"/>
                 <a:cs typeface="Arial" pitchFamily="34" charset="-120"/>
               </a:rPr>
-              <a:t>Größte zuerst vermeidet Lücken. Probe: 128 + 64 + 32 + 16 = 240 ≤ 256 – passt.</a:t>
+              <a:t>Größte zuerst vermeidet Lücken. Probe: 128 + 64 + 32 + 16 = 240 ≤ 256 – der Rest bleibt Reserve.</a:t>
             </a:r>
             <a:endParaRPr lang="en-US" sz="1200" dirty="0"/>
           </a:p>
@@ -12431,7 +12318,7 @@
       </p:sp>
       <p:sp>
         <p:nvSpPr>
-          <p:cNvPr id="29" name="Shape 27"/>
+          <p:cNvPr id="26" name="Shape 23"/>
           <p:cNvSpPr/>
           <p:nvPr/>
         </p:nvSpPr>
@@ -12454,7 +12341,7 @@
       </p:sp>
       <p:sp>
         <p:nvSpPr>
-          <p:cNvPr id="30" name="Text 28"/>
+          <p:cNvPr id="27" name="Text 24"/>
           <p:cNvSpPr/>
           <p:nvPr/>
         </p:nvSpPr>
@@ -12493,7 +12380,7 @@
       </p:sp>
       <p:sp>
         <p:nvSpPr>
-          <p:cNvPr id="31" name="Text 29"/>
+          <p:cNvPr id="28" name="Text 25"/>
           <p:cNvSpPr/>
           <p:nvPr/>
         </p:nvSpPr>
